--- a/docs/bottleneck-survey-onepager.pptx
+++ b/docs/bottleneck-survey-onepager.pptx
@@ -883,8 +883,8 @@
         </p:nvSpPr>
         <p:spPr>
           <a:xfrm>
-            <a:off x="228600" y="73152"/>
-            <a:ext cx="6766560" cy="457200"/>
+            <a:off x="228600" y="54864"/>
+            <a:ext cx="8686800" cy="402336"/>
           </a:xfrm>
           <a:prstGeom prst="rect">
             <a:avLst/>
@@ -896,11 +896,11 @@
           <a:bodyPr wrap="square" lIns="0" tIns="0" rIns="0" bIns="0" rtlCol="0" anchor="ctr"/>
           <a:lstStyle/>
           <a:p>
-            <a:pPr algn="l" indent="0" marL="0">
-              <a:buNone/>
-            </a:pPr>
-            <a:r>
-              <a:rPr lang="en-US" sz="2000" b="1" dirty="0">
+            <a:pPr indent="0" marL="0">
+              <a:buNone/>
+            </a:pPr>
+            <a:r>
+              <a:rPr lang="en-US" sz="1550" b="1" dirty="0">
                 <a:solidFill>
                   <a:srgbClr val="1F3D20"/>
                 </a:solidFill>
@@ -908,9 +908,9 @@
                 <a:ea typeface="Meiryo UI" pitchFamily="34" charset="-122"/>
                 <a:cs typeface="Meiryo UI" pitchFamily="34" charset="-120"/>
               </a:rPr>
-              <a:t>生産性ボトルネック調査 推進方法</a:t>
-            </a:r>
-            <a:endParaRPr lang="en-US" sz="2000" dirty="0"/>
+              <a:t>生産性ボトルネック調査 推進方法 Ver2.0 — 基準・規定に遡る順序駆動アプローチ</a:t>
+            </a:r>
+            <a:endParaRPr lang="en-US" sz="1550" dirty="0"/>
           </a:p>
         </p:txBody>
       </p:sp>
@@ -922,8 +922,8 @@
         </p:nvSpPr>
         <p:spPr>
           <a:xfrm>
-            <a:off x="6400800" y="73152"/>
-            <a:ext cx="5559552" cy="457200"/>
+            <a:off x="9006840" y="54864"/>
+            <a:ext cx="2953512" cy="402336"/>
           </a:xfrm>
           <a:prstGeom prst="rect">
             <a:avLst/>
@@ -939,7 +939,7 @@
               <a:buNone/>
             </a:pPr>
             <a:r>
-              <a:rPr lang="en-US" sz="800" dirty="0">
+              <a:rPr lang="en-US" sz="650" dirty="0">
                 <a:solidFill>
                   <a:srgbClr val="595959"/>
                 </a:solidFill>
@@ -947,9 +947,9 @@
                 <a:ea typeface="Meiryo UI" pitchFamily="34" charset="-122"/>
                 <a:cs typeface="Meiryo UI" pitchFamily="34" charset="-120"/>
               </a:rPr>
-              <a:t>対象: 明石工場 オーラルヘルスケア(植毛 / ハブラシ包装 / ハミガキ包装)｜2026年8月｜効果・金額は仮説値(Phase 1調査で検証)</a:t>
-            </a:r>
-            <a:endParaRPr lang="en-US" sz="800" dirty="0"/>
+              <a:t>対象: 明石工場 オーラルヘルスケア(植毛/ハブラシ包装/ハミガキ包装)｜2026年8月｜人事PJT(規定→業務→システム)の方法論を生産へ移植</a:t>
+            </a:r>
+            <a:endParaRPr lang="en-US" sz="650" dirty="0"/>
           </a:p>
         </p:txBody>
       </p:sp>
@@ -961,12 +961,485 @@
         </p:nvSpPr>
         <p:spPr>
           <a:xfrm>
-            <a:off x="228600" y="566928"/>
-            <a:ext cx="2843784" cy="1353312"/>
+            <a:off x="228600" y="512064"/>
+            <a:ext cx="11731752" cy="694944"/>
           </a:xfrm>
           <a:prstGeom prst="roundRect">
             <a:avLst>
-              <a:gd name="adj" fmla="val 3378"/>
+              <a:gd name="adj" fmla="val 6579"/>
+            </a:avLst>
+          </a:prstGeom>
+          <a:solidFill>
+            <a:srgbClr val="2C5F2D"/>
+          </a:solidFill>
+          <a:ln w="12700">
+            <a:solidFill>
+              <a:srgbClr val="2C5F2D"/>
+            </a:solidFill>
+            <a:prstDash val="solid"/>
+          </a:ln>
+        </p:spPr>
+      </p:sp>
+      <p:sp>
+        <p:nvSpPr>
+          <p:cNvPr id="5" name="Text 3"/>
+          <p:cNvSpPr/>
+          <p:nvPr/>
+        </p:nvSpPr>
+        <p:spPr>
+          <a:xfrm>
+            <a:off x="347472" y="566928"/>
+            <a:ext cx="1371600" cy="384048"/>
+          </a:xfrm>
+          <a:prstGeom prst="rect">
+            <a:avLst/>
+          </a:prstGeom>
+          <a:noFill/>
+          <a:ln/>
+        </p:spPr>
+        <p:txBody>
+          <a:bodyPr wrap="square" lIns="0" tIns="0" rIns="0" bIns="0" rtlCol="0" anchor="ctr"/>
+          <a:lstStyle/>
+          <a:p>
+            <a:pPr indent="0" marL="0">
+              <a:lnSpc>
+                <a:spcPct val="95000"/>
+              </a:lnSpc>
+              <a:buNone/>
+            </a:pPr>
+            <a:r>
+              <a:rPr lang="en-US" sz="950" b="1" dirty="0">
+                <a:solidFill>
+                  <a:srgbClr val="FFFFFF"/>
+                </a:solidFill>
+                <a:latin typeface="Meiryo UI" pitchFamily="34" charset="0"/>
+                <a:ea typeface="Meiryo UI" pitchFamily="34" charset="-122"/>
+                <a:cs typeface="Meiryo UI" pitchFamily="34" charset="-120"/>
+              </a:rPr>
+              <a:t>統括する論理</a:t>
+            </a:r>
+            <a:endParaRPr lang="en-US" sz="950" dirty="0"/>
+          </a:p>
+          <a:p>
+            <a:pPr indent="0" marL="0">
+              <a:lnSpc>
+                <a:spcPct val="95000"/>
+              </a:lnSpc>
+              <a:buNone/>
+            </a:pPr>
+            <a:r>
+              <a:rPr lang="en-US" sz="950" b="1" dirty="0">
+                <a:solidFill>
+                  <a:srgbClr val="FFFFFF"/>
+                </a:solidFill>
+                <a:latin typeface="Meiryo UI" pitchFamily="34" charset="0"/>
+                <a:ea typeface="Meiryo UI" pitchFamily="34" charset="-122"/>
+                <a:cs typeface="Meiryo UI" pitchFamily="34" charset="-120"/>
+              </a:rPr>
+              <a:t>(順序が全て)</a:t>
+            </a:r>
+            <a:endParaRPr lang="en-US" sz="950" dirty="0"/>
+          </a:p>
+        </p:txBody>
+      </p:sp>
+      <p:sp>
+        <p:nvSpPr>
+          <p:cNvPr id="6" name="Shape 4"/>
+          <p:cNvSpPr/>
+          <p:nvPr/>
+        </p:nvSpPr>
+        <p:spPr>
+          <a:xfrm>
+            <a:off x="1828800" y="576072"/>
+            <a:ext cx="3108960" cy="365760"/>
+          </a:xfrm>
+          <a:prstGeom prst="roundRect">
+            <a:avLst>
+              <a:gd name="adj" fmla="val 12500"/>
+            </a:avLst>
+          </a:prstGeom>
+          <a:solidFill>
+            <a:srgbClr val="FFFFFF"/>
+          </a:solidFill>
+          <a:ln w="12700">
+            <a:solidFill>
+              <a:srgbClr val="FFFFFF"/>
+            </a:solidFill>
+            <a:prstDash val="solid"/>
+          </a:ln>
+        </p:spPr>
+      </p:sp>
+      <p:sp>
+        <p:nvSpPr>
+          <p:cNvPr id="7" name="Text 5"/>
+          <p:cNvSpPr/>
+          <p:nvPr/>
+        </p:nvSpPr>
+        <p:spPr>
+          <a:xfrm>
+            <a:off x="1883664" y="576072"/>
+            <a:ext cx="2999232" cy="365760"/>
+          </a:xfrm>
+          <a:prstGeom prst="rect">
+            <a:avLst/>
+          </a:prstGeom>
+          <a:noFill/>
+          <a:ln/>
+        </p:spPr>
+        <p:txBody>
+          <a:bodyPr wrap="square" lIns="0" tIns="0" rIns="0" bIns="0" rtlCol="0" anchor="ctr"/>
+          <a:lstStyle/>
+          <a:p>
+            <a:pPr algn="ctr" indent="0" marL="0">
+              <a:lnSpc>
+                <a:spcPct val="95000"/>
+              </a:lnSpc>
+              <a:buNone/>
+            </a:pPr>
+            <a:r>
+              <a:rPr lang="en-US" sz="780" b="1" dirty="0">
+                <a:solidFill>
+                  <a:srgbClr val="1F3D20"/>
+                </a:solidFill>
+                <a:latin typeface="Meiryo UI" pitchFamily="34" charset="0"/>
+                <a:ea typeface="Meiryo UI" pitchFamily="34" charset="-122"/>
+                <a:cs typeface="Meiryo UI" pitchFamily="34" charset="-120"/>
+              </a:rPr>
+              <a:t>① 基準・規定を是正する</a:t>
+            </a:r>
+            <a:endParaRPr lang="en-US" sz="780" dirty="0"/>
+          </a:p>
+          <a:p>
+            <a:pPr algn="ctr" indent="0" marL="0">
+              <a:lnSpc>
+                <a:spcPct val="95000"/>
+              </a:lnSpc>
+              <a:buNone/>
+            </a:pPr>
+            <a:r>
+              <a:rPr lang="en-US" sz="780" b="1" dirty="0">
+                <a:solidFill>
+                  <a:srgbClr val="1F3D20"/>
+                </a:solidFill>
+                <a:latin typeface="Meiryo UI" pitchFamily="34" charset="0"/>
+                <a:ea typeface="Meiryo UI" pitchFamily="34" charset="-122"/>
+                <a:cs typeface="Meiryo UI" pitchFamily="34" charset="-120"/>
+              </a:rPr>
+              <a:t>＝ 作業を「消す」</a:t>
+            </a:r>
+            <a:endParaRPr lang="en-US" sz="780" dirty="0"/>
+          </a:p>
+        </p:txBody>
+      </p:sp>
+      <p:sp>
+        <p:nvSpPr>
+          <p:cNvPr id="8" name="Text 6"/>
+          <p:cNvSpPr/>
+          <p:nvPr/>
+        </p:nvSpPr>
+        <p:spPr>
+          <a:xfrm>
+            <a:off x="4956048" y="576072"/>
+            <a:ext cx="201168" cy="365760"/>
+          </a:xfrm>
+          <a:prstGeom prst="rect">
+            <a:avLst/>
+          </a:prstGeom>
+          <a:noFill/>
+          <a:ln/>
+        </p:spPr>
+        <p:txBody>
+          <a:bodyPr wrap="square" lIns="0" tIns="0" rIns="0" bIns="0" rtlCol="0" anchor="ctr"/>
+          <a:lstStyle/>
+          <a:p>
+            <a:pPr algn="ctr" indent="0" marL="0">
+              <a:buNone/>
+            </a:pPr>
+            <a:r>
+              <a:rPr lang="en-US" sz="1000" b="1" dirty="0">
+                <a:solidFill>
+                  <a:srgbClr val="FFFFFF"/>
+                </a:solidFill>
+                <a:latin typeface="Meiryo UI" pitchFamily="34" charset="0"/>
+                <a:ea typeface="Meiryo UI" pitchFamily="34" charset="-122"/>
+                <a:cs typeface="Meiryo UI" pitchFamily="34" charset="-120"/>
+              </a:rPr>
+              <a:t>▶</a:t>
+            </a:r>
+            <a:endParaRPr lang="en-US" sz="1000" dirty="0"/>
+          </a:p>
+        </p:txBody>
+      </p:sp>
+      <p:sp>
+        <p:nvSpPr>
+          <p:cNvPr id="9" name="Shape 7"/>
+          <p:cNvSpPr/>
+          <p:nvPr/>
+        </p:nvSpPr>
+        <p:spPr>
+          <a:xfrm>
+            <a:off x="5166360" y="576072"/>
+            <a:ext cx="3108960" cy="365760"/>
+          </a:xfrm>
+          <a:prstGeom prst="roundRect">
+            <a:avLst>
+              <a:gd name="adj" fmla="val 12500"/>
+            </a:avLst>
+          </a:prstGeom>
+          <a:solidFill>
+            <a:srgbClr val="FFFFFF"/>
+          </a:solidFill>
+          <a:ln w="12700">
+            <a:solidFill>
+              <a:srgbClr val="FFFFFF"/>
+            </a:solidFill>
+            <a:prstDash val="solid"/>
+          </a:ln>
+        </p:spPr>
+      </p:sp>
+      <p:sp>
+        <p:nvSpPr>
+          <p:cNvPr id="10" name="Text 8"/>
+          <p:cNvSpPr/>
+          <p:nvPr/>
+        </p:nvSpPr>
+        <p:spPr>
+          <a:xfrm>
+            <a:off x="5221224" y="576072"/>
+            <a:ext cx="2999232" cy="365760"/>
+          </a:xfrm>
+          <a:prstGeom prst="rect">
+            <a:avLst/>
+          </a:prstGeom>
+          <a:noFill/>
+          <a:ln/>
+        </p:spPr>
+        <p:txBody>
+          <a:bodyPr wrap="square" lIns="0" tIns="0" rIns="0" bIns="0" rtlCol="0" anchor="ctr"/>
+          <a:lstStyle/>
+          <a:p>
+            <a:pPr algn="ctr" indent="0" marL="0">
+              <a:lnSpc>
+                <a:spcPct val="95000"/>
+              </a:lnSpc>
+              <a:buNone/>
+            </a:pPr>
+            <a:r>
+              <a:rPr lang="en-US" sz="780" b="1" dirty="0">
+                <a:solidFill>
+                  <a:srgbClr val="1F3D20"/>
+                </a:solidFill>
+                <a:latin typeface="Meiryo UI" pitchFamily="34" charset="0"/>
+                <a:ea typeface="Meiryo UI" pitchFamily="34" charset="-122"/>
+                <a:cs typeface="Meiryo UI" pitchFamily="34" charset="-120"/>
+              </a:rPr>
+              <a:t>② 業務プロセスを再設計する</a:t>
+            </a:r>
+            <a:endParaRPr lang="en-US" sz="780" dirty="0"/>
+          </a:p>
+          <a:p>
+            <a:pPr algn="ctr" indent="0" marL="0">
+              <a:lnSpc>
+                <a:spcPct val="95000"/>
+              </a:lnSpc>
+              <a:buNone/>
+            </a:pPr>
+            <a:r>
+              <a:rPr lang="en-US" sz="780" b="1" dirty="0">
+                <a:solidFill>
+                  <a:srgbClr val="1F3D20"/>
+                </a:solidFill>
+                <a:latin typeface="Meiryo UI" pitchFamily="34" charset="0"/>
+                <a:ea typeface="Meiryo UI" pitchFamily="34" charset="-122"/>
+                <a:cs typeface="Meiryo UI" pitchFamily="34" charset="-120"/>
+              </a:rPr>
+              <a:t>＝ 作業を「減らす」</a:t>
+            </a:r>
+            <a:endParaRPr lang="en-US" sz="780" dirty="0"/>
+          </a:p>
+        </p:txBody>
+      </p:sp>
+      <p:sp>
+        <p:nvSpPr>
+          <p:cNvPr id="11" name="Text 9"/>
+          <p:cNvSpPr/>
+          <p:nvPr/>
+        </p:nvSpPr>
+        <p:spPr>
+          <a:xfrm>
+            <a:off x="8293608" y="576072"/>
+            <a:ext cx="201168" cy="365760"/>
+          </a:xfrm>
+          <a:prstGeom prst="rect">
+            <a:avLst/>
+          </a:prstGeom>
+          <a:noFill/>
+          <a:ln/>
+        </p:spPr>
+        <p:txBody>
+          <a:bodyPr wrap="square" lIns="0" tIns="0" rIns="0" bIns="0" rtlCol="0" anchor="ctr"/>
+          <a:lstStyle/>
+          <a:p>
+            <a:pPr algn="ctr" indent="0" marL="0">
+              <a:buNone/>
+            </a:pPr>
+            <a:r>
+              <a:rPr lang="en-US" sz="1000" b="1" dirty="0">
+                <a:solidFill>
+                  <a:srgbClr val="FFFFFF"/>
+                </a:solidFill>
+                <a:latin typeface="Meiryo UI" pitchFamily="34" charset="0"/>
+                <a:ea typeface="Meiryo UI" pitchFamily="34" charset="-122"/>
+                <a:cs typeface="Meiryo UI" pitchFamily="34" charset="-120"/>
+              </a:rPr>
+              <a:t>▶</a:t>
+            </a:r>
+            <a:endParaRPr lang="en-US" sz="1000" dirty="0"/>
+          </a:p>
+        </p:txBody>
+      </p:sp>
+      <p:sp>
+        <p:nvSpPr>
+          <p:cNvPr id="12" name="Shape 10"/>
+          <p:cNvSpPr/>
+          <p:nvPr/>
+        </p:nvSpPr>
+        <p:spPr>
+          <a:xfrm>
+            <a:off x="8503920" y="576072"/>
+            <a:ext cx="3108960" cy="365760"/>
+          </a:xfrm>
+          <a:prstGeom prst="roundRect">
+            <a:avLst>
+              <a:gd name="adj" fmla="val 12500"/>
+            </a:avLst>
+          </a:prstGeom>
+          <a:solidFill>
+            <a:srgbClr val="FFFFFF"/>
+          </a:solidFill>
+          <a:ln w="12700">
+            <a:solidFill>
+              <a:srgbClr val="FFFFFF"/>
+            </a:solidFill>
+            <a:prstDash val="solid"/>
+          </a:ln>
+        </p:spPr>
+      </p:sp>
+      <p:sp>
+        <p:nvSpPr>
+          <p:cNvPr id="13" name="Text 11"/>
+          <p:cNvSpPr/>
+          <p:nvPr/>
+        </p:nvSpPr>
+        <p:spPr>
+          <a:xfrm>
+            <a:off x="8558784" y="576072"/>
+            <a:ext cx="2999232" cy="365760"/>
+          </a:xfrm>
+          <a:prstGeom prst="rect">
+            <a:avLst/>
+          </a:prstGeom>
+          <a:noFill/>
+          <a:ln/>
+        </p:spPr>
+        <p:txBody>
+          <a:bodyPr wrap="square" lIns="0" tIns="0" rIns="0" bIns="0" rtlCol="0" anchor="ctr"/>
+          <a:lstStyle/>
+          <a:p>
+            <a:pPr algn="ctr" indent="0" marL="0">
+              <a:lnSpc>
+                <a:spcPct val="95000"/>
+              </a:lnSpc>
+              <a:buNone/>
+            </a:pPr>
+            <a:r>
+              <a:rPr lang="en-US" sz="780" b="1" dirty="0">
+                <a:solidFill>
+                  <a:srgbClr val="1F3D20"/>
+                </a:solidFill>
+                <a:latin typeface="Meiryo UI" pitchFamily="34" charset="0"/>
+                <a:ea typeface="Meiryo UI" pitchFamily="34" charset="-122"/>
+                <a:cs typeface="Meiryo UI" pitchFamily="34" charset="-120"/>
+              </a:rPr>
+              <a:t>③ 残る作業のみ自動化する</a:t>
+            </a:r>
+            <a:endParaRPr lang="en-US" sz="780" dirty="0"/>
+          </a:p>
+          <a:p>
+            <a:pPr algn="ctr" indent="0" marL="0">
+              <a:lnSpc>
+                <a:spcPct val="95000"/>
+              </a:lnSpc>
+              <a:buNone/>
+            </a:pPr>
+            <a:r>
+              <a:rPr lang="en-US" sz="780" b="1" dirty="0">
+                <a:solidFill>
+                  <a:srgbClr val="1F3D20"/>
+                </a:solidFill>
+                <a:latin typeface="Meiryo UI" pitchFamily="34" charset="0"/>
+                <a:ea typeface="Meiryo UI" pitchFamily="34" charset="-122"/>
+                <a:cs typeface="Meiryo UI" pitchFamily="34" charset="-120"/>
+              </a:rPr>
+              <a:t>＝「置き換える」(HowとしてのフィジカルAI)</a:t>
+            </a:r>
+            <a:endParaRPr lang="en-US" sz="780" dirty="0"/>
+          </a:p>
+        </p:txBody>
+      </p:sp>
+      <p:sp>
+        <p:nvSpPr>
+          <p:cNvPr id="14" name="Text 12"/>
+          <p:cNvSpPr/>
+          <p:nvPr/>
+        </p:nvSpPr>
+        <p:spPr>
+          <a:xfrm>
+            <a:off x="347472" y="969264"/>
+            <a:ext cx="11521440" cy="219456"/>
+          </a:xfrm>
+          <a:prstGeom prst="rect">
+            <a:avLst/>
+          </a:prstGeom>
+          <a:noFill/>
+          <a:ln/>
+        </p:spPr>
+        <p:txBody>
+          <a:bodyPr wrap="square" lIns="0" tIns="0" rIns="0" bIns="0" rtlCol="0" anchor="ctr"/>
+          <a:lstStyle/>
+          <a:p>
+            <a:pPr indent="0" marL="0">
+              <a:buNone/>
+            </a:pPr>
+            <a:r>
+              <a:rPr lang="en-US" sz="730" dirty="0">
+                <a:solidFill>
+                  <a:srgbClr val="FFFFFF"/>
+                </a:solidFill>
+                <a:latin typeface="Meiryo UI" pitchFamily="34" charset="0"/>
+                <a:ea typeface="Meiryo UI" pitchFamily="34" charset="-122"/>
+                <a:cs typeface="Meiryo UI" pitchFamily="34" charset="-120"/>
+              </a:rPr>
+              <a:t>工場の要員数＝基準・規定が要求する作業の総和。Howから入れば「存在すべきでない作業の自動化」＝人事PJTの「スリム化前のアウトソーシングで工数増大」と同じ失敗 ⇒ フィジカルAIの要件凍結は台帳完成後(26/12)まで待つゲート制</a:t>
+            </a:r>
+            <a:endParaRPr lang="en-US" sz="730" dirty="0"/>
+          </a:p>
+        </p:txBody>
+      </p:sp>
+      <p:sp>
+        <p:nvSpPr>
+          <p:cNvPr id="15" name="Shape 13"/>
+          <p:cNvSpPr/>
+          <p:nvPr/>
+        </p:nvSpPr>
+        <p:spPr>
+          <a:xfrm>
+            <a:off x="228600" y="1316736"/>
+            <a:ext cx="2843784" cy="1335024"/>
+          </a:xfrm>
+          <a:prstGeom prst="roundRect">
+            <a:avLst>
+              <a:gd name="adj" fmla="val 3425"/>
             </a:avLst>
           </a:prstGeom>
           <a:solidFill>
@@ -982,14 +1455,14 @@
       </p:sp>
       <p:sp>
         <p:nvSpPr>
-          <p:cNvPr id="5" name="Text 3"/>
-          <p:cNvSpPr/>
-          <p:nvPr/>
-        </p:nvSpPr>
-        <p:spPr>
-          <a:xfrm>
-            <a:off x="320040" y="612648"/>
-            <a:ext cx="2660904" cy="219456"/>
+          <p:cNvPr id="16" name="Text 14"/>
+          <p:cNvSpPr/>
+          <p:nvPr/>
+        </p:nvSpPr>
+        <p:spPr>
+          <a:xfrm>
+            <a:off x="320040" y="1353312"/>
+            <a:ext cx="2660904" cy="201168"/>
           </a:xfrm>
           <a:prstGeom prst="rect">
             <a:avLst/>
@@ -1001,11 +1474,11 @@
           <a:bodyPr wrap="square" lIns="0" tIns="0" rIns="0" bIns="0" rtlCol="0" anchor="ctr"/>
           <a:lstStyle/>
           <a:p>
-            <a:pPr algn="l" indent="0" marL="0">
-              <a:buNone/>
-            </a:pPr>
-            <a:r>
-              <a:rPr lang="en-US" sz="1050" b="1" dirty="0">
+            <a:pPr indent="0" marL="0">
+              <a:buNone/>
+            </a:pPr>
+            <a:r>
+              <a:rPr lang="en-US" sz="1000" b="1" dirty="0">
                 <a:solidFill>
                   <a:srgbClr val="1F3D20"/>
                 </a:solidFill>
@@ -1013,22 +1486,22 @@
                 <a:ea typeface="Meiryo UI" pitchFamily="34" charset="-122"/>
                 <a:cs typeface="Meiryo UI" pitchFamily="34" charset="-120"/>
               </a:rPr>
-              <a:t>To-Be(2030年断面)</a:t>
-            </a:r>
-            <a:endParaRPr lang="en-US" sz="1050" dirty="0"/>
+              <a:t>To-Be(2030・3レイヤー)</a:t>
+            </a:r>
+            <a:endParaRPr lang="en-US" sz="1000" dirty="0"/>
           </a:p>
         </p:txBody>
       </p:sp>
       <p:sp>
         <p:nvSpPr>
-          <p:cNvPr id="6" name="Text 4"/>
-          <p:cNvSpPr/>
-          <p:nvPr/>
-        </p:nvSpPr>
-        <p:spPr>
-          <a:xfrm>
-            <a:off x="320040" y="859536"/>
-            <a:ext cx="2660904" cy="1005840"/>
+          <p:cNvPr id="17" name="Text 15"/>
+          <p:cNvSpPr/>
+          <p:nvPr/>
+        </p:nvSpPr>
+        <p:spPr>
+          <a:xfrm>
+            <a:off x="320040" y="1572768"/>
+            <a:ext cx="2660904" cy="1024128"/>
           </a:xfrm>
           <a:prstGeom prst="rect">
             <a:avLst/>
@@ -1040,18 +1513,14 @@
           <a:bodyPr wrap="square" lIns="0" tIns="0" rIns="0" bIns="0" rtlCol="0" anchor="t"/>
           <a:lstStyle/>
           <a:p>
-            <a:pPr algn="l" marL="101600" indent="-101600">
+            <a:pPr indent="0" marL="0">
               <a:lnSpc>
                 <a:spcPct val="100000"/>
               </a:lnSpc>
-              <a:spcAft>
-                <a:spcPts val="200"/>
-              </a:spcAft>
-              <a:buSzPct val="100000"/>
-              <a:buChar char="•"/>
-            </a:pPr>
-            <a:r>
-              <a:rPr lang="en-US" sz="750" dirty="0">
+              <a:buNone/>
+            </a:pPr>
+            <a:r>
+              <a:rPr lang="en-US" sz="710" b="1" dirty="0">
                 <a:solidFill>
                   <a:srgbClr val="2B2B2B"/>
                 </a:solidFill>
@@ -1059,23 +1528,16 @@
                 <a:ea typeface="Meiryo UI" pitchFamily="34" charset="-122"/>
                 <a:cs typeface="Meiryo UI" pitchFamily="34" charset="-120"/>
               </a:rPr>
-              <a:t>KGI: 一人当たり生産金額 +20%</a:t>
-            </a:r>
-            <a:endParaRPr lang="en-US" sz="750" dirty="0"/>
-          </a:p>
-          <a:p>
-            <a:pPr algn="l" marL="101600" indent="-101600">
+              <a:t>L1 基準: </a:t>
+            </a:r>
+            <a:pPr indent="0" marL="0">
               <a:lnSpc>
                 <a:spcPct val="100000"/>
               </a:lnSpc>
-              <a:spcAft>
-                <a:spcPts val="200"/>
-              </a:spcAft>
-              <a:buSzPct val="100000"/>
-              <a:buChar char="•"/>
-            </a:pPr>
-            <a:r>
-              <a:rPr lang="en-US" sz="750" dirty="0">
+              <a:buNone/>
+            </a:pPr>
+            <a:r>
+              <a:rPr lang="en-US" sz="710" dirty="0">
                 <a:solidFill>
                   <a:srgbClr val="2B2B2B"/>
                 </a:solidFill>
@@ -1083,23 +1545,17 @@
                 <a:ea typeface="Meiryo UI" pitchFamily="34" charset="-122"/>
                 <a:cs typeface="Meiryo UI" pitchFamily="34" charset="-120"/>
               </a:rPr>
-              <a:t>明石工場 317→264名(▲53名)</a:t>
-            </a:r>
-            <a:endParaRPr lang="en-US" sz="750" dirty="0"/>
-          </a:p>
-          <a:p>
-            <a:pPr algn="l" marL="101600" indent="-101600">
+              <a:t>全基準を要求根拠で棚卸し済み。自動検査+統計的管理が規定のデフォルト
+</a:t>
+            </a:r>
+            <a:pPr indent="0" marL="0">
               <a:lnSpc>
                 <a:spcPct val="100000"/>
               </a:lnSpc>
-              <a:spcAft>
-                <a:spcPts val="200"/>
-              </a:spcAft>
-              <a:buSzPct val="100000"/>
-              <a:buChar char="•"/>
-            </a:pPr>
-            <a:r>
-              <a:rPr lang="en-US" sz="750" dirty="0">
+              <a:buNone/>
+            </a:pPr>
+            <a:r>
+              <a:rPr lang="en-US" sz="710" b="1" dirty="0">
                 <a:solidFill>
                   <a:srgbClr val="2B2B2B"/>
                 </a:solidFill>
@@ -1107,23 +1563,16 @@
                 <a:ea typeface="Meiryo UI" pitchFamily="34" charset="-122"/>
                 <a:cs typeface="Meiryo UI" pitchFamily="34" charset="-120"/>
               </a:rPr>
-              <a:t>植毛ライン 115→57名(半減)</a:t>
-            </a:r>
-            <a:endParaRPr lang="en-US" sz="750" dirty="0"/>
-          </a:p>
-          <a:p>
-            <a:pPr algn="l" marL="101600" indent="-101600">
+              <a:t>L2 プロセス: </a:t>
+            </a:r>
+            <a:pPr indent="0" marL="0">
               <a:lnSpc>
                 <a:spcPct val="100000"/>
               </a:lnSpc>
-              <a:spcAft>
-                <a:spcPts val="200"/>
-              </a:spcAft>
-              <a:buSzPct val="100000"/>
-              <a:buChar char="•"/>
-            </a:pPr>
-            <a:r>
-              <a:rPr lang="en-US" sz="750" dirty="0">
+              <a:buNone/>
+            </a:pPr>
+            <a:r>
+              <a:rPr lang="en-US" sz="710" dirty="0">
                 <a:solidFill>
                   <a:srgbClr val="2B2B2B"/>
                 </a:solidFill>
@@ -1131,23 +1580,17 @@
                 <a:ea typeface="Meiryo UI" pitchFamily="34" charset="-122"/>
                 <a:cs typeface="Meiryo UI" pitchFamily="34" charset="-120"/>
               </a:rPr>
-              <a:t>2nd STAGE: EBITDAマージン13%超</a:t>
-            </a:r>
-            <a:endParaRPr lang="en-US" sz="750" dirty="0"/>
-          </a:p>
-          <a:p>
-            <a:pPr algn="l" marL="101600" indent="-101600">
+              <a:t>改定後基準で再設計。人は異常対応と改善に限定
+</a:t>
+            </a:r>
+            <a:pPr indent="0" marL="0">
               <a:lnSpc>
                 <a:spcPct val="100000"/>
               </a:lnSpc>
-              <a:spcAft>
-                <a:spcPts val="200"/>
-              </a:spcAft>
-              <a:buSzPct val="100000"/>
-              <a:buChar char="•"/>
-            </a:pPr>
-            <a:r>
-              <a:rPr lang="en-US" sz="750" dirty="0">
+              <a:buNone/>
+            </a:pPr>
+            <a:r>
+              <a:rPr lang="en-US" sz="710" b="1" dirty="0">
                 <a:solidFill>
                   <a:srgbClr val="2B2B2B"/>
                 </a:solidFill>
@@ -1155,26 +1598,43 @@
                 <a:ea typeface="Meiryo UI" pitchFamily="34" charset="-122"/>
                 <a:cs typeface="Meiryo UI" pitchFamily="34" charset="-120"/>
               </a:rPr>
-              <a:t>品質保証は自動検査+統計的管理へ</a:t>
-            </a:r>
-            <a:endParaRPr lang="en-US" sz="750" dirty="0"/>
+              <a:t>L3 実行: </a:t>
+            </a:r>
+            <a:pPr indent="0" marL="0">
+              <a:lnSpc>
+                <a:spcPct val="100000"/>
+              </a:lnSpc>
+              <a:buNone/>
+            </a:pPr>
+            <a:r>
+              <a:rPr lang="en-US" sz="710" dirty="0">
+                <a:solidFill>
+                  <a:srgbClr val="2B2B2B"/>
+                </a:solidFill>
+                <a:latin typeface="Meiryo UI" pitchFamily="34" charset="0"/>
+                <a:ea typeface="Meiryo UI" pitchFamily="34" charset="-122"/>
+                <a:cs typeface="Meiryo UI" pitchFamily="34" charset="-120"/>
+              </a:rPr>
+              <a:t>植毛57名(半減)・工場264名(▲53名)・KGI一人当たり生産金額+20%</a:t>
+            </a:r>
+            <a:endParaRPr lang="en-US" sz="710" dirty="0"/>
           </a:p>
         </p:txBody>
       </p:sp>
       <p:sp>
         <p:nvSpPr>
-          <p:cNvPr id="7" name="Shape 5"/>
-          <p:cNvSpPr/>
-          <p:nvPr/>
-        </p:nvSpPr>
-        <p:spPr>
-          <a:xfrm>
-            <a:off x="3168396" y="566928"/>
-            <a:ext cx="2843784" cy="1353312"/>
+          <p:cNvPr id="18" name="Shape 16"/>
+          <p:cNvSpPr/>
+          <p:nvPr/>
+        </p:nvSpPr>
+        <p:spPr>
+          <a:xfrm>
+            <a:off x="3168396" y="1316736"/>
+            <a:ext cx="2843784" cy="1335024"/>
           </a:xfrm>
           <a:prstGeom prst="roundRect">
             <a:avLst>
-              <a:gd name="adj" fmla="val 3378"/>
+              <a:gd name="adj" fmla="val 3425"/>
             </a:avLst>
           </a:prstGeom>
           <a:solidFill>
@@ -1190,14 +1650,14 @@
       </p:sp>
       <p:sp>
         <p:nvSpPr>
-          <p:cNvPr id="8" name="Text 6"/>
-          <p:cNvSpPr/>
-          <p:nvPr/>
-        </p:nvSpPr>
-        <p:spPr>
-          <a:xfrm>
-            <a:off x="3259836" y="612648"/>
-            <a:ext cx="2660904" cy="219456"/>
+          <p:cNvPr id="19" name="Text 17"/>
+          <p:cNvSpPr/>
+          <p:nvPr/>
+        </p:nvSpPr>
+        <p:spPr>
+          <a:xfrm>
+            <a:off x="3259836" y="1353312"/>
+            <a:ext cx="2660904" cy="201168"/>
           </a:xfrm>
           <a:prstGeom prst="rect">
             <a:avLst/>
@@ -1209,11 +1669,11 @@
           <a:bodyPr wrap="square" lIns="0" tIns="0" rIns="0" bIns="0" rtlCol="0" anchor="ctr"/>
           <a:lstStyle/>
           <a:p>
-            <a:pPr algn="l" indent="0" marL="0">
-              <a:buNone/>
-            </a:pPr>
-            <a:r>
-              <a:rPr lang="en-US" sz="1050" b="1" dirty="0">
+            <a:pPr indent="0" marL="0">
+              <a:buNone/>
+            </a:pPr>
+            <a:r>
+              <a:rPr lang="en-US" sz="1000" b="1" dirty="0">
                 <a:solidFill>
                   <a:srgbClr val="2B2B2B"/>
                 </a:solidFill>
@@ -1223,20 +1683,20 @@
               </a:rPr>
               <a:t>As-Is(現状)</a:t>
             </a:r>
-            <a:endParaRPr lang="en-US" sz="1050" dirty="0"/>
+            <a:endParaRPr lang="en-US" sz="1000" dirty="0"/>
           </a:p>
         </p:txBody>
       </p:sp>
       <p:sp>
         <p:nvSpPr>
-          <p:cNvPr id="9" name="Text 7"/>
-          <p:cNvSpPr/>
-          <p:nvPr/>
-        </p:nvSpPr>
-        <p:spPr>
-          <a:xfrm>
-            <a:off x="3259836" y="859536"/>
-            <a:ext cx="2660904" cy="1005840"/>
+          <p:cNvPr id="20" name="Text 18"/>
+          <p:cNvSpPr/>
+          <p:nvPr/>
+        </p:nvSpPr>
+        <p:spPr>
+          <a:xfrm>
+            <a:off x="3259836" y="1572768"/>
+            <a:ext cx="2660904" cy="1024128"/>
           </a:xfrm>
           <a:prstGeom prst="rect">
             <a:avLst/>
@@ -1248,18 +1708,14 @@
           <a:bodyPr wrap="square" lIns="0" tIns="0" rIns="0" bIns="0" rtlCol="0" anchor="t"/>
           <a:lstStyle/>
           <a:p>
-            <a:pPr algn="l" marL="101600" indent="-101600">
+            <a:pPr indent="0" marL="0">
               <a:lnSpc>
                 <a:spcPct val="100000"/>
               </a:lnSpc>
-              <a:spcAft>
-                <a:spcPts val="200"/>
-              </a:spcAft>
-              <a:buSzPct val="100000"/>
-              <a:buChar char="•"/>
-            </a:pPr>
-            <a:r>
-              <a:rPr lang="en-US" sz="750" dirty="0">
+              <a:buNone/>
+            </a:pPr>
+            <a:r>
+              <a:rPr lang="en-US" sz="710" b="1" dirty="0">
                 <a:solidFill>
                   <a:srgbClr val="2B2B2B"/>
                 </a:solidFill>
@@ -1267,23 +1723,16 @@
                 <a:ea typeface="Meiryo UI" pitchFamily="34" charset="-122"/>
                 <a:cs typeface="Meiryo UI" pitchFamily="34" charset="-120"/>
               </a:rPr>
-              <a:t>要員数の妥当性を検証するデータ無し</a:t>
-            </a:r>
-            <a:endParaRPr lang="en-US" sz="750" dirty="0"/>
-          </a:p>
-          <a:p>
-            <a:pPr algn="l" marL="101600" indent="-101600">
+              <a:t>L1: </a:t>
+            </a:r>
+            <a:pPr indent="0" marL="0">
               <a:lnSpc>
                 <a:spcPct val="100000"/>
               </a:lnSpc>
-              <a:spcAft>
-                <a:spcPts val="200"/>
-              </a:spcAft>
-              <a:buSzPct val="100000"/>
-              <a:buChar char="•"/>
-            </a:pPr>
-            <a:r>
-              <a:rPr lang="en-US" sz="750" dirty="0">
+              <a:buNone/>
+            </a:pPr>
+            <a:r>
+              <a:rPr lang="en-US" sz="710" dirty="0">
                 <a:solidFill>
                   <a:srgbClr val="2B2B2B"/>
                 </a:solidFill>
@@ -1291,23 +1740,17 @@
                 <a:ea typeface="Meiryo UI" pitchFamily="34" charset="-122"/>
                 <a:cs typeface="Meiryo UI" pitchFamily="34" charset="-120"/>
               </a:rPr>
-              <a:t>検査・長毛処理は人の目視前提</a:t>
-            </a:r>
-            <a:endParaRPr lang="en-US" sz="750" dirty="0"/>
-          </a:p>
-          <a:p>
-            <a:pPr algn="l" marL="101600" indent="-101600">
+              <a:t>基準は品質事象対応で積層。全数目視・長毛処理は人手前提の規定のまま
+</a:t>
+            </a:r>
+            <a:pPr indent="0" marL="0">
               <a:lnSpc>
                 <a:spcPct val="100000"/>
               </a:lnSpc>
-              <a:spcAft>
-                <a:spcPts val="200"/>
-              </a:spcAft>
-              <a:buSzPct val="100000"/>
-              <a:buChar char="•"/>
-            </a:pPr>
-            <a:r>
-              <a:rPr lang="en-US" sz="750" dirty="0">
+              <a:buNone/>
+            </a:pPr>
+            <a:r>
+              <a:rPr lang="en-US" sz="710" b="1" dirty="0">
                 <a:solidFill>
                   <a:srgbClr val="2B2B2B"/>
                 </a:solidFill>
@@ -1315,23 +1758,16 @@
                 <a:ea typeface="Meiryo UI" pitchFamily="34" charset="-122"/>
                 <a:cs typeface="Meiryo UI" pitchFamily="34" charset="-120"/>
               </a:rPr>
-              <a:t>B停止は人が吸収(改善ループ無し)</a:t>
-            </a:r>
-            <a:endParaRPr lang="en-US" sz="750" dirty="0"/>
-          </a:p>
-          <a:p>
-            <a:pPr algn="l" marL="101600" indent="-101600">
+              <a:t>L2: </a:t>
+            </a:r>
+            <a:pPr indent="0" marL="0">
               <a:lnSpc>
                 <a:spcPct val="100000"/>
               </a:lnSpc>
-              <a:spcAft>
-                <a:spcPts val="200"/>
-              </a:spcAft>
-              <a:buSzPct val="100000"/>
-              <a:buChar char="•"/>
-            </a:pPr>
-            <a:r>
-              <a:rPr lang="en-US" sz="750" dirty="0">
+              <a:buNone/>
+            </a:pPr>
+            <a:r>
+              <a:rPr lang="en-US" sz="710" dirty="0">
                 <a:solidFill>
                   <a:srgbClr val="2B2B2B"/>
                 </a:solidFill>
@@ -1339,23 +1775,17 @@
                 <a:ea typeface="Meiryo UI" pitchFamily="34" charset="-122"/>
                 <a:cs typeface="Meiryo UI" pitchFamily="34" charset="-120"/>
               </a:rPr>
-              <a:t>ライン単位の部分最適/カメラ転用不可</a:t>
-            </a:r>
-            <a:endParaRPr lang="en-US" sz="750" dirty="0"/>
-          </a:p>
-          <a:p>
-            <a:pPr algn="l" marL="101600" indent="-101600">
+              <a:t>要員は積み上げ設定(検証データ無し)。B停止を人が吸収
+</a:t>
+            </a:r>
+            <a:pPr indent="0" marL="0">
               <a:lnSpc>
                 <a:spcPct val="100000"/>
               </a:lnSpc>
-              <a:spcAft>
-                <a:spcPts val="200"/>
-              </a:spcAft>
-              <a:buSzPct val="100000"/>
-              <a:buChar char="•"/>
-            </a:pPr>
-            <a:r>
-              <a:rPr lang="en-US" sz="750" dirty="0">
+              <a:buNone/>
+            </a:pPr>
+            <a:r>
+              <a:rPr lang="en-US" sz="710" b="1" dirty="0">
                 <a:solidFill>
                   <a:srgbClr val="2B2B2B"/>
                 </a:solidFill>
@@ -1363,26 +1793,43 @@
                 <a:ea typeface="Meiryo UI" pitchFamily="34" charset="-122"/>
                 <a:cs typeface="Meiryo UI" pitchFamily="34" charset="-120"/>
               </a:rPr>
-              <a:t>フィジカルAI計画は植毛100名止まり</a:t>
-            </a:r>
-            <a:endParaRPr lang="en-US" sz="750" dirty="0"/>
+              <a:t>L3: </a:t>
+            </a:r>
+            <a:pPr indent="0" marL="0">
+              <a:lnSpc>
+                <a:spcPct val="100000"/>
+              </a:lnSpc>
+              <a:buNone/>
+            </a:pPr>
+            <a:r>
+              <a:rPr lang="en-US" sz="710" dirty="0">
+                <a:solidFill>
+                  <a:srgbClr val="2B2B2B"/>
+                </a:solidFill>
+                <a:latin typeface="Meiryo UI" pitchFamily="34" charset="0"/>
+                <a:ea typeface="Meiryo UI" pitchFamily="34" charset="-122"/>
+                <a:cs typeface="Meiryo UI" pitchFamily="34" charset="-120"/>
+              </a:rPr>
+              <a:t>フィジカルAI計画は現行基準を所与とし植毛100名止まり。既設カメラ転用不可</a:t>
+            </a:r>
+            <a:endParaRPr lang="en-US" sz="710" dirty="0"/>
           </a:p>
         </p:txBody>
       </p:sp>
       <p:sp>
         <p:nvSpPr>
-          <p:cNvPr id="10" name="Shape 8"/>
-          <p:cNvSpPr/>
-          <p:nvPr/>
-        </p:nvSpPr>
-        <p:spPr>
-          <a:xfrm>
-            <a:off x="6108192" y="566928"/>
-            <a:ext cx="2843784" cy="1353312"/>
+          <p:cNvPr id="21" name="Shape 19"/>
+          <p:cNvSpPr/>
+          <p:nvPr/>
+        </p:nvSpPr>
+        <p:spPr>
+          <a:xfrm>
+            <a:off x="6108192" y="1316736"/>
+            <a:ext cx="2843784" cy="1335024"/>
           </a:xfrm>
           <a:prstGeom prst="roundRect">
             <a:avLst>
-              <a:gd name="adj" fmla="val 3378"/>
+              <a:gd name="adj" fmla="val 3425"/>
             </a:avLst>
           </a:prstGeom>
           <a:solidFill>
@@ -1398,14 +1845,14 @@
       </p:sp>
       <p:sp>
         <p:nvSpPr>
-          <p:cNvPr id="11" name="Text 9"/>
-          <p:cNvSpPr/>
-          <p:nvPr/>
-        </p:nvSpPr>
-        <p:spPr>
-          <a:xfrm>
-            <a:off x="6199632" y="612648"/>
-            <a:ext cx="2660904" cy="219456"/>
+          <p:cNvPr id="22" name="Text 20"/>
+          <p:cNvSpPr/>
+          <p:nvPr/>
+        </p:nvSpPr>
+        <p:spPr>
+          <a:xfrm>
+            <a:off x="6199632" y="1353312"/>
+            <a:ext cx="2660904" cy="201168"/>
           </a:xfrm>
           <a:prstGeom prst="rect">
             <a:avLst/>
@@ -1417,11 +1864,11 @@
           <a:bodyPr wrap="square" lIns="0" tIns="0" rIns="0" bIns="0" rtlCol="0" anchor="ctr"/>
           <a:lstStyle/>
           <a:p>
-            <a:pPr algn="l" indent="0" marL="0">
-              <a:buNone/>
-            </a:pPr>
-            <a:r>
-              <a:rPr lang="en-US" sz="1050" b="1" dirty="0">
+            <a:pPr indent="0" marL="0">
+              <a:buNone/>
+            </a:pPr>
+            <a:r>
+              <a:rPr lang="en-US" sz="1000" b="1" dirty="0">
                 <a:solidFill>
                   <a:srgbClr val="B85042"/>
                 </a:solidFill>
@@ -1431,19 +1878,19 @@
               </a:rPr>
               <a:t>GAP</a:t>
             </a:r>
-            <a:endParaRPr lang="en-US" sz="1050" dirty="0"/>
+            <a:endParaRPr lang="en-US" sz="1000" dirty="0"/>
           </a:p>
         </p:txBody>
       </p:sp>
       <p:sp>
         <p:nvSpPr>
-          <p:cNvPr id="12" name="Text 10"/>
-          <p:cNvSpPr/>
-          <p:nvPr/>
-        </p:nvSpPr>
-        <p:spPr>
-          <a:xfrm>
-            <a:off x="6199632" y="841248"/>
+          <p:cNvPr id="23" name="Text 21"/>
+          <p:cNvSpPr/>
+          <p:nvPr/>
+        </p:nvSpPr>
+        <p:spPr>
+          <a:xfrm>
+            <a:off x="6199632" y="1572768"/>
             <a:ext cx="2660904" cy="1024128"/>
           </a:xfrm>
           <a:prstGeom prst="rect">
@@ -1456,14 +1903,14 @@
           <a:bodyPr wrap="square" lIns="0" tIns="0" rIns="0" bIns="0" rtlCol="0" anchor="t"/>
           <a:lstStyle/>
           <a:p>
-            <a:pPr algn="l" indent="0" marL="0">
+            <a:pPr indent="0" marL="0">
               <a:lnSpc>
-                <a:spcPct val="105000"/>
+                <a:spcPct val="100000"/>
               </a:lnSpc>
               <a:buNone/>
             </a:pPr>
             <a:r>
-              <a:rPr lang="en-US" sz="1200" b="1" dirty="0">
+              <a:rPr lang="en-US" sz="1100" b="1" dirty="0">
                 <a:solidFill>
                   <a:srgbClr val="B85042"/>
                 </a:solidFill>
@@ -1471,17 +1918,17 @@
                 <a:ea typeface="Meiryo UI" pitchFamily="34" charset="-122"/>
                 <a:cs typeface="Meiryo UI" pitchFamily="34" charset="-120"/>
               </a:rPr>
-              <a:t>植毛 ▲43名分の打ち手不在
+              <a:t>植毛▲43名の打ち手不在
 </a:t>
             </a:r>
-            <a:pPr algn="l" indent="0" marL="0">
+            <a:pPr indent="0" marL="0">
               <a:lnSpc>
-                <a:spcPct val="105000"/>
+                <a:spcPct val="100000"/>
               </a:lnSpc>
               <a:buNone/>
             </a:pPr>
             <a:r>
-              <a:rPr lang="en-US" sz="750" dirty="0">
+              <a:rPr lang="en-US" sz="710" b="1" dirty="0">
                 <a:solidFill>
                   <a:srgbClr val="2B2B2B"/>
                 </a:solidFill>
@@ -1489,17 +1936,17 @@
                 <a:ea typeface="Meiryo UI" pitchFamily="34" charset="-122"/>
                 <a:cs typeface="Meiryo UI" pitchFamily="34" charset="-120"/>
               </a:rPr>
-              <a:t>(役員期待57名 vs 計画100名)
+              <a:t>正体は「基準レイヤー未着手」(技術限界ではない)
 </a:t>
             </a:r>
-            <a:pPr algn="l" indent="0" marL="0">
+            <a:pPr indent="0" marL="0">
               <a:lnSpc>
-                <a:spcPct val="105000"/>
+                <a:spcPct val="100000"/>
               </a:lnSpc>
               <a:buNone/>
             </a:pPr>
             <a:r>
-              <a:rPr lang="en-US" sz="750" dirty="0">
+              <a:rPr lang="en-US" sz="710" dirty="0">
                 <a:solidFill>
                   <a:srgbClr val="2B2B2B"/>
                 </a:solidFill>
@@ -1507,26 +1954,66 @@
                 <a:ea typeface="Meiryo UI" pitchFamily="34" charset="-122"/>
                 <a:cs typeface="Meiryo UI" pitchFamily="34" charset="-120"/>
               </a:rPr>
-              <a:t>工場▲53名の実行パス未確定 / 品質基準・規定の再設計 未着手 / A停止延長リスクのOEE正味評価 未実施</a:t>
-            </a:r>
-            <a:endParaRPr lang="en-US" sz="1200" dirty="0"/>
+              <a:t>・基準に踏み込む意思決定の枠組み不在(効果の過半がここに眠る)</a:t>
+            </a:r>
+            <a:endParaRPr lang="en-US" sz="1100" dirty="0"/>
+          </a:p>
+          <a:p>
+            <a:pPr indent="0" marL="0">
+              <a:lnSpc>
+                <a:spcPct val="100000"/>
+              </a:lnSpc>
+              <a:buNone/>
+            </a:pPr>
+            <a:r>
+              <a:rPr lang="en-US" sz="710" dirty="0">
+                <a:solidFill>
+                  <a:srgbClr val="2B2B2B"/>
+                </a:solidFill>
+                <a:latin typeface="Meiryo UI" pitchFamily="34" charset="0"/>
+                <a:ea typeface="Meiryo UI" pitchFamily="34" charset="-122"/>
+                <a:cs typeface="Meiryo UI" pitchFamily="34" charset="-120"/>
+              </a:rPr>
+              <a:t>・AI先行で仕様固定化→投資1〜2億円過大化リスク</a:t>
+            </a:r>
+            <a:endParaRPr lang="en-US" sz="1100" dirty="0"/>
+          </a:p>
+          <a:p>
+            <a:pPr indent="0" marL="0">
+              <a:lnSpc>
+                <a:spcPct val="100000"/>
+              </a:lnSpc>
+              <a:buNone/>
+            </a:pPr>
+            <a:r>
+              <a:rPr lang="en-US" sz="710" dirty="0">
+                <a:solidFill>
+                  <a:srgbClr val="2B2B2B"/>
+                </a:solidFill>
+                <a:latin typeface="Meiryo UI" pitchFamily="34" charset="0"/>
+                <a:ea typeface="Meiryo UI" pitchFamily="34" charset="-122"/>
+                <a:cs typeface="Meiryo UI" pitchFamily="34" charset="-120"/>
+              </a:rPr>
+              <a:t>・作業×規定の対応データ不在</a:t>
+            </a:r>
+            <a:endParaRPr lang="en-US" sz="1100" dirty="0"/>
           </a:p>
         </p:txBody>
       </p:sp>
       <p:sp>
         <p:nvSpPr>
-          <p:cNvPr id="13" name="Shape 11"/>
-          <p:cNvSpPr/>
-          <p:nvPr/>
-        </p:nvSpPr>
-        <p:spPr>
-          <a:xfrm>
-            <a:off x="9047988" y="566928"/>
-            <a:ext cx="2843784" cy="1353312"/>
+          <p:cNvPr id="24" name="Shape 22"/>
+          <p:cNvSpPr/>
+          <p:nvPr/>
+        </p:nvSpPr>
+        <p:spPr>
+          <a:xfrm>
+            <a:off x="9047988" y="1316736"/>
+            <a:ext cx="2843784" cy="1335024"/>
           </a:xfrm>
           <a:prstGeom prst="roundRect">
             <a:avLst>
-              <a:gd name="adj" fmla="val 3378"/>
+              <a:gd name="adj" fmla="val 3425"/>
             </a:avLst>
           </a:prstGeom>
           <a:solidFill>
@@ -1542,14 +2029,14 @@
       </p:sp>
       <p:sp>
         <p:nvSpPr>
-          <p:cNvPr id="14" name="Text 12"/>
-          <p:cNvSpPr/>
-          <p:nvPr/>
-        </p:nvSpPr>
-        <p:spPr>
-          <a:xfrm>
-            <a:off x="9139428" y="612648"/>
-            <a:ext cx="2660904" cy="219456"/>
+          <p:cNvPr id="25" name="Text 23"/>
+          <p:cNvSpPr/>
+          <p:nvPr/>
+        </p:nvSpPr>
+        <p:spPr>
+          <a:xfrm>
+            <a:off x="9139428" y="1353312"/>
+            <a:ext cx="2660904" cy="201168"/>
           </a:xfrm>
           <a:prstGeom prst="rect">
             <a:avLst/>
@@ -1561,11 +2048,11 @@
           <a:bodyPr wrap="square" lIns="0" tIns="0" rIns="0" bIns="0" rtlCol="0" anchor="ctr"/>
           <a:lstStyle/>
           <a:p>
-            <a:pPr algn="l" indent="0" marL="0">
-              <a:buNone/>
-            </a:pPr>
-            <a:r>
-              <a:rPr lang="en-US" sz="1050" b="1" dirty="0">
+            <a:pPr indent="0" marL="0">
+              <a:buNone/>
+            </a:pPr>
+            <a:r>
+              <a:rPr lang="en-US" sz="1000" b="1" dirty="0">
                 <a:solidFill>
                   <a:srgbClr val="1F3D20"/>
                 </a:solidFill>
@@ -1573,21 +2060,21 @@
                 <a:ea typeface="Meiryo UI" pitchFamily="34" charset="-122"/>
                 <a:cs typeface="Meiryo UI" pitchFamily="34" charset="-120"/>
               </a:rPr>
-              <a:t>原因(構造・6つ)</a:t>
-            </a:r>
-            <a:endParaRPr lang="en-US" sz="1050" dirty="0"/>
+              <a:t>原因: 植毛115名の「要求元」分解</a:t>
+            </a:r>
+            <a:endParaRPr lang="en-US" sz="1000" dirty="0"/>
           </a:p>
         </p:txBody>
       </p:sp>
       <p:sp>
         <p:nvSpPr>
-          <p:cNvPr id="15" name="Text 13"/>
-          <p:cNvSpPr/>
-          <p:nvPr/>
-        </p:nvSpPr>
-        <p:spPr>
-          <a:xfrm>
-            <a:off x="9139428" y="841248"/>
+          <p:cNvPr id="26" name="Text 24"/>
+          <p:cNvSpPr/>
+          <p:nvPr/>
+        </p:nvSpPr>
+        <p:spPr>
+          <a:xfrm>
+            <a:off x="9139428" y="1572768"/>
             <a:ext cx="2660904" cy="1024128"/>
           </a:xfrm>
           <a:prstGeom prst="rect">
@@ -1600,14 +2087,14 @@
           <a:bodyPr wrap="square" lIns="0" tIns="0" rIns="0" bIns="0" rtlCol="0" anchor="t"/>
           <a:lstStyle/>
           <a:p>
-            <a:pPr algn="l" indent="0" marL="0">
-              <a:spcAft>
-                <a:spcPts val="100"/>
-              </a:spcAft>
-              <a:buNone/>
-            </a:pPr>
-            <a:r>
-              <a:rPr lang="en-US" sz="730" dirty="0">
+            <a:pPr indent="0" marL="0">
+              <a:lnSpc>
+                <a:spcPct val="100000"/>
+              </a:lnSpc>
+              <a:buNone/>
+            </a:pPr>
+            <a:r>
+              <a:rPr lang="en-US" sz="690" dirty="0">
                 <a:solidFill>
                   <a:srgbClr val="2B2B2B"/>
                 </a:solidFill>
@@ -1615,19 +2102,36 @@
                 <a:ea typeface="Meiryo UI" pitchFamily="34" charset="-122"/>
                 <a:cs typeface="Meiryo UI" pitchFamily="34" charset="-120"/>
               </a:rPr>
-              <a:t>① 品質基準が「人の目」前提で設計</a:t>
-            </a:r>
-            <a:endParaRPr lang="en-US" sz="730" dirty="0"/>
-          </a:p>
-          <a:p>
-            <a:pPr algn="l" indent="0" marL="0">
-              <a:spcAft>
-                <a:spcPts val="100"/>
-              </a:spcAft>
-              <a:buNone/>
-            </a:pPr>
-            <a:r>
-              <a:rPr lang="en-US" sz="730" dirty="0">
+              <a:t>A 法規・公的規格 〜10名(不可動)
+B 業界標準・顧客要求 〜20名
+</a:t>
+            </a:r>
+            <a:pPr indent="0" marL="0">
+              <a:lnSpc>
+                <a:spcPct val="100000"/>
+              </a:lnSpc>
+              <a:buNone/>
+            </a:pPr>
+            <a:r>
+              <a:rPr lang="en-US" sz="690" b="1" dirty="0">
+                <a:solidFill>
+                  <a:srgbClr val="B85042"/>
+                </a:solidFill>
+                <a:latin typeface="Meiryo UI" pitchFamily="34" charset="0"/>
+                <a:ea typeface="Meiryo UI" pitchFamily="34" charset="-122"/>
+                <a:cs typeface="Meiryo UI" pitchFamily="34" charset="-120"/>
+              </a:rPr>
+              <a:t>C 当社独自基準 〜40名 ←本丸
+</a:t>
+            </a:r>
+            <a:pPr indent="0" marL="0">
+              <a:lnSpc>
+                <a:spcPct val="100000"/>
+              </a:lnSpc>
+              <a:buNone/>
+            </a:pPr>
+            <a:r>
+              <a:rPr lang="en-US" sz="690" dirty="0">
                 <a:solidFill>
                   <a:srgbClr val="2B2B2B"/>
                 </a:solidFill>
@@ -1635,19 +2139,18 @@
                 <a:ea typeface="Meiryo UI" pitchFamily="34" charset="-122"/>
                 <a:cs typeface="Meiryo UI" pitchFamily="34" charset="-120"/>
               </a:rPr>
-              <a:t>② B停止を人が吸収=固定費化</a:t>
-            </a:r>
-            <a:endParaRPr lang="en-US" sz="730" dirty="0"/>
-          </a:p>
-          <a:p>
-            <a:pPr algn="l" indent="0" marL="0">
-              <a:spcAft>
-                <a:spcPts val="100"/>
-              </a:spcAft>
-              <a:buNone/>
-            </a:pPr>
-            <a:r>
-              <a:rPr lang="en-US" sz="730" dirty="0">
+              <a:t>D 設備起因(B停止等) 〜25名
+E 定型作業 〜20名 ←現行AI計画の対象はここだけ
+</a:t>
+            </a:r>
+            <a:pPr indent="0" marL="0">
+              <a:lnSpc>
+                <a:spcPct val="100000"/>
+              </a:lnSpc>
+              <a:buNone/>
+            </a:pPr>
+            <a:r>
+              <a:rPr lang="en-US" sz="690" b="1" dirty="0">
                 <a:solidFill>
                   <a:srgbClr val="2B2B2B"/>
                 </a:solidFill>
@@ -1655,82 +2158,22 @@
                 <a:ea typeface="Meiryo UI" pitchFamily="34" charset="-122"/>
                 <a:cs typeface="Meiryo UI" pitchFamily="34" charset="-120"/>
               </a:rPr>
-              <a:t>③ 要員数が所与(検証の仕組み無し)</a:t>
-            </a:r>
-            <a:endParaRPr lang="en-US" sz="730" dirty="0"/>
-          </a:p>
-          <a:p>
-            <a:pPr algn="l" indent="0" marL="0">
-              <a:spcAft>
-                <a:spcPts val="100"/>
-              </a:spcAft>
-              <a:buNone/>
-            </a:pPr>
-            <a:r>
-              <a:rPr lang="en-US" sz="730" dirty="0">
-                <a:solidFill>
-                  <a:srgbClr val="2B2B2B"/>
-                </a:solidFill>
-                <a:latin typeface="Meiryo UI" pitchFamily="34" charset="0"/>
-                <a:ea typeface="Meiryo UI" pitchFamily="34" charset="-122"/>
-                <a:cs typeface="Meiryo UI" pitchFamily="34" charset="-120"/>
-              </a:rPr>
-              <a:t>④ ライン単位の部分最適</a:t>
-            </a:r>
-            <a:endParaRPr lang="en-US" sz="730" dirty="0"/>
-          </a:p>
-          <a:p>
-            <a:pPr algn="l" indent="0" marL="0">
-              <a:spcAft>
-                <a:spcPts val="100"/>
-              </a:spcAft>
-              <a:buNone/>
-            </a:pPr>
-            <a:r>
-              <a:rPr lang="en-US" sz="730" dirty="0">
-                <a:solidFill>
-                  <a:srgbClr val="2B2B2B"/>
-                </a:solidFill>
-                <a:latin typeface="Meiryo UI" pitchFamily="34" charset="0"/>
-                <a:ea typeface="Meiryo UI" pitchFamily="34" charset="-122"/>
-                <a:cs typeface="Meiryo UI" pitchFamily="34" charset="-120"/>
-              </a:rPr>
-              <a:t>⑤ 規格・規定の積層(見直し未実施)</a:t>
-            </a:r>
-            <a:endParaRPr lang="en-US" sz="730" dirty="0"/>
-          </a:p>
-          <a:p>
-            <a:pPr algn="l" indent="0" marL="0">
-              <a:spcAft>
-                <a:spcPts val="100"/>
-              </a:spcAft>
-              <a:buNone/>
-            </a:pPr>
-            <a:r>
-              <a:rPr lang="en-US" sz="730" dirty="0">
-                <a:solidFill>
-                  <a:srgbClr val="2B2B2B"/>
-                </a:solidFill>
-                <a:latin typeface="Meiryo UI" pitchFamily="34" charset="0"/>
-                <a:ea typeface="Meiryo UI" pitchFamily="34" charset="-122"/>
-                <a:cs typeface="Meiryo UI" pitchFamily="34" charset="-120"/>
-              </a:rPr>
-              <a:t>⑥ 多品種・段替え負荷</a:t>
-            </a:r>
-            <a:endParaRPr lang="en-US" sz="730" dirty="0"/>
+              <a:t>真因: 基準は追加される一方「削除するプロセス」が無い</a:t>
+            </a:r>
+            <a:endParaRPr lang="en-US" sz="690" dirty="0"/>
           </a:p>
         </p:txBody>
       </p:sp>
       <p:sp>
         <p:nvSpPr>
-          <p:cNvPr id="16" name="Text 14"/>
-          <p:cNvSpPr/>
-          <p:nvPr/>
-        </p:nvSpPr>
-        <p:spPr>
-          <a:xfrm>
-            <a:off x="228600" y="2011680"/>
-            <a:ext cx="8503920" cy="201168"/>
+          <p:cNvPr id="27" name="Text 25"/>
+          <p:cNvSpPr/>
+          <p:nvPr/>
+        </p:nvSpPr>
+        <p:spPr>
+          <a:xfrm>
+            <a:off x="228600" y="2761488"/>
+            <a:ext cx="8503920" cy="182880"/>
           </a:xfrm>
           <a:prstGeom prst="rect">
             <a:avLst/>
@@ -1746,7 +2189,7 @@
               <a:buNone/>
             </a:pPr>
             <a:r>
-              <a:rPr lang="en-US" sz="950" b="1" dirty="0">
+              <a:rPr lang="en-US" sz="900" b="1" dirty="0">
                 <a:solidFill>
                   <a:srgbClr val="1F3D20"/>
                 </a:solidFill>
@@ -1754,9 +2197,9 @@
                 <a:ea typeface="Meiryo UI" pitchFamily="34" charset="-122"/>
                 <a:cs typeface="Meiryo UI" pitchFamily="34" charset="-120"/>
               </a:rPr>
-              <a:t>解決策(打ち手ポートフォリオ) — フィジカルAIに限定しない 4カテゴリー × 9打ち手</a:t>
-            </a:r>
-            <a:endParaRPr lang="en-US" sz="950" dirty="0"/>
+              <a:t>解決策 — 依存関係を持つ3ステップ(①→②→③の順に成果物が前提となる。並列の打ち手リストではない)</a:t>
+            </a:r>
+            <a:endParaRPr lang="en-US" sz="900" dirty="0"/>
           </a:p>
         </p:txBody>
       </p:sp>
@@ -1775,7 +2218,7 @@
           </p:nvPr>
         </p:nvGraphicFramePr>
         <p:xfrm>
-          <a:off x="228600" y="2249424"/>
+          <a:off x="228600" y="2980944"/>
           <a:ext cx="8503920" cy="914400"/>
         </p:xfrm>
         <a:graphic>
@@ -1783,12 +2226,13 @@
             <a:tbl>
               <a:tblPr/>
               <a:tblGrid>
-                <a:gridCol w="3566160"/>
-                <a:gridCol w="1234440"/>
-                <a:gridCol w="1965960"/>
-                <a:gridCol w="1737360"/>
+                <a:gridCol w="1051560"/>
+                <a:gridCol w="3429000"/>
+                <a:gridCol w="777240"/>
+                <a:gridCol w="1874520"/>
+                <a:gridCol w="1371600"/>
               </a:tblGrid>
-              <a:tr h="187452">
+              <a:tr h="201168">
                 <a:tc>
                   <a:txBody>
                     <a:bodyPr/>
@@ -1798,7 +2242,7 @@
                         <a:buNone/>
                       </a:pPr>
                       <a:r>
-                        <a:rPr lang="en-US" sz="750" b="1" dirty="0">
+                        <a:rPr lang="en-US" sz="720" b="1" dirty="0">
                           <a:solidFill>
                             <a:srgbClr val="FFFFFF"/>
                           </a:solidFill>
@@ -1806,16 +2250,16 @@
                           <a:ea typeface="Meiryo UI" pitchFamily="34" charset="-122"/>
                           <a:cs typeface="Meiryo UI" pitchFamily="34" charset="-120"/>
                         </a:rPr>
-                        <a:t>打ち手</a:t>
+                        <a:t>STEP</a:t>
                       </a:r>
-                      <a:endParaRPr lang="en-US" sz="750" dirty="0">
+                      <a:endParaRPr lang="en-US" sz="720" dirty="0">
                         <a:latin typeface="Meiryo UI" charset="0"/>
                         <a:ea typeface="Meiryo UI" charset="0"/>
                         <a:cs typeface="Meiryo UI" charset="0"/>
                       </a:endParaRPr>
                     </a:p>
                   </a:txBody>
-                  <a:tcPr marL="27432" marR="27432" marT="27432" marB="27432" anchor="ctr">
+                  <a:tcPr marL="32004" marR="32004" marT="32004" marB="32004" anchor="ctr">
                     <a:lnL w="6350" cap="flat" cmpd="sng" algn="ctr">
                       <a:solidFill>
                         <a:srgbClr val="D3DED0"/>
@@ -1866,7 +2310,7 @@
                         <a:buNone/>
                       </a:pPr>
                       <a:r>
-                        <a:rPr lang="en-US" sz="750" b="1" dirty="0">
+                        <a:rPr lang="en-US" sz="720" b="1" dirty="0">
                           <a:solidFill>
                             <a:srgbClr val="FFFFFF"/>
                           </a:solidFill>
@@ -1874,16 +2318,16 @@
                           <a:ea typeface="Meiryo UI" pitchFamily="34" charset="-122"/>
                           <a:cs typeface="Meiryo UI" pitchFamily="34" charset="-120"/>
                         </a:rPr>
-                        <a:t>効果仮説</a:t>
+                        <a:t>打ち手</a:t>
                       </a:r>
-                      <a:endParaRPr lang="en-US" sz="750" dirty="0">
+                      <a:endParaRPr lang="en-US" sz="720" dirty="0">
                         <a:latin typeface="Meiryo UI" charset="0"/>
                         <a:ea typeface="Meiryo UI" charset="0"/>
                         <a:cs typeface="Meiryo UI" charset="0"/>
                       </a:endParaRPr>
                     </a:p>
                   </a:txBody>
-                  <a:tcPr marL="27432" marR="27432" marT="27432" marB="27432" anchor="ctr">
+                  <a:tcPr marL="32004" marR="32004" marT="32004" marB="32004" anchor="ctr">
                     <a:lnL w="6350" cap="flat" cmpd="sng" algn="ctr">
                       <a:solidFill>
                         <a:srgbClr val="D3DED0"/>
@@ -1934,7 +2378,7 @@
                         <a:buNone/>
                       </a:pPr>
                       <a:r>
-                        <a:rPr lang="en-US" sz="750" b="1" dirty="0">
+                        <a:rPr lang="en-US" sz="720" b="1" dirty="0">
                           <a:solidFill>
                             <a:srgbClr val="FFFFFF"/>
                           </a:solidFill>
@@ -1942,16 +2386,16 @@
                           <a:ea typeface="Meiryo UI" pitchFamily="34" charset="-122"/>
                           <a:cs typeface="Meiryo UI" pitchFamily="34" charset="-120"/>
                         </a:rPr>
-                        <a:t>誰が(体制)</a:t>
+                        <a:t>効果(植毛)</a:t>
                       </a:r>
-                      <a:endParaRPr lang="en-US" sz="750" dirty="0">
+                      <a:endParaRPr lang="en-US" sz="720" dirty="0">
                         <a:latin typeface="Meiryo UI" charset="0"/>
                         <a:ea typeface="Meiryo UI" charset="0"/>
                         <a:cs typeface="Meiryo UI" charset="0"/>
                       </a:endParaRPr>
                     </a:p>
                   </a:txBody>
-                  <a:tcPr marL="27432" marR="27432" marT="27432" marB="27432" anchor="ctr">
+                  <a:tcPr marL="32004" marR="32004" marT="32004" marB="32004" anchor="ctr">
                     <a:lnL w="6350" cap="flat" cmpd="sng" algn="ctr">
                       <a:solidFill>
                         <a:srgbClr val="D3DED0"/>
@@ -2002,7 +2446,75 @@
                         <a:buNone/>
                       </a:pPr>
                       <a:r>
-                        <a:rPr lang="en-US" sz="750" b="1" dirty="0">
+                        <a:rPr lang="en-US" sz="720" b="1" dirty="0">
+                          <a:solidFill>
+                            <a:srgbClr val="FFFFFF"/>
+                          </a:solidFill>
+                          <a:latin typeface="Meiryo UI" pitchFamily="34" charset="0"/>
+                          <a:ea typeface="Meiryo UI" pitchFamily="34" charset="-122"/>
+                          <a:cs typeface="Meiryo UI" pitchFamily="34" charset="-120"/>
+                        </a:rPr>
+                        <a:t>誰が(3チーム体制)</a:t>
+                      </a:r>
+                      <a:endParaRPr lang="en-US" sz="720" dirty="0">
+                        <a:latin typeface="Meiryo UI" charset="0"/>
+                        <a:ea typeface="Meiryo UI" charset="0"/>
+                        <a:cs typeface="Meiryo UI" charset="0"/>
+                      </a:endParaRPr>
+                    </a:p>
+                  </a:txBody>
+                  <a:tcPr marL="32004" marR="32004" marT="32004" marB="32004" anchor="ctr">
+                    <a:lnL w="6350" cap="flat" cmpd="sng" algn="ctr">
+                      <a:solidFill>
+                        <a:srgbClr val="D3DED0"/>
+                      </a:solidFill>
+                      <a:prstDash val="solid"/>
+                      <a:round/>
+                      <a:headEnd type="none" w="med" len="med"/>
+                      <a:tailEnd type="none" w="med" len="med"/>
+                    </a:lnL>
+                    <a:lnR w="6350" cap="flat" cmpd="sng" algn="ctr">
+                      <a:solidFill>
+                        <a:srgbClr val="D3DED0"/>
+                      </a:solidFill>
+                      <a:prstDash val="solid"/>
+                      <a:round/>
+                      <a:headEnd type="none" w="med" len="med"/>
+                      <a:tailEnd type="none" w="med" len="med"/>
+                    </a:lnR>
+                    <a:lnT w="6350" cap="flat" cmpd="sng" algn="ctr">
+                      <a:solidFill>
+                        <a:srgbClr val="D3DED0"/>
+                      </a:solidFill>
+                      <a:prstDash val="solid"/>
+                      <a:round/>
+                      <a:headEnd type="none" w="med" len="med"/>
+                      <a:tailEnd type="none" w="med" len="med"/>
+                    </a:lnT>
+                    <a:lnB w="6350" cap="flat" cmpd="sng" algn="ctr">
+                      <a:solidFill>
+                        <a:srgbClr val="D3DED0"/>
+                      </a:solidFill>
+                      <a:prstDash val="solid"/>
+                      <a:round/>
+                      <a:headEnd type="none" w="med" len="med"/>
+                      <a:tailEnd type="none" w="med" len="med"/>
+                    </a:lnB>
+                    <a:solidFill>
+                      <a:srgbClr val="2C5F2D"/>
+                    </a:solidFill>
+                  </a:tcPr>
+                </a:tc>
+                <a:tc>
+                  <a:txBody>
+                    <a:bodyPr/>
+                    <a:lstStyle/>
+                    <a:p>
+                      <a:pPr indent="0" marL="0">
+                        <a:buNone/>
+                      </a:pPr>
+                      <a:r>
+                        <a:rPr lang="en-US" sz="720" b="1" dirty="0">
                           <a:solidFill>
                             <a:srgbClr val="FFFFFF"/>
                           </a:solidFill>
@@ -2012,14 +2524,14 @@
                         </a:rPr>
                         <a:t>いつまでに</a:t>
                       </a:r>
-                      <a:endParaRPr lang="en-US" sz="750" dirty="0">
+                      <a:endParaRPr lang="en-US" sz="720" dirty="0">
                         <a:latin typeface="Meiryo UI" charset="0"/>
                         <a:ea typeface="Meiryo UI" charset="0"/>
                         <a:cs typeface="Meiryo UI" charset="0"/>
                       </a:endParaRPr>
                     </a:p>
                   </a:txBody>
-                  <a:tcPr marL="27432" marR="27432" marT="27432" marB="27432" anchor="ctr">
+                  <a:tcPr marL="32004" marR="32004" marT="32004" marB="32004" anchor="ctr">
                     <a:lnL w="6350" cap="flat" cmpd="sng" algn="ctr">
                       <a:solidFill>
                         <a:srgbClr val="D3DED0"/>
@@ -2062,86 +2574,7 @@
                   </a:tcPr>
                 </a:tc>
               </a:tr>
-              <a:tr h="187452">
-                <a:tc gridSpan="4">
-                  <a:txBody>
-                    <a:bodyPr/>
-                    <a:lstStyle/>
-                    <a:p>
-                      <a:pPr indent="0" marL="0">
-                        <a:buNone/>
-                      </a:pPr>
-                      <a:r>
-                        <a:rPr lang="en-US" sz="750" b="1" dirty="0">
-                          <a:solidFill>
-                            <a:srgbClr val="1F3D20"/>
-                          </a:solidFill>
-                          <a:latin typeface="Meiryo UI" pitchFamily="34" charset="0"/>
-                          <a:ea typeface="Meiryo UI" pitchFamily="34" charset="-122"/>
-                          <a:cs typeface="Meiryo UI" pitchFamily="34" charset="-120"/>
-                        </a:rPr>
-                        <a:t>A. 自動化・自律化</a:t>
-                      </a:r>
-                      <a:endParaRPr lang="en-US" sz="750" dirty="0">
-                        <a:latin typeface="Meiryo UI" charset="0"/>
-                        <a:ea typeface="Meiryo UI" charset="0"/>
-                        <a:cs typeface="Meiryo UI" charset="0"/>
-                      </a:endParaRPr>
-                    </a:p>
-                  </a:txBody>
-                  <a:tcPr marL="27432" marR="27432" marT="27432" marB="27432" anchor="ctr">
-                    <a:lnL w="6350" cap="flat" cmpd="sng" algn="ctr">
-                      <a:solidFill>
-                        <a:srgbClr val="D3DED0"/>
-                      </a:solidFill>
-                      <a:prstDash val="solid"/>
-                      <a:round/>
-                      <a:headEnd type="none" w="med" len="med"/>
-                      <a:tailEnd type="none" w="med" len="med"/>
-                    </a:lnL>
-                    <a:lnR w="6350" cap="flat" cmpd="sng" algn="ctr">
-                      <a:solidFill>
-                        <a:srgbClr val="D3DED0"/>
-                      </a:solidFill>
-                      <a:prstDash val="solid"/>
-                      <a:round/>
-                      <a:headEnd type="none" w="med" len="med"/>
-                      <a:tailEnd type="none" w="med" len="med"/>
-                    </a:lnR>
-                    <a:lnT w="6350" cap="flat" cmpd="sng" algn="ctr">
-                      <a:solidFill>
-                        <a:srgbClr val="D3DED0"/>
-                      </a:solidFill>
-                      <a:prstDash val="solid"/>
-                      <a:round/>
-                      <a:headEnd type="none" w="med" len="med"/>
-                      <a:tailEnd type="none" w="med" len="med"/>
-                    </a:lnT>
-                    <a:lnB w="6350" cap="flat" cmpd="sng" algn="ctr">
-                      <a:solidFill>
-                        <a:srgbClr val="D3DED0"/>
-                      </a:solidFill>
-                      <a:prstDash val="solid"/>
-                      <a:round/>
-                      <a:headEnd type="none" w="med" len="med"/>
-                      <a:tailEnd type="none" w="med" len="med"/>
-                    </a:lnB>
-                    <a:solidFill>
-                      <a:srgbClr val="DFEBDB"/>
-                    </a:solidFill>
-                  </a:tcPr>
-                </a:tc>
-                <a:tc hMerge="1">
-                  <a:tcPr/>
-                </a:tc>
-                <a:tc hMerge="1">
-                  <a:tcPr/>
-                </a:tc>
-                <a:tc hMerge="1">
-                  <a:tcPr/>
-                </a:tc>
-              </a:tr>
-              <a:tr h="187452">
+              <a:tr h="475488">
                 <a:tc>
                   <a:txBody>
                     <a:bodyPr/>
@@ -2151,7 +2584,7 @@
                         <a:buNone/>
                       </a:pPr>
                       <a:r>
-                        <a:rPr lang="en-US" sz="700" dirty="0">
+                        <a:rPr lang="en-US" sz="690" b="1" dirty="0">
                           <a:solidFill>
                             <a:srgbClr val="2B2B2B"/>
                           </a:solidFill>
@@ -2159,16 +2592,105 @@
                           <a:ea typeface="Meiryo UI" pitchFamily="34" charset="-122"/>
                           <a:cs typeface="Meiryo UI" pitchFamily="34" charset="-120"/>
                         </a:rPr>
-                        <a:t>A1 フィジカルAI(包装の構造転換+植毛の資材供給・箱詰)</a:t>
+                        <a:t>① 基準是正</a:t>
                       </a:r>
-                      <a:endParaRPr lang="en-US" sz="700" dirty="0">
+                      <a:endParaRPr lang="en-US" sz="690" dirty="0">
+                        <a:latin typeface="Meiryo UI" charset="0"/>
+                        <a:ea typeface="Meiryo UI" charset="0"/>
+                        <a:cs typeface="Meiryo UI" charset="0"/>
+                      </a:endParaRPr>
+                    </a:p>
+                    <a:p>
+                      <a:pPr indent="0" marL="0">
+                        <a:buNone/>
+                      </a:pPr>
+                      <a:r>
+                        <a:rPr lang="en-US" sz="690" b="1" dirty="0">
+                          <a:solidFill>
+                            <a:srgbClr val="2B2B2B"/>
+                          </a:solidFill>
+                          <a:latin typeface="Meiryo UI" pitchFamily="34" charset="0"/>
+                          <a:ea typeface="Meiryo UI" pitchFamily="34" charset="-122"/>
+                          <a:cs typeface="Meiryo UI" pitchFamily="34" charset="-120"/>
+                        </a:rPr>
+                        <a:t>=消す</a:t>
+                      </a:r>
+                      <a:endParaRPr lang="en-US" sz="690" dirty="0">
                         <a:latin typeface="Meiryo UI" charset="0"/>
                         <a:ea typeface="Meiryo UI" charset="0"/>
                         <a:cs typeface="Meiryo UI" charset="0"/>
                       </a:endParaRPr>
                     </a:p>
                   </a:txBody>
-                  <a:tcPr marL="27432" marR="27432" marT="27432" marB="27432" anchor="ctr">
+                  <a:tcPr marL="32004" marR="32004" marT="32004" marB="32004" anchor="ctr">
+                    <a:lnL w="6350" cap="flat" cmpd="sng" algn="ctr">
+                      <a:solidFill>
+                        <a:srgbClr val="D3DED0"/>
+                      </a:solidFill>
+                      <a:prstDash val="solid"/>
+                      <a:round/>
+                      <a:headEnd type="none" w="med" len="med"/>
+                      <a:tailEnd type="none" w="med" len="med"/>
+                    </a:lnL>
+                    <a:lnR w="6350" cap="flat" cmpd="sng" algn="ctr">
+                      <a:solidFill>
+                        <a:srgbClr val="D3DED0"/>
+                      </a:solidFill>
+                      <a:prstDash val="solid"/>
+                      <a:round/>
+                      <a:headEnd type="none" w="med" len="med"/>
+                      <a:tailEnd type="none" w="med" len="med"/>
+                    </a:lnR>
+                    <a:lnT w="6350" cap="flat" cmpd="sng" algn="ctr">
+                      <a:solidFill>
+                        <a:srgbClr val="D3DED0"/>
+                      </a:solidFill>
+                      <a:prstDash val="solid"/>
+                      <a:round/>
+                      <a:headEnd type="none" w="med" len="med"/>
+                      <a:tailEnd type="none" w="med" len="med"/>
+                    </a:lnT>
+                    <a:lnB w="6350" cap="flat" cmpd="sng" algn="ctr">
+                      <a:solidFill>
+                        <a:srgbClr val="D3DED0"/>
+                      </a:solidFill>
+                      <a:prstDash val="solid"/>
+                      <a:round/>
+                      <a:headEnd type="none" w="med" len="med"/>
+                      <a:tailEnd type="none" w="med" len="med"/>
+                    </a:lnB>
+                    <a:solidFill>
+                      <a:srgbClr val="DFEBDB"/>
+                    </a:solidFill>
+                  </a:tcPr>
+                </a:tc>
+                <a:tc>
+                  <a:txBody>
+                    <a:bodyPr/>
+                    <a:lstStyle/>
+                    <a:p>
+                      <a:pPr indent="0" marL="0">
+                        <a:buNone/>
+                      </a:pPr>
+                      <a:r>
+                        <a:rPr lang="en-US" sz="690" dirty="0">
+                          <a:solidFill>
+                            <a:srgbClr val="2B2B2B"/>
+                          </a:solidFill>
+                          <a:latin typeface="Meiryo UI" pitchFamily="34" charset="0"/>
+                          <a:ea typeface="Meiryo UI" pitchFamily="34" charset="-122"/>
+                          <a:cs typeface="Meiryo UI" pitchFamily="34" charset="-120"/>
+                        </a:rPr>
+                        <a:t>検査規定変更(全数目視→AI全数+統計監査)・長毛処理の発生源対策と公差再設定・記録/点検のリスクベース化。品質実績(クレーム率・Cpk)で裏付け</a:t>
+                      </a:r>
+                      <a:endParaRPr lang="en-US" sz="690" dirty="0">
+                        <a:latin typeface="Meiryo UI" charset="0"/>
+                        <a:ea typeface="Meiryo UI" charset="0"/>
+                        <a:cs typeface="Meiryo UI" charset="0"/>
+                      </a:endParaRPr>
+                    </a:p>
+                  </a:txBody>
+                  <a:tcPr marL="32004" marR="32004" marT="32004" marB="32004" anchor="ctr">
                     <a:lnL w="6350" cap="flat" cmpd="sng" algn="ctr">
                       <a:solidFill>
                         <a:srgbClr val="D3DED0"/>
@@ -2216,7 +2738,7 @@
                         <a:buNone/>
                       </a:pPr>
                       <a:r>
-                        <a:rPr lang="en-US" sz="700" b="1" dirty="0">
+                        <a:rPr lang="en-US" sz="690" b="1" dirty="0">
                           <a:solidFill>
                             <a:srgbClr val="2B2B2B"/>
                           </a:solidFill>
@@ -2224,16 +2746,16 @@
                           <a:ea typeface="Meiryo UI" pitchFamily="34" charset="-122"/>
                           <a:cs typeface="Meiryo UI" pitchFamily="34" charset="-120"/>
                         </a:rPr>
-                        <a:t>▲53名(工場全体)</a:t>
+                        <a:t>▲12〜18名</a:t>
                       </a:r>
-                      <a:endParaRPr lang="en-US" sz="700" dirty="0">
+                      <a:endParaRPr lang="en-US" sz="690" dirty="0">
                         <a:latin typeface="Meiryo UI" charset="0"/>
                         <a:ea typeface="Meiryo UI" charset="0"/>
                         <a:cs typeface="Meiryo UI" charset="0"/>
                       </a:endParaRPr>
                     </a:p>
                   </a:txBody>
-                  <a:tcPr marL="27432" marR="27432" marT="27432" marB="27432" anchor="ctr">
+                  <a:tcPr marL="32004" marR="32004" marT="32004" marB="32004" anchor="ctr">
                     <a:lnL w="6350" cap="flat" cmpd="sng" algn="ctr">
                       <a:solidFill>
                         <a:srgbClr val="D3DED0"/>
@@ -2281,7 +2803,7 @@
                         <a:buNone/>
                       </a:pPr>
                       <a:r>
-                        <a:rPr lang="en-US" sz="700" dirty="0">
+                        <a:rPr lang="en-US" sz="690" dirty="0">
                           <a:solidFill>
                             <a:srgbClr val="2B2B2B"/>
                           </a:solidFill>
@@ -2289,16 +2811,16 @@
                           <a:ea typeface="Meiryo UI" pitchFamily="34" charset="-122"/>
                           <a:cs typeface="Meiryo UI" pitchFamily="34" charset="-120"/>
                         </a:rPr>
-                        <a:t>生技セ統括/プロ包技室・工場/SCM戦略部</a:t>
+                        <a:t>基準・規定改定チーム: 品質保証部門L+R&amp;D+工場QA(改定オーナーは品質保証=社内正統性)</a:t>
                       </a:r>
-                      <a:endParaRPr lang="en-US" sz="700" dirty="0">
+                      <a:endParaRPr lang="en-US" sz="690" dirty="0">
                         <a:latin typeface="Meiryo UI" charset="0"/>
                         <a:ea typeface="Meiryo UI" charset="0"/>
                         <a:cs typeface="Meiryo UI" charset="0"/>
                       </a:endParaRPr>
                     </a:p>
                   </a:txBody>
-                  <a:tcPr marL="27432" marR="27432" marT="27432" marB="27432" anchor="ctr">
+                  <a:tcPr marL="32004" marR="32004" marT="32004" marB="32004" anchor="ctr">
                     <a:lnL w="6350" cap="flat" cmpd="sng" algn="ctr">
                       <a:solidFill>
                         <a:srgbClr val="D3DED0"/>
@@ -2346,7 +2868,7 @@
                         <a:buNone/>
                       </a:pPr>
                       <a:r>
-                        <a:rPr lang="en-US" sz="700" dirty="0">
+                        <a:rPr lang="en-US" sz="690" dirty="0">
                           <a:solidFill>
                             <a:srgbClr val="2B2B2B"/>
                           </a:solidFill>
@@ -2354,16 +2876,16 @@
                           <a:ea typeface="Meiryo UI" pitchFamily="34" charset="-122"/>
                           <a:cs typeface="Meiryo UI" pitchFamily="34" charset="-120"/>
                         </a:rPr>
-                        <a:t>27年PoC→29年→35年</a:t>
+                        <a:t>26/9台帳→26/12方針合意→27/6改定第1弾</a:t>
                       </a:r>
-                      <a:endParaRPr lang="en-US" sz="700" dirty="0">
+                      <a:endParaRPr lang="en-US" sz="690" dirty="0">
                         <a:latin typeface="Meiryo UI" charset="0"/>
                         <a:ea typeface="Meiryo UI" charset="0"/>
                         <a:cs typeface="Meiryo UI" charset="0"/>
                       </a:endParaRPr>
                     </a:p>
                   </a:txBody>
-                  <a:tcPr marL="27432" marR="27432" marT="27432" marB="27432" anchor="ctr">
+                  <a:tcPr marL="32004" marR="32004" marT="32004" marB="32004" anchor="ctr">
                     <a:lnL w="6350" cap="flat" cmpd="sng" algn="ctr">
                       <a:solidFill>
                         <a:srgbClr val="D3DED0"/>
@@ -2403,7 +2925,7 @@
                   </a:tcPr>
                 </a:tc>
               </a:tr>
-              <a:tr h="187452">
+              <a:tr h="475488">
                 <a:tc>
                   <a:txBody>
                     <a:bodyPr/>
@@ -2413,7 +2935,7 @@
                         <a:buNone/>
                       </a:pPr>
                       <a:r>
-                        <a:rPr lang="en-US" sz="700" dirty="0">
+                        <a:rPr lang="en-US" sz="690" b="1" dirty="0">
                           <a:solidFill>
                             <a:srgbClr val="2B2B2B"/>
                           </a:solidFill>
@@ -2421,16 +2943,105 @@
                           <a:ea typeface="Meiryo UI" pitchFamily="34" charset="-122"/>
                           <a:cs typeface="Meiryo UI" pitchFamily="34" charset="-120"/>
                         </a:rPr>
-                        <a:t>A2 ハブラシ自動検査装置(AI画像検査で全数目視を代替)</a:t>
+                        <a:t>② プロセス再設計</a:t>
                       </a:r>
-                      <a:endParaRPr lang="en-US" sz="700" dirty="0">
+                      <a:endParaRPr lang="en-US" sz="690" dirty="0">
+                        <a:latin typeface="Meiryo UI" charset="0"/>
+                        <a:ea typeface="Meiryo UI" charset="0"/>
+                        <a:cs typeface="Meiryo UI" charset="0"/>
+                      </a:endParaRPr>
+                    </a:p>
+                    <a:p>
+                      <a:pPr indent="0" marL="0">
+                        <a:buNone/>
+                      </a:pPr>
+                      <a:r>
+                        <a:rPr lang="en-US" sz="690" b="1" dirty="0">
+                          <a:solidFill>
+                            <a:srgbClr val="2B2B2B"/>
+                          </a:solidFill>
+                          <a:latin typeface="Meiryo UI" pitchFamily="34" charset="0"/>
+                          <a:ea typeface="Meiryo UI" pitchFamily="34" charset="-122"/>
+                          <a:cs typeface="Meiryo UI" pitchFamily="34" charset="-120"/>
+                        </a:rPr>
+                        <a:t>=減らす</a:t>
+                      </a:r>
+                      <a:endParaRPr lang="en-US" sz="690" dirty="0">
                         <a:latin typeface="Meiryo UI" charset="0"/>
                         <a:ea typeface="Meiryo UI" charset="0"/>
                         <a:cs typeface="Meiryo UI" charset="0"/>
                       </a:endParaRPr>
                     </a:p>
                   </a:txBody>
-                  <a:tcPr marL="27432" marR="27432" marT="27432" marB="27432" anchor="ctr">
+                  <a:tcPr marL="32004" marR="32004" marT="32004" marB="32004" anchor="ctr">
+                    <a:lnL w="6350" cap="flat" cmpd="sng" algn="ctr">
+                      <a:solidFill>
+                        <a:srgbClr val="D3DED0"/>
+                      </a:solidFill>
+                      <a:prstDash val="solid"/>
+                      <a:round/>
+                      <a:headEnd type="none" w="med" len="med"/>
+                      <a:tailEnd type="none" w="med" len="med"/>
+                    </a:lnL>
+                    <a:lnR w="6350" cap="flat" cmpd="sng" algn="ctr">
+                      <a:solidFill>
+                        <a:srgbClr val="D3DED0"/>
+                      </a:solidFill>
+                      <a:prstDash val="solid"/>
+                      <a:round/>
+                      <a:headEnd type="none" w="med" len="med"/>
+                      <a:tailEnd type="none" w="med" len="med"/>
+                    </a:lnR>
+                    <a:lnT w="6350" cap="flat" cmpd="sng" algn="ctr">
+                      <a:solidFill>
+                        <a:srgbClr val="D3DED0"/>
+                      </a:solidFill>
+                      <a:prstDash val="solid"/>
+                      <a:round/>
+                      <a:headEnd type="none" w="med" len="med"/>
+                      <a:tailEnd type="none" w="med" len="med"/>
+                    </a:lnT>
+                    <a:lnB w="6350" cap="flat" cmpd="sng" algn="ctr">
+                      <a:solidFill>
+                        <a:srgbClr val="D3DED0"/>
+                      </a:solidFill>
+                      <a:prstDash val="solid"/>
+                      <a:round/>
+                      <a:headEnd type="none" w="med" len="med"/>
+                      <a:tailEnd type="none" w="med" len="med"/>
+                    </a:lnB>
+                    <a:solidFill>
+                      <a:srgbClr val="DFEBDB"/>
+                    </a:solidFill>
+                  </a:tcPr>
+                </a:tc>
+                <a:tc>
+                  <a:txBody>
+                    <a:bodyPr/>
+                    <a:lstStyle/>
+                    <a:p>
+                      <a:pPr indent="0" marL="0">
+                        <a:buNone/>
+                      </a:pPr>
+                      <a:r>
+                        <a:rPr lang="en-US" sz="690" dirty="0">
+                          <a:solidFill>
+                            <a:srgbClr val="2B2B2B"/>
+                          </a:solidFill>
+                          <a:latin typeface="Meiryo UI" pitchFamily="34" charset="0"/>
+                          <a:ea typeface="Meiryo UI" pitchFamily="34" charset="-122"/>
+                          <a:cs typeface="Meiryo UI" pitchFamily="34" charset="-120"/>
+                        </a:rPr>
+                        <a:t>改定後基準を前提にECRSで工程再設計。B停止の原因潰し込みで半減・復旧標準化・段替えSMED・A停止(前準備/後片付け)再設計で効果の食い潰し防止</a:t>
+                      </a:r>
+                      <a:endParaRPr lang="en-US" sz="690" dirty="0">
+                        <a:latin typeface="Meiryo UI" charset="0"/>
+                        <a:ea typeface="Meiryo UI" charset="0"/>
+                        <a:cs typeface="Meiryo UI" charset="0"/>
+                      </a:endParaRPr>
+                    </a:p>
+                  </a:txBody>
+                  <a:tcPr marL="32004" marR="32004" marT="32004" marB="32004" anchor="ctr">
                     <a:lnL w="6350" cap="flat" cmpd="sng" algn="ctr">
                       <a:solidFill>
                         <a:srgbClr val="D3DED0"/>
@@ -2478,7 +3089,7 @@
                         <a:buNone/>
                       </a:pPr>
                       <a:r>
-                        <a:rPr lang="en-US" sz="700" b="1" dirty="0">
+                        <a:rPr lang="en-US" sz="690" b="1" dirty="0">
                           <a:solidFill>
                             <a:srgbClr val="2B2B2B"/>
                           </a:solidFill>
@@ -2486,16 +3097,16 @@
                           <a:ea typeface="Meiryo UI" pitchFamily="34" charset="-122"/>
                           <a:cs typeface="Meiryo UI" pitchFamily="34" charset="-120"/>
                         </a:rPr>
-                        <a:t>▲15〜20名</a:t>
+                        <a:t>▲8〜12名</a:t>
                       </a:r>
-                      <a:endParaRPr lang="en-US" sz="700" dirty="0">
+                      <a:endParaRPr lang="en-US" sz="690" dirty="0">
                         <a:latin typeface="Meiryo UI" charset="0"/>
                         <a:ea typeface="Meiryo UI" charset="0"/>
                         <a:cs typeface="Meiryo UI" charset="0"/>
                       </a:endParaRPr>
                     </a:p>
                   </a:txBody>
-                  <a:tcPr marL="27432" marR="27432" marT="27432" marB="27432" anchor="ctr">
+                  <a:tcPr marL="32004" marR="32004" marT="32004" marB="32004" anchor="ctr">
                     <a:lnL w="6350" cap="flat" cmpd="sng" algn="ctr">
                       <a:solidFill>
                         <a:srgbClr val="D3DED0"/>
@@ -2543,7 +3154,7 @@
                         <a:buNone/>
                       </a:pPr>
                       <a:r>
-                        <a:rPr lang="en-US" sz="700" dirty="0">
+                        <a:rPr lang="en-US" sz="690" dirty="0">
                           <a:solidFill>
                             <a:srgbClr val="2B2B2B"/>
                           </a:solidFill>
@@ -2551,16 +3162,16 @@
                           <a:ea typeface="Meiryo UI" pitchFamily="34" charset="-122"/>
                           <a:cs typeface="Meiryo UI" pitchFamily="34" charset="-120"/>
                         </a:rPr>
-                        <a:t>工場+生技セ+品質保証</a:t>
+                        <a:t>業務プロセス改善チーム: 明石工場(中林氏)L+プロ包技室+製造現場</a:t>
                       </a:r>
-                      <a:endParaRPr lang="en-US" sz="700" dirty="0">
+                      <a:endParaRPr lang="en-US" sz="690" dirty="0">
                         <a:latin typeface="Meiryo UI" charset="0"/>
                         <a:ea typeface="Meiryo UI" charset="0"/>
                         <a:cs typeface="Meiryo UI" charset="0"/>
                       </a:endParaRPr>
                     </a:p>
                   </a:txBody>
-                  <a:tcPr marL="27432" marR="27432" marT="27432" marB="27432" anchor="ctr">
+                  <a:tcPr marL="32004" marR="32004" marT="32004" marB="32004" anchor="ctr">
                     <a:lnL w="6350" cap="flat" cmpd="sng" algn="ctr">
                       <a:solidFill>
                         <a:srgbClr val="D3DED0"/>
@@ -2608,7 +3219,7 @@
                         <a:buNone/>
                       </a:pPr>
                       <a:r>
-                        <a:rPr lang="en-US" sz="700" dirty="0">
+                        <a:rPr lang="en-US" sz="690" dirty="0">
                           <a:solidFill>
                             <a:srgbClr val="2B2B2B"/>
                           </a:solidFill>
@@ -2616,16 +3227,16 @@
                           <a:ea typeface="Meiryo UI" pitchFamily="34" charset="-122"/>
                           <a:cs typeface="Meiryo UI" pitchFamily="34" charset="-120"/>
                         </a:rPr>
-                        <a:t>26/12試算→27年PoC→28年実装</a:t>
+                        <a:t>26/11分析→27/12実装</a:t>
                       </a:r>
-                      <a:endParaRPr lang="en-US" sz="700" dirty="0">
+                      <a:endParaRPr lang="en-US" sz="690" dirty="0">
                         <a:latin typeface="Meiryo UI" charset="0"/>
                         <a:ea typeface="Meiryo UI" charset="0"/>
                         <a:cs typeface="Meiryo UI" charset="0"/>
                       </a:endParaRPr>
                     </a:p>
                   </a:txBody>
-                  <a:tcPr marL="27432" marR="27432" marT="27432" marB="27432" anchor="ctr">
+                  <a:tcPr marL="32004" marR="32004" marT="32004" marB="32004" anchor="ctr">
                     <a:lnL w="6350" cap="flat" cmpd="sng" algn="ctr">
                       <a:solidFill>
                         <a:srgbClr val="D3DED0"/>
@@ -2665,7 +3276,7 @@
                   </a:tcPr>
                 </a:tc>
               </a:tr>
-              <a:tr h="187452">
+              <a:tr h="475488">
                 <a:tc>
                   <a:txBody>
                     <a:bodyPr/>
@@ -2675,7 +3286,7 @@
                         <a:buNone/>
                       </a:pPr>
                       <a:r>
-                        <a:rPr lang="en-US" sz="700" dirty="0">
+                        <a:rPr lang="en-US" sz="690" b="1" dirty="0">
                           <a:solidFill>
                             <a:srgbClr val="2B2B2B"/>
                           </a:solidFill>
@@ -2683,16 +3294,105 @@
                           <a:ea typeface="Meiryo UI" pitchFamily="34" charset="-122"/>
                           <a:cs typeface="Meiryo UI" pitchFamily="34" charset="-120"/>
                         </a:rPr>
-                        <a:t>A3 AMRによる工場全体の搬送・供給統合(ライン毎配置を廃止)</a:t>
+                        <a:t>③ 実行手段の割当て</a:t>
                       </a:r>
-                      <a:endParaRPr lang="en-US" sz="700" dirty="0">
+                      <a:endParaRPr lang="en-US" sz="690" dirty="0">
+                        <a:latin typeface="Meiryo UI" charset="0"/>
+                        <a:ea typeface="Meiryo UI" charset="0"/>
+                        <a:cs typeface="Meiryo UI" charset="0"/>
+                      </a:endParaRPr>
+                    </a:p>
+                    <a:p>
+                      <a:pPr indent="0" marL="0">
+                        <a:buNone/>
+                      </a:pPr>
+                      <a:r>
+                        <a:rPr lang="en-US" sz="690" b="1" dirty="0">
+                          <a:solidFill>
+                            <a:srgbClr val="2B2B2B"/>
+                          </a:solidFill>
+                          <a:latin typeface="Meiryo UI" pitchFamily="34" charset="0"/>
+                          <a:ea typeface="Meiryo UI" pitchFamily="34" charset="-122"/>
+                          <a:cs typeface="Meiryo UI" pitchFamily="34" charset="-120"/>
+                        </a:rPr>
+                        <a:t>=置き換える</a:t>
+                      </a:r>
+                      <a:endParaRPr lang="en-US" sz="690" dirty="0">
                         <a:latin typeface="Meiryo UI" charset="0"/>
                         <a:ea typeface="Meiryo UI" charset="0"/>
                         <a:cs typeface="Meiryo UI" charset="0"/>
                       </a:endParaRPr>
                     </a:p>
                   </a:txBody>
-                  <a:tcPr marL="27432" marR="27432" marT="27432" marB="27432" anchor="ctr">
+                  <a:tcPr marL="32004" marR="32004" marT="32004" marB="32004" anchor="ctr">
+                    <a:lnL w="6350" cap="flat" cmpd="sng" algn="ctr">
+                      <a:solidFill>
+                        <a:srgbClr val="D3DED0"/>
+                      </a:solidFill>
+                      <a:prstDash val="solid"/>
+                      <a:round/>
+                      <a:headEnd type="none" w="med" len="med"/>
+                      <a:tailEnd type="none" w="med" len="med"/>
+                    </a:lnL>
+                    <a:lnR w="6350" cap="flat" cmpd="sng" algn="ctr">
+                      <a:solidFill>
+                        <a:srgbClr val="D3DED0"/>
+                      </a:solidFill>
+                      <a:prstDash val="solid"/>
+                      <a:round/>
+                      <a:headEnd type="none" w="med" len="med"/>
+                      <a:tailEnd type="none" w="med" len="med"/>
+                    </a:lnR>
+                    <a:lnT w="6350" cap="flat" cmpd="sng" algn="ctr">
+                      <a:solidFill>
+                        <a:srgbClr val="D3DED0"/>
+                      </a:solidFill>
+                      <a:prstDash val="solid"/>
+                      <a:round/>
+                      <a:headEnd type="none" w="med" len="med"/>
+                      <a:tailEnd type="none" w="med" len="med"/>
+                    </a:lnT>
+                    <a:lnB w="6350" cap="flat" cmpd="sng" algn="ctr">
+                      <a:solidFill>
+                        <a:srgbClr val="D3DED0"/>
+                      </a:solidFill>
+                      <a:prstDash val="solid"/>
+                      <a:round/>
+                      <a:headEnd type="none" w="med" len="med"/>
+                      <a:tailEnd type="none" w="med" len="med"/>
+                    </a:lnB>
+                    <a:solidFill>
+                      <a:srgbClr val="DFEBDB"/>
+                    </a:solidFill>
+                  </a:tcPr>
+                </a:tc>
+                <a:tc>
+                  <a:txBody>
+                    <a:bodyPr/>
+                    <a:lstStyle/>
+                    <a:p>
+                      <a:pPr indent="0" marL="0">
+                        <a:buNone/>
+                      </a:pPr>
+                      <a:r>
+                        <a:rPr lang="en-US" sz="690" dirty="0">
+                          <a:solidFill>
+                            <a:srgbClr val="2B2B2B"/>
+                          </a:solidFill>
+                          <a:latin typeface="Meiryo UI" pitchFamily="34" charset="0"/>
+                          <a:ea typeface="Meiryo UI" pitchFamily="34" charset="-122"/>
+                          <a:cs typeface="Meiryo UI" pitchFamily="34" charset="-120"/>
+                        </a:rPr>
+                        <a:t>残存作業のみに人/フィジカルAI(供給・箱詰)/自動検査装置/AMRを最適割当て。要件は「改定後の基準・プロセス」を前提に凍結(Fit to Standard・カスタム開発最小化)</a:t>
+                      </a:r>
+                      <a:endParaRPr lang="en-US" sz="690" dirty="0">
+                        <a:latin typeface="Meiryo UI" charset="0"/>
+                        <a:ea typeface="Meiryo UI" charset="0"/>
+                        <a:cs typeface="Meiryo UI" charset="0"/>
+                      </a:endParaRPr>
+                    </a:p>
+                  </a:txBody>
+                  <a:tcPr marL="32004" marR="32004" marT="32004" marB="32004" anchor="ctr">
                     <a:lnL w="6350" cap="flat" cmpd="sng" algn="ctr">
                       <a:solidFill>
                         <a:srgbClr val="D3DED0"/>
@@ -2740,7 +3440,7 @@
                         <a:buNone/>
                       </a:pPr>
                       <a:r>
-                        <a:rPr lang="en-US" sz="700" b="1" dirty="0">
+                        <a:rPr lang="en-US" sz="690" b="1" dirty="0">
                           <a:solidFill>
                             <a:srgbClr val="2B2B2B"/>
                           </a:solidFill>
@@ -2748,16 +3448,16 @@
                           <a:ea typeface="Meiryo UI" pitchFamily="34" charset="-122"/>
                           <a:cs typeface="Meiryo UI" pitchFamily="34" charset="-120"/>
                         </a:rPr>
-                        <a:t>▲8〜10名</a:t>
+                        <a:t>▲25〜30名</a:t>
                       </a:r>
-                      <a:endParaRPr lang="en-US" sz="700" dirty="0">
+                      <a:endParaRPr lang="en-US" sz="690" dirty="0">
                         <a:latin typeface="Meiryo UI" charset="0"/>
                         <a:ea typeface="Meiryo UI" charset="0"/>
                         <a:cs typeface="Meiryo UI" charset="0"/>
                       </a:endParaRPr>
                     </a:p>
                   </a:txBody>
-                  <a:tcPr marL="27432" marR="27432" marT="27432" marB="27432" anchor="ctr">
+                  <a:tcPr marL="32004" marR="32004" marT="32004" marB="32004" anchor="ctr">
                     <a:lnL w="6350" cap="flat" cmpd="sng" algn="ctr">
                       <a:solidFill>
                         <a:srgbClr val="D3DED0"/>
@@ -2805,7 +3505,7 @@
                         <a:buNone/>
                       </a:pPr>
                       <a:r>
-                        <a:rPr lang="en-US" sz="700" dirty="0">
+                        <a:rPr lang="en-US" sz="690" dirty="0">
                           <a:solidFill>
                             <a:srgbClr val="2B2B2B"/>
                           </a:solidFill>
@@ -2813,16 +3513,16 @@
                           <a:ea typeface="Meiryo UI" pitchFamily="34" charset="-122"/>
                           <a:cs typeface="Meiryo UI" pitchFamily="34" charset="-120"/>
                         </a:rPr>
-                        <a:t>生技セ+SCM戦略部+工場</a:t>
+                        <a:t>自動化・システムチーム: 生技セL+デジ戦(工場DX)+SCM戦略部(投資評価)</a:t>
                       </a:r>
-                      <a:endParaRPr lang="en-US" sz="700" dirty="0">
+                      <a:endParaRPr lang="en-US" sz="690" dirty="0">
                         <a:latin typeface="Meiryo UI" charset="0"/>
                         <a:ea typeface="Meiryo UI" charset="0"/>
                         <a:cs typeface="Meiryo UI" charset="0"/>
                       </a:endParaRPr>
                     </a:p>
                   </a:txBody>
-                  <a:tcPr marL="27432" marR="27432" marT="27432" marB="27432" anchor="ctr">
+                  <a:tcPr marL="32004" marR="32004" marT="32004" marB="32004" anchor="ctr">
                     <a:lnL w="6350" cap="flat" cmpd="sng" algn="ctr">
                       <a:solidFill>
                         <a:srgbClr val="D3DED0"/>
@@ -2870,7 +3570,7 @@
                         <a:buNone/>
                       </a:pPr>
                       <a:r>
-                        <a:rPr lang="en-US" sz="700" dirty="0">
+                        <a:rPr lang="en-US" sz="690" dirty="0">
                           <a:solidFill>
                             <a:srgbClr val="2B2B2B"/>
                           </a:solidFill>
@@ -2878,2087 +3578,16 @@
                           <a:ea typeface="Meiryo UI" pitchFamily="34" charset="-122"/>
                           <a:cs typeface="Meiryo UI" pitchFamily="34" charset="-120"/>
                         </a:rPr>
-                        <a:t>26年下期構想→27年PoC</a:t>
+                        <a:t>26/12要件定義→27年PoC→28〜29実装</a:t>
                       </a:r>
-                      <a:endParaRPr lang="en-US" sz="700" dirty="0">
+                      <a:endParaRPr lang="en-US" sz="690" dirty="0">
                         <a:latin typeface="Meiryo UI" charset="0"/>
                         <a:ea typeface="Meiryo UI" charset="0"/>
                         <a:cs typeface="Meiryo UI" charset="0"/>
                       </a:endParaRPr>
                     </a:p>
                   </a:txBody>
-                  <a:tcPr marL="27432" marR="27432" marT="27432" marB="27432" anchor="ctr">
-                    <a:lnL w="6350" cap="flat" cmpd="sng" algn="ctr">
-                      <a:solidFill>
-                        <a:srgbClr val="D3DED0"/>
-                      </a:solidFill>
-                      <a:prstDash val="solid"/>
-                      <a:round/>
-                      <a:headEnd type="none" w="med" len="med"/>
-                      <a:tailEnd type="none" w="med" len="med"/>
-                    </a:lnL>
-                    <a:lnR w="6350" cap="flat" cmpd="sng" algn="ctr">
-                      <a:solidFill>
-                        <a:srgbClr val="D3DED0"/>
-                      </a:solidFill>
-                      <a:prstDash val="solid"/>
-                      <a:round/>
-                      <a:headEnd type="none" w="med" len="med"/>
-                      <a:tailEnd type="none" w="med" len="med"/>
-                    </a:lnR>
-                    <a:lnT w="6350" cap="flat" cmpd="sng" algn="ctr">
-                      <a:solidFill>
-                        <a:srgbClr val="D3DED0"/>
-                      </a:solidFill>
-                      <a:prstDash val="solid"/>
-                      <a:round/>
-                      <a:headEnd type="none" w="med" len="med"/>
-                      <a:tailEnd type="none" w="med" len="med"/>
-                    </a:lnT>
-                    <a:lnB w="6350" cap="flat" cmpd="sng" algn="ctr">
-                      <a:solidFill>
-                        <a:srgbClr val="D3DED0"/>
-                      </a:solidFill>
-                      <a:prstDash val="solid"/>
-                      <a:round/>
-                      <a:headEnd type="none" w="med" len="med"/>
-                      <a:tailEnd type="none" w="med" len="med"/>
-                    </a:lnB>
-                  </a:tcPr>
-                </a:tc>
-              </a:tr>
-              <a:tr h="187452">
-                <a:tc gridSpan="4">
-                  <a:txBody>
-                    <a:bodyPr/>
-                    <a:lstStyle/>
-                    <a:p>
-                      <a:pPr indent="0" marL="0">
-                        <a:buNone/>
-                      </a:pPr>
-                      <a:r>
-                        <a:rPr lang="en-US" sz="750" b="1" dirty="0">
-                          <a:solidFill>
-                            <a:srgbClr val="B85042"/>
-                          </a:solidFill>
-                          <a:latin typeface="Meiryo UI" pitchFamily="34" charset="0"/>
-                          <a:ea typeface="Meiryo UI" pitchFamily="34" charset="-122"/>
-                          <a:cs typeface="Meiryo UI" pitchFamily="34" charset="-120"/>
-                        </a:rPr>
-                        <a:t>B. 品質基準・規定のゼロベース見直し(低投資のクイックウィン)</a:t>
-                      </a:r>
-                      <a:endParaRPr lang="en-US" sz="750" dirty="0">
-                        <a:latin typeface="Meiryo UI" charset="0"/>
-                        <a:ea typeface="Meiryo UI" charset="0"/>
-                        <a:cs typeface="Meiryo UI" charset="0"/>
-                      </a:endParaRPr>
-                    </a:p>
-                  </a:txBody>
-                  <a:tcPr marL="27432" marR="27432" marT="27432" marB="27432" anchor="ctr">
-                    <a:lnL w="6350" cap="flat" cmpd="sng" algn="ctr">
-                      <a:solidFill>
-                        <a:srgbClr val="D3DED0"/>
-                      </a:solidFill>
-                      <a:prstDash val="solid"/>
-                      <a:round/>
-                      <a:headEnd type="none" w="med" len="med"/>
-                      <a:tailEnd type="none" w="med" len="med"/>
-                    </a:lnL>
-                    <a:lnR w="6350" cap="flat" cmpd="sng" algn="ctr">
-                      <a:solidFill>
-                        <a:srgbClr val="D3DED0"/>
-                      </a:solidFill>
-                      <a:prstDash val="solid"/>
-                      <a:round/>
-                      <a:headEnd type="none" w="med" len="med"/>
-                      <a:tailEnd type="none" w="med" len="med"/>
-                    </a:lnR>
-                    <a:lnT w="6350" cap="flat" cmpd="sng" algn="ctr">
-                      <a:solidFill>
-                        <a:srgbClr val="D3DED0"/>
-                      </a:solidFill>
-                      <a:prstDash val="solid"/>
-                      <a:round/>
-                      <a:headEnd type="none" w="med" len="med"/>
-                      <a:tailEnd type="none" w="med" len="med"/>
-                    </a:lnT>
-                    <a:lnB w="6350" cap="flat" cmpd="sng" algn="ctr">
-                      <a:solidFill>
-                        <a:srgbClr val="D3DED0"/>
-                      </a:solidFill>
-                      <a:prstDash val="solid"/>
-                      <a:round/>
-                      <a:headEnd type="none" w="med" len="med"/>
-                      <a:tailEnd type="none" w="med" len="med"/>
-                    </a:lnB>
-                    <a:solidFill>
-                      <a:srgbClr val="F6E3DE"/>
-                    </a:solidFill>
-                  </a:tcPr>
-                </a:tc>
-                <a:tc hMerge="1">
-                  <a:tcPr/>
-                </a:tc>
-                <a:tc hMerge="1">
-                  <a:tcPr/>
-                </a:tc>
-                <a:tc hMerge="1">
-                  <a:tcPr/>
-                </a:tc>
-              </a:tr>
-              <a:tr h="187452">
-                <a:tc>
-                  <a:txBody>
-                    <a:bodyPr/>
-                    <a:lstStyle/>
-                    <a:p>
-                      <a:pPr indent="0" marL="0">
-                        <a:buNone/>
-                      </a:pPr>
-                      <a:r>
-                        <a:rPr lang="en-US" sz="700" dirty="0">
-                          <a:solidFill>
-                            <a:srgbClr val="2B2B2B"/>
-                          </a:solidFill>
-                          <a:latin typeface="Meiryo UI" pitchFamily="34" charset="0"/>
-                          <a:ea typeface="Meiryo UI" pitchFamily="34" charset="-122"/>
-                          <a:cs typeface="Meiryo UI" pitchFamily="34" charset="-120"/>
-                        </a:rPr>
-                        <a:t>B1 検査規格の科学的再検証(統計的抜取・Cpk管理へ/過剰品質排除)</a:t>
-                      </a:r>
-                      <a:endParaRPr lang="en-US" sz="700" dirty="0">
-                        <a:latin typeface="Meiryo UI" charset="0"/>
-                        <a:ea typeface="Meiryo UI" charset="0"/>
-                        <a:cs typeface="Meiryo UI" charset="0"/>
-                      </a:endParaRPr>
-                    </a:p>
-                  </a:txBody>
-                  <a:tcPr marL="27432" marR="27432" marT="27432" marB="27432" anchor="ctr">
-                    <a:lnL w="6350" cap="flat" cmpd="sng" algn="ctr">
-                      <a:solidFill>
-                        <a:srgbClr val="D3DED0"/>
-                      </a:solidFill>
-                      <a:prstDash val="solid"/>
-                      <a:round/>
-                      <a:headEnd type="none" w="med" len="med"/>
-                      <a:tailEnd type="none" w="med" len="med"/>
-                    </a:lnL>
-                    <a:lnR w="6350" cap="flat" cmpd="sng" algn="ctr">
-                      <a:solidFill>
-                        <a:srgbClr val="D3DED0"/>
-                      </a:solidFill>
-                      <a:prstDash val="solid"/>
-                      <a:round/>
-                      <a:headEnd type="none" w="med" len="med"/>
-                      <a:tailEnd type="none" w="med" len="med"/>
-                    </a:lnR>
-                    <a:lnT w="6350" cap="flat" cmpd="sng" algn="ctr">
-                      <a:solidFill>
-                        <a:srgbClr val="D3DED0"/>
-                      </a:solidFill>
-                      <a:prstDash val="solid"/>
-                      <a:round/>
-                      <a:headEnd type="none" w="med" len="med"/>
-                      <a:tailEnd type="none" w="med" len="med"/>
-                    </a:lnT>
-                    <a:lnB w="6350" cap="flat" cmpd="sng" algn="ctr">
-                      <a:solidFill>
-                        <a:srgbClr val="D3DED0"/>
-                      </a:solidFill>
-                      <a:prstDash val="solid"/>
-                      <a:round/>
-                      <a:headEnd type="none" w="med" len="med"/>
-                      <a:tailEnd type="none" w="med" len="med"/>
-                    </a:lnB>
-                  </a:tcPr>
-                </a:tc>
-                <a:tc>
-                  <a:txBody>
-                    <a:bodyPr/>
-                    <a:lstStyle/>
-                    <a:p>
-                      <a:pPr indent="0" marL="0">
-                        <a:buNone/>
-                      </a:pPr>
-                      <a:r>
-                        <a:rPr lang="en-US" sz="700" b="1" dirty="0">
-                          <a:solidFill>
-                            <a:srgbClr val="2B2B2B"/>
-                          </a:solidFill>
-                          <a:latin typeface="Meiryo UI" pitchFamily="34" charset="0"/>
-                          <a:ea typeface="Meiryo UI" pitchFamily="34" charset="-122"/>
-                          <a:cs typeface="Meiryo UI" pitchFamily="34" charset="-120"/>
-                        </a:rPr>
-                        <a:t>▲5〜8名</a:t>
-                      </a:r>
-                      <a:endParaRPr lang="en-US" sz="700" dirty="0">
-                        <a:latin typeface="Meiryo UI" charset="0"/>
-                        <a:ea typeface="Meiryo UI" charset="0"/>
-                        <a:cs typeface="Meiryo UI" charset="0"/>
-                      </a:endParaRPr>
-                    </a:p>
-                  </a:txBody>
-                  <a:tcPr marL="27432" marR="27432" marT="27432" marB="27432" anchor="ctr">
-                    <a:lnL w="6350" cap="flat" cmpd="sng" algn="ctr">
-                      <a:solidFill>
-                        <a:srgbClr val="D3DED0"/>
-                      </a:solidFill>
-                      <a:prstDash val="solid"/>
-                      <a:round/>
-                      <a:headEnd type="none" w="med" len="med"/>
-                      <a:tailEnd type="none" w="med" len="med"/>
-                    </a:lnL>
-                    <a:lnR w="6350" cap="flat" cmpd="sng" algn="ctr">
-                      <a:solidFill>
-                        <a:srgbClr val="D3DED0"/>
-                      </a:solidFill>
-                      <a:prstDash val="solid"/>
-                      <a:round/>
-                      <a:headEnd type="none" w="med" len="med"/>
-                      <a:tailEnd type="none" w="med" len="med"/>
-                    </a:lnR>
-                    <a:lnT w="6350" cap="flat" cmpd="sng" algn="ctr">
-                      <a:solidFill>
-                        <a:srgbClr val="D3DED0"/>
-                      </a:solidFill>
-                      <a:prstDash val="solid"/>
-                      <a:round/>
-                      <a:headEnd type="none" w="med" len="med"/>
-                      <a:tailEnd type="none" w="med" len="med"/>
-                    </a:lnT>
-                    <a:lnB w="6350" cap="flat" cmpd="sng" algn="ctr">
-                      <a:solidFill>
-                        <a:srgbClr val="D3DED0"/>
-                      </a:solidFill>
-                      <a:prstDash val="solid"/>
-                      <a:round/>
-                      <a:headEnd type="none" w="med" len="med"/>
-                      <a:tailEnd type="none" w="med" len="med"/>
-                    </a:lnB>
-                  </a:tcPr>
-                </a:tc>
-                <a:tc>
-                  <a:txBody>
-                    <a:bodyPr/>
-                    <a:lstStyle/>
-                    <a:p>
-                      <a:pPr indent="0" marL="0">
-                        <a:buNone/>
-                      </a:pPr>
-                      <a:r>
-                        <a:rPr lang="en-US" sz="700" dirty="0">
-                          <a:solidFill>
-                            <a:srgbClr val="2B2B2B"/>
-                          </a:solidFill>
-                          <a:latin typeface="Meiryo UI" pitchFamily="34" charset="0"/>
-                          <a:ea typeface="Meiryo UI" pitchFamily="34" charset="-122"/>
-                          <a:cs typeface="Meiryo UI" pitchFamily="34" charset="-120"/>
-                        </a:rPr>
-                        <a:t>品質保証主導+R&amp;D+工場QA</a:t>
-                      </a:r>
-                      <a:endParaRPr lang="en-US" sz="700" dirty="0">
-                        <a:latin typeface="Meiryo UI" charset="0"/>
-                        <a:ea typeface="Meiryo UI" charset="0"/>
-                        <a:cs typeface="Meiryo UI" charset="0"/>
-                      </a:endParaRPr>
-                    </a:p>
-                  </a:txBody>
-                  <a:tcPr marL="27432" marR="27432" marT="27432" marB="27432" anchor="ctr">
-                    <a:lnL w="6350" cap="flat" cmpd="sng" algn="ctr">
-                      <a:solidFill>
-                        <a:srgbClr val="D3DED0"/>
-                      </a:solidFill>
-                      <a:prstDash val="solid"/>
-                      <a:round/>
-                      <a:headEnd type="none" w="med" len="med"/>
-                      <a:tailEnd type="none" w="med" len="med"/>
-                    </a:lnL>
-                    <a:lnR w="6350" cap="flat" cmpd="sng" algn="ctr">
-                      <a:solidFill>
-                        <a:srgbClr val="D3DED0"/>
-                      </a:solidFill>
-                      <a:prstDash val="solid"/>
-                      <a:round/>
-                      <a:headEnd type="none" w="med" len="med"/>
-                      <a:tailEnd type="none" w="med" len="med"/>
-                    </a:lnR>
-                    <a:lnT w="6350" cap="flat" cmpd="sng" algn="ctr">
-                      <a:solidFill>
-                        <a:srgbClr val="D3DED0"/>
-                      </a:solidFill>
-                      <a:prstDash val="solid"/>
-                      <a:round/>
-                      <a:headEnd type="none" w="med" len="med"/>
-                      <a:tailEnd type="none" w="med" len="med"/>
-                    </a:lnT>
-                    <a:lnB w="6350" cap="flat" cmpd="sng" algn="ctr">
-                      <a:solidFill>
-                        <a:srgbClr val="D3DED0"/>
-                      </a:solidFill>
-                      <a:prstDash val="solid"/>
-                      <a:round/>
-                      <a:headEnd type="none" w="med" len="med"/>
-                      <a:tailEnd type="none" w="med" len="med"/>
-                    </a:lnB>
-                  </a:tcPr>
-                </a:tc>
-                <a:tc>
-                  <a:txBody>
-                    <a:bodyPr/>
-                    <a:lstStyle/>
-                    <a:p>
-                      <a:pPr indent="0" marL="0">
-                        <a:buNone/>
-                      </a:pPr>
-                      <a:r>
-                        <a:rPr lang="en-US" sz="700" dirty="0">
-                          <a:solidFill>
-                            <a:srgbClr val="2B2B2B"/>
-                          </a:solidFill>
-                          <a:latin typeface="Meiryo UI" pitchFamily="34" charset="0"/>
-                          <a:ea typeface="Meiryo UI" pitchFamily="34" charset="-122"/>
-                          <a:cs typeface="Meiryo UI" pitchFamily="34" charset="-120"/>
-                        </a:rPr>
-                        <a:t>26/10論点→27/3改定第1弾</a:t>
-                      </a:r>
-                      <a:endParaRPr lang="en-US" sz="700" dirty="0">
-                        <a:latin typeface="Meiryo UI" charset="0"/>
-                        <a:ea typeface="Meiryo UI" charset="0"/>
-                        <a:cs typeface="Meiryo UI" charset="0"/>
-                      </a:endParaRPr>
-                    </a:p>
-                  </a:txBody>
-                  <a:tcPr marL="27432" marR="27432" marT="27432" marB="27432" anchor="ctr">
-                    <a:lnL w="6350" cap="flat" cmpd="sng" algn="ctr">
-                      <a:solidFill>
-                        <a:srgbClr val="D3DED0"/>
-                      </a:solidFill>
-                      <a:prstDash val="solid"/>
-                      <a:round/>
-                      <a:headEnd type="none" w="med" len="med"/>
-                      <a:tailEnd type="none" w="med" len="med"/>
-                    </a:lnL>
-                    <a:lnR w="6350" cap="flat" cmpd="sng" algn="ctr">
-                      <a:solidFill>
-                        <a:srgbClr val="D3DED0"/>
-                      </a:solidFill>
-                      <a:prstDash val="solid"/>
-                      <a:round/>
-                      <a:headEnd type="none" w="med" len="med"/>
-                      <a:tailEnd type="none" w="med" len="med"/>
-                    </a:lnR>
-                    <a:lnT w="6350" cap="flat" cmpd="sng" algn="ctr">
-                      <a:solidFill>
-                        <a:srgbClr val="D3DED0"/>
-                      </a:solidFill>
-                      <a:prstDash val="solid"/>
-                      <a:round/>
-                      <a:headEnd type="none" w="med" len="med"/>
-                      <a:tailEnd type="none" w="med" len="med"/>
-                    </a:lnT>
-                    <a:lnB w="6350" cap="flat" cmpd="sng" algn="ctr">
-                      <a:solidFill>
-                        <a:srgbClr val="D3DED0"/>
-                      </a:solidFill>
-                      <a:prstDash val="solid"/>
-                      <a:round/>
-                      <a:headEnd type="none" w="med" len="med"/>
-                      <a:tailEnd type="none" w="med" len="med"/>
-                    </a:lnB>
-                  </a:tcPr>
-                </a:tc>
-              </a:tr>
-              <a:tr h="187452">
-                <a:tc>
-                  <a:txBody>
-                    <a:bodyPr/>
-                    <a:lstStyle/>
-                    <a:p>
-                      <a:pPr indent="0" marL="0">
-                        <a:buNone/>
-                      </a:pPr>
-                      <a:r>
-                        <a:rPr lang="en-US" sz="700" dirty="0">
-                          <a:solidFill>
-                            <a:srgbClr val="2B2B2B"/>
-                          </a:solidFill>
-                          <a:latin typeface="Meiryo UI" pitchFamily="34" charset="0"/>
-                          <a:ea typeface="Meiryo UI" pitchFamily="34" charset="-122"/>
-                          <a:cs typeface="Meiryo UI" pitchFamily="34" charset="-120"/>
-                        </a:rPr>
-                        <a:t>B2 長毛処理の見直し(上流の発生源対策+規格公差の再検証)</a:t>
-                      </a:r>
-                      <a:endParaRPr lang="en-US" sz="700" dirty="0">
-                        <a:latin typeface="Meiryo UI" charset="0"/>
-                        <a:ea typeface="Meiryo UI" charset="0"/>
-                        <a:cs typeface="Meiryo UI" charset="0"/>
-                      </a:endParaRPr>
-                    </a:p>
-                  </a:txBody>
-                  <a:tcPr marL="27432" marR="27432" marT="27432" marB="27432" anchor="ctr">
-                    <a:lnL w="6350" cap="flat" cmpd="sng" algn="ctr">
-                      <a:solidFill>
-                        <a:srgbClr val="D3DED0"/>
-                      </a:solidFill>
-                      <a:prstDash val="solid"/>
-                      <a:round/>
-                      <a:headEnd type="none" w="med" len="med"/>
-                      <a:tailEnd type="none" w="med" len="med"/>
-                    </a:lnL>
-                    <a:lnR w="6350" cap="flat" cmpd="sng" algn="ctr">
-                      <a:solidFill>
-                        <a:srgbClr val="D3DED0"/>
-                      </a:solidFill>
-                      <a:prstDash val="solid"/>
-                      <a:round/>
-                      <a:headEnd type="none" w="med" len="med"/>
-                      <a:tailEnd type="none" w="med" len="med"/>
-                    </a:lnR>
-                    <a:lnT w="6350" cap="flat" cmpd="sng" algn="ctr">
-                      <a:solidFill>
-                        <a:srgbClr val="D3DED0"/>
-                      </a:solidFill>
-                      <a:prstDash val="solid"/>
-                      <a:round/>
-                      <a:headEnd type="none" w="med" len="med"/>
-                      <a:tailEnd type="none" w="med" len="med"/>
-                    </a:lnT>
-                    <a:lnB w="6350" cap="flat" cmpd="sng" algn="ctr">
-                      <a:solidFill>
-                        <a:srgbClr val="D3DED0"/>
-                      </a:solidFill>
-                      <a:prstDash val="solid"/>
-                      <a:round/>
-                      <a:headEnd type="none" w="med" len="med"/>
-                      <a:tailEnd type="none" w="med" len="med"/>
-                    </a:lnB>
-                  </a:tcPr>
-                </a:tc>
-                <a:tc>
-                  <a:txBody>
-                    <a:bodyPr/>
-                    <a:lstStyle/>
-                    <a:p>
-                      <a:pPr indent="0" marL="0">
-                        <a:buNone/>
-                      </a:pPr>
-                      <a:r>
-                        <a:rPr lang="en-US" sz="700" b="1" dirty="0">
-                          <a:solidFill>
-                            <a:srgbClr val="2B2B2B"/>
-                          </a:solidFill>
-                          <a:latin typeface="Meiryo UI" pitchFamily="34" charset="0"/>
-                          <a:ea typeface="Meiryo UI" pitchFamily="34" charset="-122"/>
-                          <a:cs typeface="Meiryo UI" pitchFamily="34" charset="-120"/>
-                        </a:rPr>
-                        <a:t>▲5〜8名</a:t>
-                      </a:r>
-                      <a:endParaRPr lang="en-US" sz="700" dirty="0">
-                        <a:latin typeface="Meiryo UI" charset="0"/>
-                        <a:ea typeface="Meiryo UI" charset="0"/>
-                        <a:cs typeface="Meiryo UI" charset="0"/>
-                      </a:endParaRPr>
-                    </a:p>
-                  </a:txBody>
-                  <a:tcPr marL="27432" marR="27432" marT="27432" marB="27432" anchor="ctr">
-                    <a:lnL w="6350" cap="flat" cmpd="sng" algn="ctr">
-                      <a:solidFill>
-                        <a:srgbClr val="D3DED0"/>
-                      </a:solidFill>
-                      <a:prstDash val="solid"/>
-                      <a:round/>
-                      <a:headEnd type="none" w="med" len="med"/>
-                      <a:tailEnd type="none" w="med" len="med"/>
-                    </a:lnL>
-                    <a:lnR w="6350" cap="flat" cmpd="sng" algn="ctr">
-                      <a:solidFill>
-                        <a:srgbClr val="D3DED0"/>
-                      </a:solidFill>
-                      <a:prstDash val="solid"/>
-                      <a:round/>
-                      <a:headEnd type="none" w="med" len="med"/>
-                      <a:tailEnd type="none" w="med" len="med"/>
-                    </a:lnR>
-                    <a:lnT w="6350" cap="flat" cmpd="sng" algn="ctr">
-                      <a:solidFill>
-                        <a:srgbClr val="D3DED0"/>
-                      </a:solidFill>
-                      <a:prstDash val="solid"/>
-                      <a:round/>
-                      <a:headEnd type="none" w="med" len="med"/>
-                      <a:tailEnd type="none" w="med" len="med"/>
-                    </a:lnT>
-                    <a:lnB w="6350" cap="flat" cmpd="sng" algn="ctr">
-                      <a:solidFill>
-                        <a:srgbClr val="D3DED0"/>
-                      </a:solidFill>
-                      <a:prstDash val="solid"/>
-                      <a:round/>
-                      <a:headEnd type="none" w="med" len="med"/>
-                      <a:tailEnd type="none" w="med" len="med"/>
-                    </a:lnB>
-                  </a:tcPr>
-                </a:tc>
-                <a:tc>
-                  <a:txBody>
-                    <a:bodyPr/>
-                    <a:lstStyle/>
-                    <a:p>
-                      <a:pPr indent="0" marL="0">
-                        <a:buNone/>
-                      </a:pPr>
-                      <a:r>
-                        <a:rPr lang="en-US" sz="700" dirty="0">
-                          <a:solidFill>
-                            <a:srgbClr val="2B2B2B"/>
-                          </a:solidFill>
-                          <a:latin typeface="Meiryo UI" pitchFamily="34" charset="0"/>
-                          <a:ea typeface="Meiryo UI" pitchFamily="34" charset="-122"/>
-                          <a:cs typeface="Meiryo UI" pitchFamily="34" charset="-120"/>
-                        </a:rPr>
-                        <a:t>R&amp;D+プロ包技室+品質保証</a:t>
-                      </a:r>
-                      <a:endParaRPr lang="en-US" sz="700" dirty="0">
-                        <a:latin typeface="Meiryo UI" charset="0"/>
-                        <a:ea typeface="Meiryo UI" charset="0"/>
-                        <a:cs typeface="Meiryo UI" charset="0"/>
-                      </a:endParaRPr>
-                    </a:p>
-                  </a:txBody>
-                  <a:tcPr marL="27432" marR="27432" marT="27432" marB="27432" anchor="ctr">
-                    <a:lnL w="6350" cap="flat" cmpd="sng" algn="ctr">
-                      <a:solidFill>
-                        <a:srgbClr val="D3DED0"/>
-                      </a:solidFill>
-                      <a:prstDash val="solid"/>
-                      <a:round/>
-                      <a:headEnd type="none" w="med" len="med"/>
-                      <a:tailEnd type="none" w="med" len="med"/>
-                    </a:lnL>
-                    <a:lnR w="6350" cap="flat" cmpd="sng" algn="ctr">
-                      <a:solidFill>
-                        <a:srgbClr val="D3DED0"/>
-                      </a:solidFill>
-                      <a:prstDash val="solid"/>
-                      <a:round/>
-                      <a:headEnd type="none" w="med" len="med"/>
-                      <a:tailEnd type="none" w="med" len="med"/>
-                    </a:lnR>
-                    <a:lnT w="6350" cap="flat" cmpd="sng" algn="ctr">
-                      <a:solidFill>
-                        <a:srgbClr val="D3DED0"/>
-                      </a:solidFill>
-                      <a:prstDash val="solid"/>
-                      <a:round/>
-                      <a:headEnd type="none" w="med" len="med"/>
-                      <a:tailEnd type="none" w="med" len="med"/>
-                    </a:lnT>
-                    <a:lnB w="6350" cap="flat" cmpd="sng" algn="ctr">
-                      <a:solidFill>
-                        <a:srgbClr val="D3DED0"/>
-                      </a:solidFill>
-                      <a:prstDash val="solid"/>
-                      <a:round/>
-                      <a:headEnd type="none" w="med" len="med"/>
-                      <a:tailEnd type="none" w="med" len="med"/>
-                    </a:lnB>
-                  </a:tcPr>
-                </a:tc>
-                <a:tc>
-                  <a:txBody>
-                    <a:bodyPr/>
-                    <a:lstStyle/>
-                    <a:p>
-                      <a:pPr indent="0" marL="0">
-                        <a:buNone/>
-                      </a:pPr>
-                      <a:r>
-                        <a:rPr lang="en-US" sz="700" dirty="0">
-                          <a:solidFill>
-                            <a:srgbClr val="2B2B2B"/>
-                          </a:solidFill>
-                          <a:latin typeface="Meiryo UI" pitchFamily="34" charset="0"/>
-                          <a:ea typeface="Meiryo UI" pitchFamily="34" charset="-122"/>
-                          <a:cs typeface="Meiryo UI" pitchFamily="34" charset="-120"/>
-                        </a:rPr>
-                        <a:t>26/12方向性→27年度検証</a:t>
-                      </a:r>
-                      <a:endParaRPr lang="en-US" sz="700" dirty="0">
-                        <a:latin typeface="Meiryo UI" charset="0"/>
-                        <a:ea typeface="Meiryo UI" charset="0"/>
-                        <a:cs typeface="Meiryo UI" charset="0"/>
-                      </a:endParaRPr>
-                    </a:p>
-                  </a:txBody>
-                  <a:tcPr marL="27432" marR="27432" marT="27432" marB="27432" anchor="ctr">
-                    <a:lnL w="6350" cap="flat" cmpd="sng" algn="ctr">
-                      <a:solidFill>
-                        <a:srgbClr val="D3DED0"/>
-                      </a:solidFill>
-                      <a:prstDash val="solid"/>
-                      <a:round/>
-                      <a:headEnd type="none" w="med" len="med"/>
-                      <a:tailEnd type="none" w="med" len="med"/>
-                    </a:lnL>
-                    <a:lnR w="6350" cap="flat" cmpd="sng" algn="ctr">
-                      <a:solidFill>
-                        <a:srgbClr val="D3DED0"/>
-                      </a:solidFill>
-                      <a:prstDash val="solid"/>
-                      <a:round/>
-                      <a:headEnd type="none" w="med" len="med"/>
-                      <a:tailEnd type="none" w="med" len="med"/>
-                    </a:lnR>
-                    <a:lnT w="6350" cap="flat" cmpd="sng" algn="ctr">
-                      <a:solidFill>
-                        <a:srgbClr val="D3DED0"/>
-                      </a:solidFill>
-                      <a:prstDash val="solid"/>
-                      <a:round/>
-                      <a:headEnd type="none" w="med" len="med"/>
-                      <a:tailEnd type="none" w="med" len="med"/>
-                    </a:lnT>
-                    <a:lnB w="6350" cap="flat" cmpd="sng" algn="ctr">
-                      <a:solidFill>
-                        <a:srgbClr val="D3DED0"/>
-                      </a:solidFill>
-                      <a:prstDash val="solid"/>
-                      <a:round/>
-                      <a:headEnd type="none" w="med" len="med"/>
-                      <a:tailEnd type="none" w="med" len="med"/>
-                    </a:lnB>
-                  </a:tcPr>
-                </a:tc>
-              </a:tr>
-              <a:tr h="187452">
-                <a:tc>
-                  <a:txBody>
-                    <a:bodyPr/>
-                    <a:lstStyle/>
-                    <a:p>
-                      <a:pPr indent="0" marL="0">
-                        <a:buNone/>
-                      </a:pPr>
-                      <a:r>
-                        <a:rPr lang="en-US" sz="700" dirty="0">
-                          <a:solidFill>
-                            <a:srgbClr val="2B2B2B"/>
-                          </a:solidFill>
-                          <a:latin typeface="Meiryo UI" pitchFamily="34" charset="0"/>
-                          <a:ea typeface="Meiryo UI" pitchFamily="34" charset="-122"/>
-                          <a:cs typeface="Meiryo UI" pitchFamily="34" charset="-120"/>
-                        </a:rPr>
-                        <a:t>B3 品質記録・点検規定の適正化(電子化・頻度見直し)</a:t>
-                      </a:r>
-                      <a:endParaRPr lang="en-US" sz="700" dirty="0">
-                        <a:latin typeface="Meiryo UI" charset="0"/>
-                        <a:ea typeface="Meiryo UI" charset="0"/>
-                        <a:cs typeface="Meiryo UI" charset="0"/>
-                      </a:endParaRPr>
-                    </a:p>
-                  </a:txBody>
-                  <a:tcPr marL="27432" marR="27432" marT="27432" marB="27432" anchor="ctr">
-                    <a:lnL w="6350" cap="flat" cmpd="sng" algn="ctr">
-                      <a:solidFill>
-                        <a:srgbClr val="D3DED0"/>
-                      </a:solidFill>
-                      <a:prstDash val="solid"/>
-                      <a:round/>
-                      <a:headEnd type="none" w="med" len="med"/>
-                      <a:tailEnd type="none" w="med" len="med"/>
-                    </a:lnL>
-                    <a:lnR w="6350" cap="flat" cmpd="sng" algn="ctr">
-                      <a:solidFill>
-                        <a:srgbClr val="D3DED0"/>
-                      </a:solidFill>
-                      <a:prstDash val="solid"/>
-                      <a:round/>
-                      <a:headEnd type="none" w="med" len="med"/>
-                      <a:tailEnd type="none" w="med" len="med"/>
-                    </a:lnR>
-                    <a:lnT w="6350" cap="flat" cmpd="sng" algn="ctr">
-                      <a:solidFill>
-                        <a:srgbClr val="D3DED0"/>
-                      </a:solidFill>
-                      <a:prstDash val="solid"/>
-                      <a:round/>
-                      <a:headEnd type="none" w="med" len="med"/>
-                      <a:tailEnd type="none" w="med" len="med"/>
-                    </a:lnT>
-                    <a:lnB w="6350" cap="flat" cmpd="sng" algn="ctr">
-                      <a:solidFill>
-                        <a:srgbClr val="D3DED0"/>
-                      </a:solidFill>
-                      <a:prstDash val="solid"/>
-                      <a:round/>
-                      <a:headEnd type="none" w="med" len="med"/>
-                      <a:tailEnd type="none" w="med" len="med"/>
-                    </a:lnB>
-                  </a:tcPr>
-                </a:tc>
-                <a:tc>
-                  <a:txBody>
-                    <a:bodyPr/>
-                    <a:lstStyle/>
-                    <a:p>
-                      <a:pPr indent="0" marL="0">
-                        <a:buNone/>
-                      </a:pPr>
-                      <a:r>
-                        <a:rPr lang="en-US" sz="700" dirty="0">
-                          <a:solidFill>
-                            <a:srgbClr val="2B2B2B"/>
-                          </a:solidFill>
-                          <a:latin typeface="Meiryo UI" pitchFamily="34" charset="0"/>
-                          <a:ea typeface="Meiryo UI" pitchFamily="34" charset="-122"/>
-                          <a:cs typeface="Meiryo UI" pitchFamily="34" charset="-120"/>
-                        </a:rPr>
-                        <a:t>間接工数▲10〜15%</a:t>
-                      </a:r>
-                      <a:endParaRPr lang="en-US" sz="700" dirty="0">
-                        <a:latin typeface="Meiryo UI" charset="0"/>
-                        <a:ea typeface="Meiryo UI" charset="0"/>
-                        <a:cs typeface="Meiryo UI" charset="0"/>
-                      </a:endParaRPr>
-                    </a:p>
-                  </a:txBody>
-                  <a:tcPr marL="27432" marR="27432" marT="27432" marB="27432" anchor="ctr">
-                    <a:lnL w="6350" cap="flat" cmpd="sng" algn="ctr">
-                      <a:solidFill>
-                        <a:srgbClr val="D3DED0"/>
-                      </a:solidFill>
-                      <a:prstDash val="solid"/>
-                      <a:round/>
-                      <a:headEnd type="none" w="med" len="med"/>
-                      <a:tailEnd type="none" w="med" len="med"/>
-                    </a:lnL>
-                    <a:lnR w="6350" cap="flat" cmpd="sng" algn="ctr">
-                      <a:solidFill>
-                        <a:srgbClr val="D3DED0"/>
-                      </a:solidFill>
-                      <a:prstDash val="solid"/>
-                      <a:round/>
-                      <a:headEnd type="none" w="med" len="med"/>
-                      <a:tailEnd type="none" w="med" len="med"/>
-                    </a:lnR>
-                    <a:lnT w="6350" cap="flat" cmpd="sng" algn="ctr">
-                      <a:solidFill>
-                        <a:srgbClr val="D3DED0"/>
-                      </a:solidFill>
-                      <a:prstDash val="solid"/>
-                      <a:round/>
-                      <a:headEnd type="none" w="med" len="med"/>
-                      <a:tailEnd type="none" w="med" len="med"/>
-                    </a:lnT>
-                    <a:lnB w="6350" cap="flat" cmpd="sng" algn="ctr">
-                      <a:solidFill>
-                        <a:srgbClr val="D3DED0"/>
-                      </a:solidFill>
-                      <a:prstDash val="solid"/>
-                      <a:round/>
-                      <a:headEnd type="none" w="med" len="med"/>
-                      <a:tailEnd type="none" w="med" len="med"/>
-                    </a:lnB>
-                  </a:tcPr>
-                </a:tc>
-                <a:tc>
-                  <a:txBody>
-                    <a:bodyPr/>
-                    <a:lstStyle/>
-                    <a:p>
-                      <a:pPr indent="0" marL="0">
-                        <a:buNone/>
-                      </a:pPr>
-                      <a:r>
-                        <a:rPr lang="en-US" sz="700" dirty="0">
-                          <a:solidFill>
-                            <a:srgbClr val="2B2B2B"/>
-                          </a:solidFill>
-                          <a:latin typeface="Meiryo UI" pitchFamily="34" charset="0"/>
-                          <a:ea typeface="Meiryo UI" pitchFamily="34" charset="-122"/>
-                          <a:cs typeface="Meiryo UI" pitchFamily="34" charset="-120"/>
-                        </a:rPr>
-                        <a:t>工場QA+デジ戦(工場DX)</a:t>
-                      </a:r>
-                      <a:endParaRPr lang="en-US" sz="700" dirty="0">
-                        <a:latin typeface="Meiryo UI" charset="0"/>
-                        <a:ea typeface="Meiryo UI" charset="0"/>
-                        <a:cs typeface="Meiryo UI" charset="0"/>
-                      </a:endParaRPr>
-                    </a:p>
-                  </a:txBody>
-                  <a:tcPr marL="27432" marR="27432" marT="27432" marB="27432" anchor="ctr">
-                    <a:lnL w="6350" cap="flat" cmpd="sng" algn="ctr">
-                      <a:solidFill>
-                        <a:srgbClr val="D3DED0"/>
-                      </a:solidFill>
-                      <a:prstDash val="solid"/>
-                      <a:round/>
-                      <a:headEnd type="none" w="med" len="med"/>
-                      <a:tailEnd type="none" w="med" len="med"/>
-                    </a:lnL>
-                    <a:lnR w="6350" cap="flat" cmpd="sng" algn="ctr">
-                      <a:solidFill>
-                        <a:srgbClr val="D3DED0"/>
-                      </a:solidFill>
-                      <a:prstDash val="solid"/>
-                      <a:round/>
-                      <a:headEnd type="none" w="med" len="med"/>
-                      <a:tailEnd type="none" w="med" len="med"/>
-                    </a:lnR>
-                    <a:lnT w="6350" cap="flat" cmpd="sng" algn="ctr">
-                      <a:solidFill>
-                        <a:srgbClr val="D3DED0"/>
-                      </a:solidFill>
-                      <a:prstDash val="solid"/>
-                      <a:round/>
-                      <a:headEnd type="none" w="med" len="med"/>
-                      <a:tailEnd type="none" w="med" len="med"/>
-                    </a:lnT>
-                    <a:lnB w="6350" cap="flat" cmpd="sng" algn="ctr">
-                      <a:solidFill>
-                        <a:srgbClr val="D3DED0"/>
-                      </a:solidFill>
-                      <a:prstDash val="solid"/>
-                      <a:round/>
-                      <a:headEnd type="none" w="med" len="med"/>
-                      <a:tailEnd type="none" w="med" len="med"/>
-                    </a:lnB>
-                  </a:tcPr>
-                </a:tc>
-                <a:tc>
-                  <a:txBody>
-                    <a:bodyPr/>
-                    <a:lstStyle/>
-                    <a:p>
-                      <a:pPr indent="0" marL="0">
-                        <a:buNone/>
-                      </a:pPr>
-                      <a:r>
-                        <a:rPr lang="en-US" sz="700" dirty="0">
-                          <a:solidFill>
-                            <a:srgbClr val="2B2B2B"/>
-                          </a:solidFill>
-                          <a:latin typeface="Meiryo UI" pitchFamily="34" charset="0"/>
-                          <a:ea typeface="Meiryo UI" pitchFamily="34" charset="-122"/>
-                          <a:cs typeface="Meiryo UI" pitchFamily="34" charset="-120"/>
-                        </a:rPr>
-                        <a:t>26年度棚卸→27年上期実装</a:t>
-                      </a:r>
-                      <a:endParaRPr lang="en-US" sz="700" dirty="0">
-                        <a:latin typeface="Meiryo UI" charset="0"/>
-                        <a:ea typeface="Meiryo UI" charset="0"/>
-                        <a:cs typeface="Meiryo UI" charset="0"/>
-                      </a:endParaRPr>
-                    </a:p>
-                  </a:txBody>
-                  <a:tcPr marL="27432" marR="27432" marT="27432" marB="27432" anchor="ctr">
-                    <a:lnL w="6350" cap="flat" cmpd="sng" algn="ctr">
-                      <a:solidFill>
-                        <a:srgbClr val="D3DED0"/>
-                      </a:solidFill>
-                      <a:prstDash val="solid"/>
-                      <a:round/>
-                      <a:headEnd type="none" w="med" len="med"/>
-                      <a:tailEnd type="none" w="med" len="med"/>
-                    </a:lnL>
-                    <a:lnR w="6350" cap="flat" cmpd="sng" algn="ctr">
-                      <a:solidFill>
-                        <a:srgbClr val="D3DED0"/>
-                      </a:solidFill>
-                      <a:prstDash val="solid"/>
-                      <a:round/>
-                      <a:headEnd type="none" w="med" len="med"/>
-                      <a:tailEnd type="none" w="med" len="med"/>
-                    </a:lnR>
-                    <a:lnT w="6350" cap="flat" cmpd="sng" algn="ctr">
-                      <a:solidFill>
-                        <a:srgbClr val="D3DED0"/>
-                      </a:solidFill>
-                      <a:prstDash val="solid"/>
-                      <a:round/>
-                      <a:headEnd type="none" w="med" len="med"/>
-                      <a:tailEnd type="none" w="med" len="med"/>
-                    </a:lnT>
-                    <a:lnB w="6350" cap="flat" cmpd="sng" algn="ctr">
-                      <a:solidFill>
-                        <a:srgbClr val="D3DED0"/>
-                      </a:solidFill>
-                      <a:prstDash val="solid"/>
-                      <a:round/>
-                      <a:headEnd type="none" w="med" len="med"/>
-                      <a:tailEnd type="none" w="med" len="med"/>
-                    </a:lnB>
-                  </a:tcPr>
-                </a:tc>
-              </a:tr>
-              <a:tr h="187452">
-                <a:tc gridSpan="4">
-                  <a:txBody>
-                    <a:bodyPr/>
-                    <a:lstStyle/>
-                    <a:p>
-                      <a:pPr indent="0" marL="0">
-                        <a:buNone/>
-                      </a:pPr>
-                      <a:r>
-                        <a:rPr lang="en-US" sz="750" b="1" dirty="0">
-                          <a:solidFill>
-                            <a:srgbClr val="1F3D20"/>
-                          </a:solidFill>
-                          <a:latin typeface="Meiryo UI" pitchFamily="34" charset="0"/>
-                          <a:ea typeface="Meiryo UI" pitchFamily="34" charset="-122"/>
-                          <a:cs typeface="Meiryo UI" pitchFamily="34" charset="-120"/>
-                        </a:rPr>
-                        <a:t>C. 工程・オペレーション改善</a:t>
-                      </a:r>
-                      <a:endParaRPr lang="en-US" sz="750" dirty="0">
-                        <a:latin typeface="Meiryo UI" charset="0"/>
-                        <a:ea typeface="Meiryo UI" charset="0"/>
-                        <a:cs typeface="Meiryo UI" charset="0"/>
-                      </a:endParaRPr>
-                    </a:p>
-                  </a:txBody>
-                  <a:tcPr marL="27432" marR="27432" marT="27432" marB="27432" anchor="ctr">
-                    <a:lnL w="6350" cap="flat" cmpd="sng" algn="ctr">
-                      <a:solidFill>
-                        <a:srgbClr val="D3DED0"/>
-                      </a:solidFill>
-                      <a:prstDash val="solid"/>
-                      <a:round/>
-                      <a:headEnd type="none" w="med" len="med"/>
-                      <a:tailEnd type="none" w="med" len="med"/>
-                    </a:lnL>
-                    <a:lnR w="6350" cap="flat" cmpd="sng" algn="ctr">
-                      <a:solidFill>
-                        <a:srgbClr val="D3DED0"/>
-                      </a:solidFill>
-                      <a:prstDash val="solid"/>
-                      <a:round/>
-                      <a:headEnd type="none" w="med" len="med"/>
-                      <a:tailEnd type="none" w="med" len="med"/>
-                    </a:lnR>
-                    <a:lnT w="6350" cap="flat" cmpd="sng" algn="ctr">
-                      <a:solidFill>
-                        <a:srgbClr val="D3DED0"/>
-                      </a:solidFill>
-                      <a:prstDash val="solid"/>
-                      <a:round/>
-                      <a:headEnd type="none" w="med" len="med"/>
-                      <a:tailEnd type="none" w="med" len="med"/>
-                    </a:lnT>
-                    <a:lnB w="6350" cap="flat" cmpd="sng" algn="ctr">
-                      <a:solidFill>
-                        <a:srgbClr val="D3DED0"/>
-                      </a:solidFill>
-                      <a:prstDash val="solid"/>
-                      <a:round/>
-                      <a:headEnd type="none" w="med" len="med"/>
-                      <a:tailEnd type="none" w="med" len="med"/>
-                    </a:lnB>
-                    <a:solidFill>
-                      <a:srgbClr val="DFEBDB"/>
-                    </a:solidFill>
-                  </a:tcPr>
-                </a:tc>
-                <a:tc hMerge="1">
-                  <a:tcPr/>
-                </a:tc>
-                <a:tc hMerge="1">
-                  <a:tcPr/>
-                </a:tc>
-                <a:tc hMerge="1">
-                  <a:tcPr/>
-                </a:tc>
-              </a:tr>
-              <a:tr h="187452">
-                <a:tc>
-                  <a:txBody>
-                    <a:bodyPr/>
-                    <a:lstStyle/>
-                    <a:p>
-                      <a:pPr indent="0" marL="0">
-                        <a:buNone/>
-                      </a:pPr>
-                      <a:r>
-                        <a:rPr lang="en-US" sz="700" dirty="0">
-                          <a:solidFill>
-                            <a:srgbClr val="2B2B2B"/>
-                          </a:solidFill>
-                          <a:latin typeface="Meiryo UI" pitchFamily="34" charset="0"/>
-                          <a:ea typeface="Meiryo UI" pitchFamily="34" charset="-122"/>
-                          <a:cs typeface="Meiryo UI" pitchFamily="34" charset="-120"/>
-                        </a:rPr>
-                        <a:t>C1 B停止原因解析→改善FB(監視・復旧の張り付き解消)</a:t>
-                      </a:r>
-                      <a:endParaRPr lang="en-US" sz="700" dirty="0">
-                        <a:latin typeface="Meiryo UI" charset="0"/>
-                        <a:ea typeface="Meiryo UI" charset="0"/>
-                        <a:cs typeface="Meiryo UI" charset="0"/>
-                      </a:endParaRPr>
-                    </a:p>
-                  </a:txBody>
-                  <a:tcPr marL="27432" marR="27432" marT="27432" marB="27432" anchor="ctr">
-                    <a:lnL w="6350" cap="flat" cmpd="sng" algn="ctr">
-                      <a:solidFill>
-                        <a:srgbClr val="D3DED0"/>
-                      </a:solidFill>
-                      <a:prstDash val="solid"/>
-                      <a:round/>
-                      <a:headEnd type="none" w="med" len="med"/>
-                      <a:tailEnd type="none" w="med" len="med"/>
-                    </a:lnL>
-                    <a:lnR w="6350" cap="flat" cmpd="sng" algn="ctr">
-                      <a:solidFill>
-                        <a:srgbClr val="D3DED0"/>
-                      </a:solidFill>
-                      <a:prstDash val="solid"/>
-                      <a:round/>
-                      <a:headEnd type="none" w="med" len="med"/>
-                      <a:tailEnd type="none" w="med" len="med"/>
-                    </a:lnR>
-                    <a:lnT w="6350" cap="flat" cmpd="sng" algn="ctr">
-                      <a:solidFill>
-                        <a:srgbClr val="D3DED0"/>
-                      </a:solidFill>
-                      <a:prstDash val="solid"/>
-                      <a:round/>
-                      <a:headEnd type="none" w="med" len="med"/>
-                      <a:tailEnd type="none" w="med" len="med"/>
-                    </a:lnT>
-                    <a:lnB w="6350" cap="flat" cmpd="sng" algn="ctr">
-                      <a:solidFill>
-                        <a:srgbClr val="D3DED0"/>
-                      </a:solidFill>
-                      <a:prstDash val="solid"/>
-                      <a:round/>
-                      <a:headEnd type="none" w="med" len="med"/>
-                      <a:tailEnd type="none" w="med" len="med"/>
-                    </a:lnB>
-                  </a:tcPr>
-                </a:tc>
-                <a:tc>
-                  <a:txBody>
-                    <a:bodyPr/>
-                    <a:lstStyle/>
-                    <a:p>
-                      <a:pPr indent="0" marL="0">
-                        <a:buNone/>
-                      </a:pPr>
-                      <a:r>
-                        <a:rPr lang="en-US" sz="700" b="1" dirty="0">
-                          <a:solidFill>
-                            <a:srgbClr val="2B2B2B"/>
-                          </a:solidFill>
-                          <a:latin typeface="Meiryo UI" pitchFamily="34" charset="0"/>
-                          <a:ea typeface="Meiryo UI" pitchFamily="34" charset="-122"/>
-                          <a:cs typeface="Meiryo UI" pitchFamily="34" charset="-120"/>
-                        </a:rPr>
-                        <a:t>▲8〜10名+OEE向上</a:t>
-                      </a:r>
-                      <a:endParaRPr lang="en-US" sz="700" dirty="0">
-                        <a:latin typeface="Meiryo UI" charset="0"/>
-                        <a:ea typeface="Meiryo UI" charset="0"/>
-                        <a:cs typeface="Meiryo UI" charset="0"/>
-                      </a:endParaRPr>
-                    </a:p>
-                  </a:txBody>
-                  <a:tcPr marL="27432" marR="27432" marT="27432" marB="27432" anchor="ctr">
-                    <a:lnL w="6350" cap="flat" cmpd="sng" algn="ctr">
-                      <a:solidFill>
-                        <a:srgbClr val="D3DED0"/>
-                      </a:solidFill>
-                      <a:prstDash val="solid"/>
-                      <a:round/>
-                      <a:headEnd type="none" w="med" len="med"/>
-                      <a:tailEnd type="none" w="med" len="med"/>
-                    </a:lnL>
-                    <a:lnR w="6350" cap="flat" cmpd="sng" algn="ctr">
-                      <a:solidFill>
-                        <a:srgbClr val="D3DED0"/>
-                      </a:solidFill>
-                      <a:prstDash val="solid"/>
-                      <a:round/>
-                      <a:headEnd type="none" w="med" len="med"/>
-                      <a:tailEnd type="none" w="med" len="med"/>
-                    </a:lnR>
-                    <a:lnT w="6350" cap="flat" cmpd="sng" algn="ctr">
-                      <a:solidFill>
-                        <a:srgbClr val="D3DED0"/>
-                      </a:solidFill>
-                      <a:prstDash val="solid"/>
-                      <a:round/>
-                      <a:headEnd type="none" w="med" len="med"/>
-                      <a:tailEnd type="none" w="med" len="med"/>
-                    </a:lnT>
-                    <a:lnB w="6350" cap="flat" cmpd="sng" algn="ctr">
-                      <a:solidFill>
-                        <a:srgbClr val="D3DED0"/>
-                      </a:solidFill>
-                      <a:prstDash val="solid"/>
-                      <a:round/>
-                      <a:headEnd type="none" w="med" len="med"/>
-                      <a:tailEnd type="none" w="med" len="med"/>
-                    </a:lnB>
-                  </a:tcPr>
-                </a:tc>
-                <a:tc>
-                  <a:txBody>
-                    <a:bodyPr/>
-                    <a:lstStyle/>
-                    <a:p>
-                      <a:pPr indent="0" marL="0">
-                        <a:buNone/>
-                      </a:pPr>
-                      <a:r>
-                        <a:rPr lang="en-US" sz="700" dirty="0">
-                          <a:solidFill>
-                            <a:srgbClr val="2B2B2B"/>
-                          </a:solidFill>
-                          <a:latin typeface="Meiryo UI" pitchFamily="34" charset="0"/>
-                          <a:ea typeface="Meiryo UI" pitchFamily="34" charset="-122"/>
-                          <a:cs typeface="Meiryo UI" pitchFamily="34" charset="-120"/>
-                        </a:rPr>
-                        <a:t>工場(中林氏)+デジ戦+生技セ</a:t>
-                      </a:r>
-                      <a:endParaRPr lang="en-US" sz="700" dirty="0">
-                        <a:latin typeface="Meiryo UI" charset="0"/>
-                        <a:ea typeface="Meiryo UI" charset="0"/>
-                        <a:cs typeface="Meiryo UI" charset="0"/>
-                      </a:endParaRPr>
-                    </a:p>
-                  </a:txBody>
-                  <a:tcPr marL="27432" marR="27432" marT="27432" marB="27432" anchor="ctr">
-                    <a:lnL w="6350" cap="flat" cmpd="sng" algn="ctr">
-                      <a:solidFill>
-                        <a:srgbClr val="D3DED0"/>
-                      </a:solidFill>
-                      <a:prstDash val="solid"/>
-                      <a:round/>
-                      <a:headEnd type="none" w="med" len="med"/>
-                      <a:tailEnd type="none" w="med" len="med"/>
-                    </a:lnL>
-                    <a:lnR w="6350" cap="flat" cmpd="sng" algn="ctr">
-                      <a:solidFill>
-                        <a:srgbClr val="D3DED0"/>
-                      </a:solidFill>
-                      <a:prstDash val="solid"/>
-                      <a:round/>
-                      <a:headEnd type="none" w="med" len="med"/>
-                      <a:tailEnd type="none" w="med" len="med"/>
-                    </a:lnR>
-                    <a:lnT w="6350" cap="flat" cmpd="sng" algn="ctr">
-                      <a:solidFill>
-                        <a:srgbClr val="D3DED0"/>
-                      </a:solidFill>
-                      <a:prstDash val="solid"/>
-                      <a:round/>
-                      <a:headEnd type="none" w="med" len="med"/>
-                      <a:tailEnd type="none" w="med" len="med"/>
-                    </a:lnT>
-                    <a:lnB w="6350" cap="flat" cmpd="sng" algn="ctr">
-                      <a:solidFill>
-                        <a:srgbClr val="D3DED0"/>
-                      </a:solidFill>
-                      <a:prstDash val="solid"/>
-                      <a:round/>
-                      <a:headEnd type="none" w="med" len="med"/>
-                      <a:tailEnd type="none" w="med" len="med"/>
-                    </a:lnB>
-                  </a:tcPr>
-                </a:tc>
-                <a:tc>
-                  <a:txBody>
-                    <a:bodyPr/>
-                    <a:lstStyle/>
-                    <a:p>
-                      <a:pPr indent="0" marL="0">
-                        <a:buNone/>
-                      </a:pPr>
-                      <a:r>
-                        <a:rPr lang="en-US" sz="700" dirty="0">
-                          <a:solidFill>
-                            <a:srgbClr val="2B2B2B"/>
-                          </a:solidFill>
-                          <a:latin typeface="Meiryo UI" pitchFamily="34" charset="0"/>
-                          <a:ea typeface="Meiryo UI" pitchFamily="34" charset="-122"/>
-                          <a:cs typeface="Meiryo UI" pitchFamily="34" charset="-120"/>
-                        </a:rPr>
-                        <a:t>26/9ベースライン→27/3改善</a:t>
-                      </a:r>
-                      <a:endParaRPr lang="en-US" sz="700" dirty="0">
-                        <a:latin typeface="Meiryo UI" charset="0"/>
-                        <a:ea typeface="Meiryo UI" charset="0"/>
-                        <a:cs typeface="Meiryo UI" charset="0"/>
-                      </a:endParaRPr>
-                    </a:p>
-                  </a:txBody>
-                  <a:tcPr marL="27432" marR="27432" marT="27432" marB="27432" anchor="ctr">
-                    <a:lnL w="6350" cap="flat" cmpd="sng" algn="ctr">
-                      <a:solidFill>
-                        <a:srgbClr val="D3DED0"/>
-                      </a:solidFill>
-                      <a:prstDash val="solid"/>
-                      <a:round/>
-                      <a:headEnd type="none" w="med" len="med"/>
-                      <a:tailEnd type="none" w="med" len="med"/>
-                    </a:lnL>
-                    <a:lnR w="6350" cap="flat" cmpd="sng" algn="ctr">
-                      <a:solidFill>
-                        <a:srgbClr val="D3DED0"/>
-                      </a:solidFill>
-                      <a:prstDash val="solid"/>
-                      <a:round/>
-                      <a:headEnd type="none" w="med" len="med"/>
-                      <a:tailEnd type="none" w="med" len="med"/>
-                    </a:lnR>
-                    <a:lnT w="6350" cap="flat" cmpd="sng" algn="ctr">
-                      <a:solidFill>
-                        <a:srgbClr val="D3DED0"/>
-                      </a:solidFill>
-                      <a:prstDash val="solid"/>
-                      <a:round/>
-                      <a:headEnd type="none" w="med" len="med"/>
-                      <a:tailEnd type="none" w="med" len="med"/>
-                    </a:lnT>
-                    <a:lnB w="6350" cap="flat" cmpd="sng" algn="ctr">
-                      <a:solidFill>
-                        <a:srgbClr val="D3DED0"/>
-                      </a:solidFill>
-                      <a:prstDash val="solid"/>
-                      <a:round/>
-                      <a:headEnd type="none" w="med" len="med"/>
-                      <a:tailEnd type="none" w="med" len="med"/>
-                    </a:lnB>
-                  </a:tcPr>
-                </a:tc>
-              </a:tr>
-              <a:tr h="187452">
-                <a:tc>
-                  <a:txBody>
-                    <a:bodyPr/>
-                    <a:lstStyle/>
-                    <a:p>
-                      <a:pPr indent="0" marL="0">
-                        <a:buNone/>
-                      </a:pPr>
-                      <a:r>
-                        <a:rPr lang="en-US" sz="700" dirty="0">
-                          <a:solidFill>
-                            <a:srgbClr val="2B2B2B"/>
-                          </a:solidFill>
-                          <a:latin typeface="Meiryo UI" pitchFamily="34" charset="0"/>
-                          <a:ea typeface="Meiryo UI" pitchFamily="34" charset="-122"/>
-                          <a:cs typeface="Meiryo UI" pitchFamily="34" charset="-120"/>
-                        </a:rPr>
-                        <a:t>C2 段替えSMED・多能工化・シフト再設計</a:t>
-                      </a:r>
-                      <a:endParaRPr lang="en-US" sz="700" dirty="0">
-                        <a:latin typeface="Meiryo UI" charset="0"/>
-                        <a:ea typeface="Meiryo UI" charset="0"/>
-                        <a:cs typeface="Meiryo UI" charset="0"/>
-                      </a:endParaRPr>
-                    </a:p>
-                  </a:txBody>
-                  <a:tcPr marL="27432" marR="27432" marT="27432" marB="27432" anchor="ctr">
-                    <a:lnL w="6350" cap="flat" cmpd="sng" algn="ctr">
-                      <a:solidFill>
-                        <a:srgbClr val="D3DED0"/>
-                      </a:solidFill>
-                      <a:prstDash val="solid"/>
-                      <a:round/>
-                      <a:headEnd type="none" w="med" len="med"/>
-                      <a:tailEnd type="none" w="med" len="med"/>
-                    </a:lnL>
-                    <a:lnR w="6350" cap="flat" cmpd="sng" algn="ctr">
-                      <a:solidFill>
-                        <a:srgbClr val="D3DED0"/>
-                      </a:solidFill>
-                      <a:prstDash val="solid"/>
-                      <a:round/>
-                      <a:headEnd type="none" w="med" len="med"/>
-                      <a:tailEnd type="none" w="med" len="med"/>
-                    </a:lnR>
-                    <a:lnT w="6350" cap="flat" cmpd="sng" algn="ctr">
-                      <a:solidFill>
-                        <a:srgbClr val="D3DED0"/>
-                      </a:solidFill>
-                      <a:prstDash val="solid"/>
-                      <a:round/>
-                      <a:headEnd type="none" w="med" len="med"/>
-                      <a:tailEnd type="none" w="med" len="med"/>
-                    </a:lnT>
-                    <a:lnB w="6350" cap="flat" cmpd="sng" algn="ctr">
-                      <a:solidFill>
-                        <a:srgbClr val="D3DED0"/>
-                      </a:solidFill>
-                      <a:prstDash val="solid"/>
-                      <a:round/>
-                      <a:headEnd type="none" w="med" len="med"/>
-                      <a:tailEnd type="none" w="med" len="med"/>
-                    </a:lnB>
-                  </a:tcPr>
-                </a:tc>
-                <a:tc>
-                  <a:txBody>
-                    <a:bodyPr/>
-                    <a:lstStyle/>
-                    <a:p>
-                      <a:pPr indent="0" marL="0">
-                        <a:buNone/>
-                      </a:pPr>
-                      <a:r>
-                        <a:rPr lang="en-US" sz="700" dirty="0">
-                          <a:solidFill>
-                            <a:srgbClr val="2B2B2B"/>
-                          </a:solidFill>
-                          <a:latin typeface="Meiryo UI" pitchFamily="34" charset="0"/>
-                          <a:ea typeface="Meiryo UI" pitchFamily="34" charset="-122"/>
-                          <a:cs typeface="Meiryo UI" pitchFamily="34" charset="-120"/>
-                        </a:rPr>
-                        <a:t>▲5名相当</a:t>
-                      </a:r>
-                      <a:endParaRPr lang="en-US" sz="700" dirty="0">
-                        <a:latin typeface="Meiryo UI" charset="0"/>
-                        <a:ea typeface="Meiryo UI" charset="0"/>
-                        <a:cs typeface="Meiryo UI" charset="0"/>
-                      </a:endParaRPr>
-                    </a:p>
-                  </a:txBody>
-                  <a:tcPr marL="27432" marR="27432" marT="27432" marB="27432" anchor="ctr">
-                    <a:lnL w="6350" cap="flat" cmpd="sng" algn="ctr">
-                      <a:solidFill>
-                        <a:srgbClr val="D3DED0"/>
-                      </a:solidFill>
-                      <a:prstDash val="solid"/>
-                      <a:round/>
-                      <a:headEnd type="none" w="med" len="med"/>
-                      <a:tailEnd type="none" w="med" len="med"/>
-                    </a:lnL>
-                    <a:lnR w="6350" cap="flat" cmpd="sng" algn="ctr">
-                      <a:solidFill>
-                        <a:srgbClr val="D3DED0"/>
-                      </a:solidFill>
-                      <a:prstDash val="solid"/>
-                      <a:round/>
-                      <a:headEnd type="none" w="med" len="med"/>
-                      <a:tailEnd type="none" w="med" len="med"/>
-                    </a:lnR>
-                    <a:lnT w="6350" cap="flat" cmpd="sng" algn="ctr">
-                      <a:solidFill>
-                        <a:srgbClr val="D3DED0"/>
-                      </a:solidFill>
-                      <a:prstDash val="solid"/>
-                      <a:round/>
-                      <a:headEnd type="none" w="med" len="med"/>
-                      <a:tailEnd type="none" w="med" len="med"/>
-                    </a:lnT>
-                    <a:lnB w="6350" cap="flat" cmpd="sng" algn="ctr">
-                      <a:solidFill>
-                        <a:srgbClr val="D3DED0"/>
-                      </a:solidFill>
-                      <a:prstDash val="solid"/>
-                      <a:round/>
-                      <a:headEnd type="none" w="med" len="med"/>
-                      <a:tailEnd type="none" w="med" len="med"/>
-                    </a:lnB>
-                  </a:tcPr>
-                </a:tc>
-                <a:tc>
-                  <a:txBody>
-                    <a:bodyPr/>
-                    <a:lstStyle/>
-                    <a:p>
-                      <a:pPr indent="0" marL="0">
-                        <a:buNone/>
-                      </a:pPr>
-                      <a:r>
-                        <a:rPr lang="en-US" sz="700" dirty="0">
-                          <a:solidFill>
-                            <a:srgbClr val="2B2B2B"/>
-                          </a:solidFill>
-                          <a:latin typeface="Meiryo UI" pitchFamily="34" charset="0"/>
-                          <a:ea typeface="Meiryo UI" pitchFamily="34" charset="-122"/>
-                          <a:cs typeface="Meiryo UI" pitchFamily="34" charset="-120"/>
-                        </a:rPr>
-                        <a:t>工場製造+プロ包技室</a:t>
-                      </a:r>
-                      <a:endParaRPr lang="en-US" sz="700" dirty="0">
-                        <a:latin typeface="Meiryo UI" charset="0"/>
-                        <a:ea typeface="Meiryo UI" charset="0"/>
-                        <a:cs typeface="Meiryo UI" charset="0"/>
-                      </a:endParaRPr>
-                    </a:p>
-                  </a:txBody>
-                  <a:tcPr marL="27432" marR="27432" marT="27432" marB="27432" anchor="ctr">
-                    <a:lnL w="6350" cap="flat" cmpd="sng" algn="ctr">
-                      <a:solidFill>
-                        <a:srgbClr val="D3DED0"/>
-                      </a:solidFill>
-                      <a:prstDash val="solid"/>
-                      <a:round/>
-                      <a:headEnd type="none" w="med" len="med"/>
-                      <a:tailEnd type="none" w="med" len="med"/>
-                    </a:lnL>
-                    <a:lnR w="6350" cap="flat" cmpd="sng" algn="ctr">
-                      <a:solidFill>
-                        <a:srgbClr val="D3DED0"/>
-                      </a:solidFill>
-                      <a:prstDash val="solid"/>
-                      <a:round/>
-                      <a:headEnd type="none" w="med" len="med"/>
-                      <a:tailEnd type="none" w="med" len="med"/>
-                    </a:lnR>
-                    <a:lnT w="6350" cap="flat" cmpd="sng" algn="ctr">
-                      <a:solidFill>
-                        <a:srgbClr val="D3DED0"/>
-                      </a:solidFill>
-                      <a:prstDash val="solid"/>
-                      <a:round/>
-                      <a:headEnd type="none" w="med" len="med"/>
-                      <a:tailEnd type="none" w="med" len="med"/>
-                    </a:lnT>
-                    <a:lnB w="6350" cap="flat" cmpd="sng" algn="ctr">
-                      <a:solidFill>
-                        <a:srgbClr val="D3DED0"/>
-                      </a:solidFill>
-                      <a:prstDash val="solid"/>
-                      <a:round/>
-                      <a:headEnd type="none" w="med" len="med"/>
-                      <a:tailEnd type="none" w="med" len="med"/>
-                    </a:lnB>
-                  </a:tcPr>
-                </a:tc>
-                <a:tc>
-                  <a:txBody>
-                    <a:bodyPr/>
-                    <a:lstStyle/>
-                    <a:p>
-                      <a:pPr indent="0" marL="0">
-                        <a:buNone/>
-                      </a:pPr>
-                      <a:r>
-                        <a:rPr lang="en-US" sz="700" dirty="0">
-                          <a:solidFill>
-                            <a:srgbClr val="2B2B2B"/>
-                          </a:solidFill>
-                          <a:latin typeface="Meiryo UI" pitchFamily="34" charset="0"/>
-                          <a:ea typeface="Meiryo UI" pitchFamily="34" charset="-122"/>
-                          <a:cs typeface="Meiryo UI" pitchFamily="34" charset="-120"/>
-                        </a:rPr>
-                        <a:t>26/11分析→27年度実装</a:t>
-                      </a:r>
-                      <a:endParaRPr lang="en-US" sz="700" dirty="0">
-                        <a:latin typeface="Meiryo UI" charset="0"/>
-                        <a:ea typeface="Meiryo UI" charset="0"/>
-                        <a:cs typeface="Meiryo UI" charset="0"/>
-                      </a:endParaRPr>
-                    </a:p>
-                  </a:txBody>
-                  <a:tcPr marL="27432" marR="27432" marT="27432" marB="27432" anchor="ctr">
-                    <a:lnL w="6350" cap="flat" cmpd="sng" algn="ctr">
-                      <a:solidFill>
-                        <a:srgbClr val="D3DED0"/>
-                      </a:solidFill>
-                      <a:prstDash val="solid"/>
-                      <a:round/>
-                      <a:headEnd type="none" w="med" len="med"/>
-                      <a:tailEnd type="none" w="med" len="med"/>
-                    </a:lnL>
-                    <a:lnR w="6350" cap="flat" cmpd="sng" algn="ctr">
-                      <a:solidFill>
-                        <a:srgbClr val="D3DED0"/>
-                      </a:solidFill>
-                      <a:prstDash val="solid"/>
-                      <a:round/>
-                      <a:headEnd type="none" w="med" len="med"/>
-                      <a:tailEnd type="none" w="med" len="med"/>
-                    </a:lnR>
-                    <a:lnT w="6350" cap="flat" cmpd="sng" algn="ctr">
-                      <a:solidFill>
-                        <a:srgbClr val="D3DED0"/>
-                      </a:solidFill>
-                      <a:prstDash val="solid"/>
-                      <a:round/>
-                      <a:headEnd type="none" w="med" len="med"/>
-                      <a:tailEnd type="none" w="med" len="med"/>
-                    </a:lnT>
-                    <a:lnB w="6350" cap="flat" cmpd="sng" algn="ctr">
-                      <a:solidFill>
-                        <a:srgbClr val="D3DED0"/>
-                      </a:solidFill>
-                      <a:prstDash val="solid"/>
-                      <a:round/>
-                      <a:headEnd type="none" w="med" len="med"/>
-                      <a:tailEnd type="none" w="med" len="med"/>
-                    </a:lnB>
-                  </a:tcPr>
-                </a:tc>
-              </a:tr>
-              <a:tr h="187452">
-                <a:tc>
-                  <a:txBody>
-                    <a:bodyPr/>
-                    <a:lstStyle/>
-                    <a:p>
-                      <a:pPr indent="0" marL="0">
-                        <a:buNone/>
-                      </a:pPr>
-                      <a:r>
-                        <a:rPr lang="en-US" sz="700" dirty="0">
-                          <a:solidFill>
-                            <a:srgbClr val="2B2B2B"/>
-                          </a:solidFill>
-                          <a:latin typeface="Meiryo UI" pitchFamily="34" charset="0"/>
-                          <a:ea typeface="Meiryo UI" pitchFamily="34" charset="-122"/>
-                          <a:cs typeface="Meiryo UI" pitchFamily="34" charset="-120"/>
-                        </a:rPr>
-                        <a:t>C3 A停止(前準備・後片付け)の再設計=省人化効果の食い潰し防止</a:t>
-                      </a:r>
-                      <a:endParaRPr lang="en-US" sz="700" dirty="0">
-                        <a:latin typeface="Meiryo UI" charset="0"/>
-                        <a:ea typeface="Meiryo UI" charset="0"/>
-                        <a:cs typeface="Meiryo UI" charset="0"/>
-                      </a:endParaRPr>
-                    </a:p>
-                  </a:txBody>
-                  <a:tcPr marL="27432" marR="27432" marT="27432" marB="27432" anchor="ctr">
-                    <a:lnL w="6350" cap="flat" cmpd="sng" algn="ctr">
-                      <a:solidFill>
-                        <a:srgbClr val="D3DED0"/>
-                      </a:solidFill>
-                      <a:prstDash val="solid"/>
-                      <a:round/>
-                      <a:headEnd type="none" w="med" len="med"/>
-                      <a:tailEnd type="none" w="med" len="med"/>
-                    </a:lnL>
-                    <a:lnR w="6350" cap="flat" cmpd="sng" algn="ctr">
-                      <a:solidFill>
-                        <a:srgbClr val="D3DED0"/>
-                      </a:solidFill>
-                      <a:prstDash val="solid"/>
-                      <a:round/>
-                      <a:headEnd type="none" w="med" len="med"/>
-                      <a:tailEnd type="none" w="med" len="med"/>
-                    </a:lnR>
-                    <a:lnT w="6350" cap="flat" cmpd="sng" algn="ctr">
-                      <a:solidFill>
-                        <a:srgbClr val="D3DED0"/>
-                      </a:solidFill>
-                      <a:prstDash val="solid"/>
-                      <a:round/>
-                      <a:headEnd type="none" w="med" len="med"/>
-                      <a:tailEnd type="none" w="med" len="med"/>
-                    </a:lnT>
-                    <a:lnB w="6350" cap="flat" cmpd="sng" algn="ctr">
-                      <a:solidFill>
-                        <a:srgbClr val="D3DED0"/>
-                      </a:solidFill>
-                      <a:prstDash val="solid"/>
-                      <a:round/>
-                      <a:headEnd type="none" w="med" len="med"/>
-                      <a:tailEnd type="none" w="med" len="med"/>
-                    </a:lnB>
-                  </a:tcPr>
-                </a:tc>
-                <a:tc>
-                  <a:txBody>
-                    <a:bodyPr/>
-                    <a:lstStyle/>
-                    <a:p>
-                      <a:pPr indent="0" marL="0">
-                        <a:buNone/>
-                      </a:pPr>
-                      <a:r>
-                        <a:rPr lang="en-US" sz="700" dirty="0">
-                          <a:solidFill>
-                            <a:srgbClr val="2B2B2B"/>
-                          </a:solidFill>
-                          <a:latin typeface="Meiryo UI" pitchFamily="34" charset="0"/>
-                          <a:ea typeface="Meiryo UI" pitchFamily="34" charset="-122"/>
-                          <a:cs typeface="Meiryo UI" pitchFamily="34" charset="-120"/>
-                        </a:rPr>
-                        <a:t>OEE防衛</a:t>
-                      </a:r>
-                      <a:endParaRPr lang="en-US" sz="700" dirty="0">
-                        <a:latin typeface="Meiryo UI" charset="0"/>
-                        <a:ea typeface="Meiryo UI" charset="0"/>
-                        <a:cs typeface="Meiryo UI" charset="0"/>
-                      </a:endParaRPr>
-                    </a:p>
-                  </a:txBody>
-                  <a:tcPr marL="27432" marR="27432" marT="27432" marB="27432" anchor="ctr">
-                    <a:lnL w="6350" cap="flat" cmpd="sng" algn="ctr">
-                      <a:solidFill>
-                        <a:srgbClr val="D3DED0"/>
-                      </a:solidFill>
-                      <a:prstDash val="solid"/>
-                      <a:round/>
-                      <a:headEnd type="none" w="med" len="med"/>
-                      <a:tailEnd type="none" w="med" len="med"/>
-                    </a:lnL>
-                    <a:lnR w="6350" cap="flat" cmpd="sng" algn="ctr">
-                      <a:solidFill>
-                        <a:srgbClr val="D3DED0"/>
-                      </a:solidFill>
-                      <a:prstDash val="solid"/>
-                      <a:round/>
-                      <a:headEnd type="none" w="med" len="med"/>
-                      <a:tailEnd type="none" w="med" len="med"/>
-                    </a:lnR>
-                    <a:lnT w="6350" cap="flat" cmpd="sng" algn="ctr">
-                      <a:solidFill>
-                        <a:srgbClr val="D3DED0"/>
-                      </a:solidFill>
-                      <a:prstDash val="solid"/>
-                      <a:round/>
-                      <a:headEnd type="none" w="med" len="med"/>
-                      <a:tailEnd type="none" w="med" len="med"/>
-                    </a:lnT>
-                    <a:lnB w="6350" cap="flat" cmpd="sng" algn="ctr">
-                      <a:solidFill>
-                        <a:srgbClr val="D3DED0"/>
-                      </a:solidFill>
-                      <a:prstDash val="solid"/>
-                      <a:round/>
-                      <a:headEnd type="none" w="med" len="med"/>
-                      <a:tailEnd type="none" w="med" len="med"/>
-                    </a:lnB>
-                  </a:tcPr>
-                </a:tc>
-                <a:tc>
-                  <a:txBody>
-                    <a:bodyPr/>
-                    <a:lstStyle/>
-                    <a:p>
-                      <a:pPr indent="0" marL="0">
-                        <a:buNone/>
-                      </a:pPr>
-                      <a:r>
-                        <a:rPr lang="en-US" sz="700" dirty="0">
-                          <a:solidFill>
-                            <a:srgbClr val="2B2B2B"/>
-                          </a:solidFill>
-                          <a:latin typeface="Meiryo UI" pitchFamily="34" charset="0"/>
-                          <a:ea typeface="Meiryo UI" pitchFamily="34" charset="-122"/>
-                          <a:cs typeface="Meiryo UI" pitchFamily="34" charset="-120"/>
-                        </a:rPr>
-                        <a:t>プロ包技室+工場</a:t>
-                      </a:r>
-                      <a:endParaRPr lang="en-US" sz="700" dirty="0">
-                        <a:latin typeface="Meiryo UI" charset="0"/>
-                        <a:ea typeface="Meiryo UI" charset="0"/>
-                        <a:cs typeface="Meiryo UI" charset="0"/>
-                      </a:endParaRPr>
-                    </a:p>
-                  </a:txBody>
-                  <a:tcPr marL="27432" marR="27432" marT="27432" marB="27432" anchor="ctr">
-                    <a:lnL w="6350" cap="flat" cmpd="sng" algn="ctr">
-                      <a:solidFill>
-                        <a:srgbClr val="D3DED0"/>
-                      </a:solidFill>
-                      <a:prstDash val="solid"/>
-                      <a:round/>
-                      <a:headEnd type="none" w="med" len="med"/>
-                      <a:tailEnd type="none" w="med" len="med"/>
-                    </a:lnL>
-                    <a:lnR w="6350" cap="flat" cmpd="sng" algn="ctr">
-                      <a:solidFill>
-                        <a:srgbClr val="D3DED0"/>
-                      </a:solidFill>
-                      <a:prstDash val="solid"/>
-                      <a:round/>
-                      <a:headEnd type="none" w="med" len="med"/>
-                      <a:tailEnd type="none" w="med" len="med"/>
-                    </a:lnR>
-                    <a:lnT w="6350" cap="flat" cmpd="sng" algn="ctr">
-                      <a:solidFill>
-                        <a:srgbClr val="D3DED0"/>
-                      </a:solidFill>
-                      <a:prstDash val="solid"/>
-                      <a:round/>
-                      <a:headEnd type="none" w="med" len="med"/>
-                      <a:tailEnd type="none" w="med" len="med"/>
-                    </a:lnT>
-                    <a:lnB w="6350" cap="flat" cmpd="sng" algn="ctr">
-                      <a:solidFill>
-                        <a:srgbClr val="D3DED0"/>
-                      </a:solidFill>
-                      <a:prstDash val="solid"/>
-                      <a:round/>
-                      <a:headEnd type="none" w="med" len="med"/>
-                      <a:tailEnd type="none" w="med" len="med"/>
-                    </a:lnB>
-                  </a:tcPr>
-                </a:tc>
-                <a:tc>
-                  <a:txBody>
-                    <a:bodyPr/>
-                    <a:lstStyle/>
-                    <a:p>
-                      <a:pPr indent="0" marL="0">
-                        <a:buNone/>
-                      </a:pPr>
-                      <a:r>
-                        <a:rPr lang="en-US" sz="700" dirty="0">
-                          <a:solidFill>
-                            <a:srgbClr val="2B2B2B"/>
-                          </a:solidFill>
-                          <a:latin typeface="Meiryo UI" pitchFamily="34" charset="0"/>
-                          <a:ea typeface="Meiryo UI" pitchFamily="34" charset="-122"/>
-                          <a:cs typeface="Meiryo UI" pitchFamily="34" charset="-120"/>
-                        </a:rPr>
-                        <a:t>27年PoCと同時</a:t>
-                      </a:r>
-                      <a:endParaRPr lang="en-US" sz="700" dirty="0">
-                        <a:latin typeface="Meiryo UI" charset="0"/>
-                        <a:ea typeface="Meiryo UI" charset="0"/>
-                        <a:cs typeface="Meiryo UI" charset="0"/>
-                      </a:endParaRPr>
-                    </a:p>
-                  </a:txBody>
-                  <a:tcPr marL="27432" marR="27432" marT="27432" marB="27432" anchor="ctr">
-                    <a:lnL w="6350" cap="flat" cmpd="sng" algn="ctr">
-                      <a:solidFill>
-                        <a:srgbClr val="D3DED0"/>
-                      </a:solidFill>
-                      <a:prstDash val="solid"/>
-                      <a:round/>
-                      <a:headEnd type="none" w="med" len="med"/>
-                      <a:tailEnd type="none" w="med" len="med"/>
-                    </a:lnL>
-                    <a:lnR w="6350" cap="flat" cmpd="sng" algn="ctr">
-                      <a:solidFill>
-                        <a:srgbClr val="D3DED0"/>
-                      </a:solidFill>
-                      <a:prstDash val="solid"/>
-                      <a:round/>
-                      <a:headEnd type="none" w="med" len="med"/>
-                      <a:tailEnd type="none" w="med" len="med"/>
-                    </a:lnR>
-                    <a:lnT w="6350" cap="flat" cmpd="sng" algn="ctr">
-                      <a:solidFill>
-                        <a:srgbClr val="D3DED0"/>
-                      </a:solidFill>
-                      <a:prstDash val="solid"/>
-                      <a:round/>
-                      <a:headEnd type="none" w="med" len="med"/>
-                      <a:tailEnd type="none" w="med" len="med"/>
-                    </a:lnT>
-                    <a:lnB w="6350" cap="flat" cmpd="sng" algn="ctr">
-                      <a:solidFill>
-                        <a:srgbClr val="D3DED0"/>
-                      </a:solidFill>
-                      <a:prstDash val="solid"/>
-                      <a:round/>
-                      <a:headEnd type="none" w="med" len="med"/>
-                      <a:tailEnd type="none" w="med" len="med"/>
-                    </a:lnB>
-                  </a:tcPr>
-                </a:tc>
-              </a:tr>
-              <a:tr h="187452">
-                <a:tc gridSpan="4">
-                  <a:txBody>
-                    <a:bodyPr/>
-                    <a:lstStyle/>
-                    <a:p>
-                      <a:pPr indent="0" marL="0">
-                        <a:buNone/>
-                      </a:pPr>
-                      <a:r>
-                        <a:rPr lang="en-US" sz="750" b="1" dirty="0">
-                          <a:solidFill>
-                            <a:srgbClr val="1F3D20"/>
-                          </a:solidFill>
-                          <a:latin typeface="Meiryo UI" pitchFamily="34" charset="0"/>
-                          <a:ea typeface="Meiryo UI" pitchFamily="34" charset="-122"/>
-                          <a:cs typeface="Meiryo UI" pitchFamily="34" charset="-120"/>
-                        </a:rPr>
-                        <a:t>D. 構造・全体最適</a:t>
-                      </a:r>
-                      <a:endParaRPr lang="en-US" sz="750" dirty="0">
-                        <a:latin typeface="Meiryo UI" charset="0"/>
-                        <a:ea typeface="Meiryo UI" charset="0"/>
-                        <a:cs typeface="Meiryo UI" charset="0"/>
-                      </a:endParaRPr>
-                    </a:p>
-                  </a:txBody>
-                  <a:tcPr marL="27432" marR="27432" marT="27432" marB="27432" anchor="ctr">
-                    <a:lnL w="6350" cap="flat" cmpd="sng" algn="ctr">
-                      <a:solidFill>
-                        <a:srgbClr val="D3DED0"/>
-                      </a:solidFill>
-                      <a:prstDash val="solid"/>
-                      <a:round/>
-                      <a:headEnd type="none" w="med" len="med"/>
-                      <a:tailEnd type="none" w="med" len="med"/>
-                    </a:lnL>
-                    <a:lnR w="6350" cap="flat" cmpd="sng" algn="ctr">
-                      <a:solidFill>
-                        <a:srgbClr val="D3DED0"/>
-                      </a:solidFill>
-                      <a:prstDash val="solid"/>
-                      <a:round/>
-                      <a:headEnd type="none" w="med" len="med"/>
-                      <a:tailEnd type="none" w="med" len="med"/>
-                    </a:lnR>
-                    <a:lnT w="6350" cap="flat" cmpd="sng" algn="ctr">
-                      <a:solidFill>
-                        <a:srgbClr val="D3DED0"/>
-                      </a:solidFill>
-                      <a:prstDash val="solid"/>
-                      <a:round/>
-                      <a:headEnd type="none" w="med" len="med"/>
-                      <a:tailEnd type="none" w="med" len="med"/>
-                    </a:lnT>
-                    <a:lnB w="6350" cap="flat" cmpd="sng" algn="ctr">
-                      <a:solidFill>
-                        <a:srgbClr val="D3DED0"/>
-                      </a:solidFill>
-                      <a:prstDash val="solid"/>
-                      <a:round/>
-                      <a:headEnd type="none" w="med" len="med"/>
-                      <a:tailEnd type="none" w="med" len="med"/>
-                    </a:lnB>
-                    <a:solidFill>
-                      <a:srgbClr val="DFEBDB"/>
-                    </a:solidFill>
-                  </a:tcPr>
-                </a:tc>
-                <a:tc hMerge="1">
-                  <a:tcPr/>
-                </a:tc>
-                <a:tc hMerge="1">
-                  <a:tcPr/>
-                </a:tc>
-                <a:tc hMerge="1">
-                  <a:tcPr/>
-                </a:tc>
-              </a:tr>
-              <a:tr h="187452">
-                <a:tc>
-                  <a:txBody>
-                    <a:bodyPr/>
-                    <a:lstStyle/>
-                    <a:p>
-                      <a:pPr indent="0" marL="0">
-                        <a:buNone/>
-                      </a:pPr>
-                      <a:r>
-                        <a:rPr lang="en-US" sz="700" dirty="0">
-                          <a:solidFill>
-                            <a:srgbClr val="2B2B2B"/>
-                          </a:solidFill>
-                          <a:latin typeface="Meiryo UI" pitchFamily="34" charset="0"/>
-                          <a:ea typeface="Meiryo UI" pitchFamily="34" charset="-122"/>
-                          <a:cs typeface="Meiryo UI" pitchFamily="34" charset="-120"/>
-                        </a:rPr>
-                        <a:t>D1 SKU・設計標準化(DFM)/D2 人員動態・稼働データ基盤の恒久化</a:t>
-                      </a:r>
-                      <a:endParaRPr lang="en-US" sz="700" dirty="0">
-                        <a:latin typeface="Meiryo UI" charset="0"/>
-                        <a:ea typeface="Meiryo UI" charset="0"/>
-                        <a:cs typeface="Meiryo UI" charset="0"/>
-                      </a:endParaRPr>
-                    </a:p>
-                  </a:txBody>
-                  <a:tcPr marL="27432" marR="27432" marT="27432" marB="27432" anchor="ctr">
-                    <a:lnL w="6350" cap="flat" cmpd="sng" algn="ctr">
-                      <a:solidFill>
-                        <a:srgbClr val="D3DED0"/>
-                      </a:solidFill>
-                      <a:prstDash val="solid"/>
-                      <a:round/>
-                      <a:headEnd type="none" w="med" len="med"/>
-                      <a:tailEnd type="none" w="med" len="med"/>
-                    </a:lnL>
-                    <a:lnR w="6350" cap="flat" cmpd="sng" algn="ctr">
-                      <a:solidFill>
-                        <a:srgbClr val="D3DED0"/>
-                      </a:solidFill>
-                      <a:prstDash val="solid"/>
-                      <a:round/>
-                      <a:headEnd type="none" w="med" len="med"/>
-                      <a:tailEnd type="none" w="med" len="med"/>
-                    </a:lnR>
-                    <a:lnT w="6350" cap="flat" cmpd="sng" algn="ctr">
-                      <a:solidFill>
-                        <a:srgbClr val="D3DED0"/>
-                      </a:solidFill>
-                      <a:prstDash val="solid"/>
-                      <a:round/>
-                      <a:headEnd type="none" w="med" len="med"/>
-                      <a:tailEnd type="none" w="med" len="med"/>
-                    </a:lnT>
-                    <a:lnB w="6350" cap="flat" cmpd="sng" algn="ctr">
-                      <a:solidFill>
-                        <a:srgbClr val="D3DED0"/>
-                      </a:solidFill>
-                      <a:prstDash val="solid"/>
-                      <a:round/>
-                      <a:headEnd type="none" w="med" len="med"/>
-                      <a:tailEnd type="none" w="med" len="med"/>
-                    </a:lnB>
-                  </a:tcPr>
-                </a:tc>
-                <a:tc>
-                  <a:txBody>
-                    <a:bodyPr/>
-                    <a:lstStyle/>
-                    <a:p>
-                      <a:pPr indent="0" marL="0">
-                        <a:buNone/>
-                      </a:pPr>
-                      <a:r>
-                        <a:rPr lang="en-US" sz="700" dirty="0">
-                          <a:solidFill>
-                            <a:srgbClr val="2B2B2B"/>
-                          </a:solidFill>
-                          <a:latin typeface="Meiryo UI" pitchFamily="34" charset="0"/>
-                          <a:ea typeface="Meiryo UI" pitchFamily="34" charset="-122"/>
-                          <a:cs typeface="Meiryo UI" pitchFamily="34" charset="-120"/>
-                        </a:rPr>
-                        <a:t>段替え減・PDCA基盤</a:t>
-                      </a:r>
-                      <a:endParaRPr lang="en-US" sz="700" dirty="0">
-                        <a:latin typeface="Meiryo UI" charset="0"/>
-                        <a:ea typeface="Meiryo UI" charset="0"/>
-                        <a:cs typeface="Meiryo UI" charset="0"/>
-                      </a:endParaRPr>
-                    </a:p>
-                  </a:txBody>
-                  <a:tcPr marL="27432" marR="27432" marT="27432" marB="27432" anchor="ctr">
-                    <a:lnL w="6350" cap="flat" cmpd="sng" algn="ctr">
-                      <a:solidFill>
-                        <a:srgbClr val="D3DED0"/>
-                      </a:solidFill>
-                      <a:prstDash val="solid"/>
-                      <a:round/>
-                      <a:headEnd type="none" w="med" len="med"/>
-                      <a:tailEnd type="none" w="med" len="med"/>
-                    </a:lnL>
-                    <a:lnR w="6350" cap="flat" cmpd="sng" algn="ctr">
-                      <a:solidFill>
-                        <a:srgbClr val="D3DED0"/>
-                      </a:solidFill>
-                      <a:prstDash val="solid"/>
-                      <a:round/>
-                      <a:headEnd type="none" w="med" len="med"/>
-                      <a:tailEnd type="none" w="med" len="med"/>
-                    </a:lnR>
-                    <a:lnT w="6350" cap="flat" cmpd="sng" algn="ctr">
-                      <a:solidFill>
-                        <a:srgbClr val="D3DED0"/>
-                      </a:solidFill>
-                      <a:prstDash val="solid"/>
-                      <a:round/>
-                      <a:headEnd type="none" w="med" len="med"/>
-                      <a:tailEnd type="none" w="med" len="med"/>
-                    </a:lnT>
-                    <a:lnB w="6350" cap="flat" cmpd="sng" algn="ctr">
-                      <a:solidFill>
-                        <a:srgbClr val="D3DED0"/>
-                      </a:solidFill>
-                      <a:prstDash val="solid"/>
-                      <a:round/>
-                      <a:headEnd type="none" w="med" len="med"/>
-                      <a:tailEnd type="none" w="med" len="med"/>
-                    </a:lnB>
-                  </a:tcPr>
-                </a:tc>
-                <a:tc>
-                  <a:txBody>
-                    <a:bodyPr/>
-                    <a:lstStyle/>
-                    <a:p>
-                      <a:pPr indent="0" marL="0">
-                        <a:buNone/>
-                      </a:pPr>
-                      <a:r>
-                        <a:rPr lang="en-US" sz="700" dirty="0">
-                          <a:solidFill>
-                            <a:srgbClr val="2B2B2B"/>
-                          </a:solidFill>
-                          <a:latin typeface="Meiryo UI" pitchFamily="34" charset="0"/>
-                          <a:ea typeface="Meiryo UI" pitchFamily="34" charset="-122"/>
-                          <a:cs typeface="Meiryo UI" pitchFamily="34" charset="-120"/>
-                        </a:rPr>
-                        <a:t>R&amp;D・事業部・生技セ/デジ戦</a:t>
-                      </a:r>
-                      <a:endParaRPr lang="en-US" sz="700" dirty="0">
-                        <a:latin typeface="Meiryo UI" charset="0"/>
-                        <a:ea typeface="Meiryo UI" charset="0"/>
-                        <a:cs typeface="Meiryo UI" charset="0"/>
-                      </a:endParaRPr>
-                    </a:p>
-                  </a:txBody>
-                  <a:tcPr marL="27432" marR="27432" marT="27432" marB="27432" anchor="ctr">
-                    <a:lnL w="6350" cap="flat" cmpd="sng" algn="ctr">
-                      <a:solidFill>
-                        <a:srgbClr val="D3DED0"/>
-                      </a:solidFill>
-                      <a:prstDash val="solid"/>
-                      <a:round/>
-                      <a:headEnd type="none" w="med" len="med"/>
-                      <a:tailEnd type="none" w="med" len="med"/>
-                    </a:lnL>
-                    <a:lnR w="6350" cap="flat" cmpd="sng" algn="ctr">
-                      <a:solidFill>
-                        <a:srgbClr val="D3DED0"/>
-                      </a:solidFill>
-                      <a:prstDash val="solid"/>
-                      <a:round/>
-                      <a:headEnd type="none" w="med" len="med"/>
-                      <a:tailEnd type="none" w="med" len="med"/>
-                    </a:lnR>
-                    <a:lnT w="6350" cap="flat" cmpd="sng" algn="ctr">
-                      <a:solidFill>
-                        <a:srgbClr val="D3DED0"/>
-                      </a:solidFill>
-                      <a:prstDash val="solid"/>
-                      <a:round/>
-                      <a:headEnd type="none" w="med" len="med"/>
-                      <a:tailEnd type="none" w="med" len="med"/>
-                    </a:lnT>
-                    <a:lnB w="6350" cap="flat" cmpd="sng" algn="ctr">
-                      <a:solidFill>
-                        <a:srgbClr val="D3DED0"/>
-                      </a:solidFill>
-                      <a:prstDash val="solid"/>
-                      <a:round/>
-                      <a:headEnd type="none" w="med" len="med"/>
-                      <a:tailEnd type="none" w="med" len="med"/>
-                    </a:lnB>
-                  </a:tcPr>
-                </a:tc>
-                <a:tc>
-                  <a:txBody>
-                    <a:bodyPr/>
-                    <a:lstStyle/>
-                    <a:p>
-                      <a:pPr indent="0" marL="0">
-                        <a:buNone/>
-                      </a:pPr>
-                      <a:r>
-                        <a:rPr lang="en-US" sz="700" dirty="0">
-                          <a:solidFill>
-                            <a:srgbClr val="2B2B2B"/>
-                          </a:solidFill>
-                          <a:latin typeface="Meiryo UI" pitchFamily="34" charset="0"/>
-                          <a:ea typeface="Meiryo UI" pitchFamily="34" charset="-122"/>
-                          <a:cs typeface="Meiryo UI" pitchFamily="34" charset="-120"/>
-                        </a:rPr>
-                        <a:t>27年度〜(中期テーマ)</a:t>
-                      </a:r>
-                      <a:endParaRPr lang="en-US" sz="700" dirty="0">
-                        <a:latin typeface="Meiryo UI" charset="0"/>
-                        <a:ea typeface="Meiryo UI" charset="0"/>
-                        <a:cs typeface="Meiryo UI" charset="0"/>
-                      </a:endParaRPr>
-                    </a:p>
-                  </a:txBody>
-                  <a:tcPr marL="27432" marR="27432" marT="27432" marB="27432" anchor="ctr">
+                  <a:tcPr marL="32004" marR="32004" marT="32004" marB="32004" anchor="ctr">
                     <a:lnL w="6350" cap="flat" cmpd="sng" algn="ctr">
                       <a:solidFill>
                         <a:srgbClr val="D3DED0"/>
@@ -5004,18 +3633,57 @@
       </p:graphicFrame>
       <p:sp>
         <p:nvSpPr>
-          <p:cNvPr id="18" name="Shape 15"/>
-          <p:cNvSpPr/>
-          <p:nvPr/>
-        </p:nvSpPr>
-        <p:spPr>
-          <a:xfrm>
-            <a:off x="8887968" y="2011680"/>
-            <a:ext cx="3072384" cy="932688"/>
+          <p:cNvPr id="29" name="Text 26"/>
+          <p:cNvSpPr/>
+          <p:nvPr/>
+        </p:nvSpPr>
+        <p:spPr>
+          <a:xfrm>
+            <a:off x="228600" y="4736592"/>
+            <a:ext cx="1417320" cy="402336"/>
+          </a:xfrm>
+          <a:prstGeom prst="rect">
+            <a:avLst/>
+          </a:prstGeom>
+          <a:noFill/>
+          <a:ln/>
+        </p:spPr>
+        <p:txBody>
+          <a:bodyPr wrap="square" lIns="0" tIns="0" rIns="0" bIns="0" rtlCol="0" anchor="ctr"/>
+          <a:lstStyle/>
+          <a:p>
+            <a:pPr indent="0" marL="0">
+              <a:buNone/>
+            </a:pPr>
+            <a:r>
+              <a:rPr lang="en-US" sz="750" b="1" dirty="0">
+                <a:solidFill>
+                  <a:srgbClr val="1F3D20"/>
+                </a:solidFill>
+                <a:latin typeface="Meiryo UI" pitchFamily="34" charset="0"/>
+                <a:ea typeface="Meiryo UI" pitchFamily="34" charset="-122"/>
+                <a:cs typeface="Meiryo UI" pitchFamily="34" charset="-120"/>
+              </a:rPr>
+              <a:t>効果のウォーターフォール:</a:t>
+            </a:r>
+            <a:endParaRPr lang="en-US" sz="750" dirty="0"/>
+          </a:p>
+        </p:txBody>
+      </p:sp>
+      <p:sp>
+        <p:nvSpPr>
+          <p:cNvPr id="30" name="Shape 27"/>
+          <p:cNvSpPr/>
+          <p:nvPr/>
+        </p:nvSpPr>
+        <p:spPr>
+          <a:xfrm>
+            <a:off x="1645920" y="4736592"/>
+            <a:ext cx="1417320" cy="402336"/>
           </a:xfrm>
           <a:prstGeom prst="roundRect">
             <a:avLst>
-              <a:gd name="adj" fmla="val 4902"/>
+              <a:gd name="adj" fmla="val 9091"/>
             </a:avLst>
           </a:prstGeom>
           <a:solidFill>
@@ -5031,14 +3699,14 @@
       </p:sp>
       <p:sp>
         <p:nvSpPr>
-          <p:cNvPr id="19" name="Text 16"/>
-          <p:cNvSpPr/>
-          <p:nvPr/>
-        </p:nvSpPr>
-        <p:spPr>
-          <a:xfrm>
-            <a:off x="8979408" y="2057400"/>
-            <a:ext cx="2889504" cy="219456"/>
+          <p:cNvPr id="31" name="Text 28"/>
+          <p:cNvSpPr/>
+          <p:nvPr/>
+        </p:nvSpPr>
+        <p:spPr>
+          <a:xfrm>
+            <a:off x="1691640" y="4736592"/>
+            <a:ext cx="1325880" cy="402336"/>
           </a:xfrm>
           <a:prstGeom prst="rect">
             <a:avLst/>
@@ -5050,7 +3718,21 @@
           <a:bodyPr wrap="square" lIns="0" tIns="0" rIns="0" bIns="0" rtlCol="0" anchor="ctr"/>
           <a:lstStyle/>
           <a:p>
-            <a:pPr algn="l" indent="0" marL="0">
+            <a:pPr algn="ctr" indent="0" marL="0">
+              <a:buNone/>
+            </a:pPr>
+            <a:r>
+              <a:rPr lang="en-US" sz="640" dirty="0">
+                <a:solidFill>
+                  <a:srgbClr val="1F3D20"/>
+                </a:solidFill>
+                <a:latin typeface="Meiryo UI" pitchFamily="34" charset="0"/>
+                <a:ea typeface="Meiryo UI" pitchFamily="34" charset="-122"/>
+                <a:cs typeface="Meiryo UI" pitchFamily="34" charset="-120"/>
+              </a:rPr>
+              <a:t>現状 </a:t>
+            </a:r>
+            <a:pPr algn="ctr" indent="0" marL="0">
               <a:buNone/>
             </a:pPr>
             <a:r>
@@ -5062,22 +3744,22 @@
                 <a:ea typeface="Meiryo UI" pitchFamily="34" charset="-122"/>
                 <a:cs typeface="Meiryo UI" pitchFamily="34" charset="-120"/>
               </a:rPr>
-              <a:t>調査手法(三層)</a:t>
-            </a:r>
-            <a:endParaRPr lang="en-US" sz="1050" dirty="0"/>
+              <a:t>115名</a:t>
+            </a:r>
+            <a:endParaRPr lang="en-US" sz="640" dirty="0"/>
           </a:p>
         </p:txBody>
       </p:sp>
       <p:sp>
         <p:nvSpPr>
-          <p:cNvPr id="20" name="Text 17"/>
-          <p:cNvSpPr/>
-          <p:nvPr/>
-        </p:nvSpPr>
-        <p:spPr>
-          <a:xfrm>
-            <a:off x="8979408" y="2267712"/>
-            <a:ext cx="2889504" cy="621792"/>
+          <p:cNvPr id="32" name="Text 29"/>
+          <p:cNvSpPr/>
+          <p:nvPr/>
+        </p:nvSpPr>
+        <p:spPr>
+          <a:xfrm>
+            <a:off x="3099816" y="4736592"/>
+            <a:ext cx="219456" cy="402336"/>
           </a:xfrm>
           <a:prstGeom prst="rect">
             <a:avLst/>
@@ -5086,80 +3768,41 @@
           <a:ln/>
         </p:spPr>
         <p:txBody>
-          <a:bodyPr wrap="square" lIns="0" tIns="0" rIns="0" bIns="0" rtlCol="0" anchor="t"/>
+          <a:bodyPr wrap="square" lIns="0" tIns="0" rIns="0" bIns="0" rtlCol="0" anchor="ctr"/>
           <a:lstStyle/>
           <a:p>
-            <a:pPr indent="0" marL="0">
-              <a:lnSpc>
-                <a:spcPct val="102000"/>
-              </a:lnSpc>
-              <a:buNone/>
-            </a:pPr>
-            <a:r>
-              <a:rPr lang="en-US" sz="720" dirty="0">
-                <a:solidFill>
-                  <a:srgbClr val="2B2B2B"/>
-                </a:solidFill>
-                <a:latin typeface="Meiryo UI" pitchFamily="34" charset="0"/>
-                <a:ea typeface="Meiryo UI" pitchFamily="34" charset="-122"/>
-                <a:cs typeface="Meiryo UI" pitchFamily="34" charset="-120"/>
-              </a:rPr>
-              <a:t>① 稼働・停止データ: デジ戦と共同棚卸し
-</a:t>
-            </a:r>
-            <a:pPr indent="0" marL="0">
-              <a:lnSpc>
-                <a:spcPct val="102000"/>
-              </a:lnSpc>
-              <a:buNone/>
-            </a:pPr>
-            <a:r>
-              <a:rPr lang="en-US" sz="720" dirty="0">
-                <a:solidFill>
-                  <a:srgbClr val="2B2B2B"/>
-                </a:solidFill>
-                <a:latin typeface="Meiryo UI" pitchFamily="34" charset="0"/>
-                <a:ea typeface="Meiryo UI" pitchFamily="34" charset="-122"/>
-                <a:cs typeface="Meiryo UI" pitchFamily="34" charset="-120"/>
-              </a:rPr>
-              <a:t>② 人員動態: ワークサンプリング+調査用簡易カメラ(既設カメラは転用不可)
-</a:t>
-            </a:r>
-            <a:pPr indent="0" marL="0">
-              <a:lnSpc>
-                <a:spcPct val="102000"/>
-              </a:lnSpc>
-              <a:buNone/>
-            </a:pPr>
-            <a:r>
-              <a:rPr lang="en-US" sz="720" dirty="0">
-                <a:solidFill>
-                  <a:srgbClr val="2B2B2B"/>
-                </a:solidFill>
-                <a:latin typeface="Meiryo UI" pitchFamily="34" charset="0"/>
-                <a:ea typeface="Meiryo UI" pitchFamily="34" charset="-122"/>
-                <a:cs typeface="Meiryo UI" pitchFamily="34" charset="-120"/>
-              </a:rPr>
-              <a:t>③ ヒアリング+規定棚卸し(制定経緯まで遡る)</a:t>
-            </a:r>
-            <a:endParaRPr lang="en-US" sz="720" dirty="0"/>
+            <a:pPr algn="ctr" indent="0" marL="0">
+              <a:buNone/>
+            </a:pPr>
+            <a:r>
+              <a:rPr lang="en-US" sz="1000" b="1" dirty="0">
+                <a:solidFill>
+                  <a:srgbClr val="2C5F2D"/>
+                </a:solidFill>
+                <a:latin typeface="Meiryo UI" pitchFamily="34" charset="0"/>
+                <a:ea typeface="Meiryo UI" pitchFamily="34" charset="-122"/>
+                <a:cs typeface="Meiryo UI" pitchFamily="34" charset="-120"/>
+              </a:rPr>
+              <a:t>▶</a:t>
+            </a:r>
+            <a:endParaRPr lang="en-US" sz="1000" dirty="0"/>
           </a:p>
         </p:txBody>
       </p:sp>
       <p:sp>
         <p:nvSpPr>
-          <p:cNvPr id="21" name="Shape 18"/>
-          <p:cNvSpPr/>
-          <p:nvPr/>
-        </p:nvSpPr>
-        <p:spPr>
-          <a:xfrm>
-            <a:off x="8887968" y="3035808"/>
-            <a:ext cx="3072384" cy="969264"/>
+          <p:cNvPr id="33" name="Shape 30"/>
+          <p:cNvSpPr/>
+          <p:nvPr/>
+        </p:nvSpPr>
+        <p:spPr>
+          <a:xfrm>
+            <a:off x="3319272" y="4736592"/>
+            <a:ext cx="1417320" cy="402336"/>
           </a:xfrm>
           <a:prstGeom prst="roundRect">
             <a:avLst>
-              <a:gd name="adj" fmla="val 4717"/>
+              <a:gd name="adj" fmla="val 9091"/>
             </a:avLst>
           </a:prstGeom>
           <a:solidFill>
@@ -5175,14 +3818,14 @@
       </p:sp>
       <p:sp>
         <p:nvSpPr>
-          <p:cNvPr id="22" name="Text 19"/>
-          <p:cNvSpPr/>
-          <p:nvPr/>
-        </p:nvSpPr>
-        <p:spPr>
-          <a:xfrm>
-            <a:off x="8979408" y="3081528"/>
-            <a:ext cx="2889504" cy="219456"/>
+          <p:cNvPr id="34" name="Text 31"/>
+          <p:cNvSpPr/>
+          <p:nvPr/>
+        </p:nvSpPr>
+        <p:spPr>
+          <a:xfrm>
+            <a:off x="3364992" y="4736592"/>
+            <a:ext cx="1325880" cy="402336"/>
           </a:xfrm>
           <a:prstGeom prst="rect">
             <a:avLst/>
@@ -5194,7 +3837,21 @@
           <a:bodyPr wrap="square" lIns="0" tIns="0" rIns="0" bIns="0" rtlCol="0" anchor="ctr"/>
           <a:lstStyle/>
           <a:p>
-            <a:pPr algn="l" indent="0" marL="0">
+            <a:pPr algn="ctr" indent="0" marL="0">
+              <a:buNone/>
+            </a:pPr>
+            <a:r>
+              <a:rPr lang="en-US" sz="640" dirty="0">
+                <a:solidFill>
+                  <a:srgbClr val="1F3D20"/>
+                </a:solidFill>
+                <a:latin typeface="Meiryo UI" pitchFamily="34" charset="0"/>
+                <a:ea typeface="Meiryo UI" pitchFamily="34" charset="-122"/>
+                <a:cs typeface="Meiryo UI" pitchFamily="34" charset="-120"/>
+              </a:rPr>
+              <a:t>STEP①後 </a:t>
+            </a:r>
+            <a:pPr algn="ctr" indent="0" marL="0">
               <a:buNone/>
             </a:pPr>
             <a:r>
@@ -5206,22 +3863,22 @@
                 <a:ea typeface="Meiryo UI" pitchFamily="34" charset="-122"/>
                 <a:cs typeface="Meiryo UI" pitchFamily="34" charset="-120"/>
               </a:rPr>
-              <a:t>植毛▲43名ギャップの充当</a:t>
-            </a:r>
-            <a:endParaRPr lang="en-US" sz="1050" dirty="0"/>
+              <a:t>〜100名</a:t>
+            </a:r>
+            <a:endParaRPr lang="en-US" sz="640" dirty="0"/>
           </a:p>
         </p:txBody>
       </p:sp>
       <p:sp>
         <p:nvSpPr>
-          <p:cNvPr id="23" name="Text 20"/>
-          <p:cNvSpPr/>
-          <p:nvPr/>
-        </p:nvSpPr>
-        <p:spPr>
-          <a:xfrm>
-            <a:off x="8979408" y="3291840"/>
-            <a:ext cx="2889504" cy="658368"/>
+          <p:cNvPr id="35" name="Text 32"/>
+          <p:cNvSpPr/>
+          <p:nvPr/>
+        </p:nvSpPr>
+        <p:spPr>
+          <a:xfrm>
+            <a:off x="4773168" y="4736592"/>
+            <a:ext cx="219456" cy="402336"/>
           </a:xfrm>
           <a:prstGeom prst="rect">
             <a:avLst/>
@@ -5230,35 +3887,14 @@
           <a:ln/>
         </p:spPr>
         <p:txBody>
-          <a:bodyPr wrap="square" lIns="0" tIns="0" rIns="0" bIns="0" rtlCol="0" anchor="t"/>
+          <a:bodyPr wrap="square" lIns="0" tIns="0" rIns="0" bIns="0" rtlCol="0" anchor="ctr"/>
           <a:lstStyle/>
           <a:p>
-            <a:pPr indent="0" marL="0">
-              <a:lnSpc>
-                <a:spcPct val="105000"/>
-              </a:lnSpc>
-              <a:buNone/>
-            </a:pPr>
-            <a:r>
-              <a:rPr lang="en-US" sz="720" dirty="0">
-                <a:solidFill>
-                  <a:srgbClr val="2B2B2B"/>
-                </a:solidFill>
-                <a:latin typeface="Meiryo UI" pitchFamily="34" charset="0"/>
-                <a:ea typeface="Meiryo UI" pitchFamily="34" charset="-122"/>
-                <a:cs typeface="Meiryo UI" pitchFamily="34" charset="-120"/>
-              </a:rPr>
-              <a:t>検査自動化+規格 20〜25名 / B停止削減 8〜10名 / 長毛処理 5〜8名 / 搬送全体最適 8〜10名
-</a:t>
-            </a:r>
-            <a:pPr indent="0" marL="0">
-              <a:lnSpc>
-                <a:spcPct val="105000"/>
-              </a:lnSpc>
-              <a:buNone/>
-            </a:pPr>
-            <a:r>
-              <a:rPr lang="en-US" sz="850" b="1" dirty="0">
+            <a:pPr algn="ctr" indent="0" marL="0">
+              <a:buNone/>
+            </a:pPr>
+            <a:r>
+              <a:rPr lang="en-US" sz="1000" b="1" dirty="0">
                 <a:solidFill>
                   <a:srgbClr val="2C5F2D"/>
                 </a:solidFill>
@@ -5266,26 +3902,264 @@
                 <a:ea typeface="Meiryo UI" pitchFamily="34" charset="-122"/>
                 <a:cs typeface="Meiryo UI" pitchFamily="34" charset="-120"/>
               </a:rPr>
-              <a:t>⇒ 計41〜53名でギャップをカバー</a:t>
-            </a:r>
-            <a:endParaRPr lang="en-US" sz="720" dirty="0"/>
+              <a:t>▶</a:t>
+            </a:r>
+            <a:endParaRPr lang="en-US" sz="1000" dirty="0"/>
           </a:p>
         </p:txBody>
       </p:sp>
       <p:sp>
         <p:nvSpPr>
-          <p:cNvPr id="24" name="Shape 21"/>
-          <p:cNvSpPr/>
-          <p:nvPr/>
-        </p:nvSpPr>
-        <p:spPr>
-          <a:xfrm>
-            <a:off x="8887968" y="4096512"/>
-            <a:ext cx="3072384" cy="1005840"/>
+          <p:cNvPr id="36" name="Shape 33"/>
+          <p:cNvSpPr/>
+          <p:nvPr/>
+        </p:nvSpPr>
+        <p:spPr>
+          <a:xfrm>
+            <a:off x="4992624" y="4736592"/>
+            <a:ext cx="1417320" cy="402336"/>
           </a:xfrm>
           <a:prstGeom prst="roundRect">
             <a:avLst>
-              <a:gd name="adj" fmla="val 4545"/>
+              <a:gd name="adj" fmla="val 9091"/>
+            </a:avLst>
+          </a:prstGeom>
+          <a:solidFill>
+            <a:srgbClr val="F3F8F1"/>
+          </a:solidFill>
+          <a:ln w="9525">
+            <a:solidFill>
+              <a:srgbClr val="C9DCC4"/>
+            </a:solidFill>
+            <a:prstDash val="solid"/>
+          </a:ln>
+        </p:spPr>
+      </p:sp>
+      <p:sp>
+        <p:nvSpPr>
+          <p:cNvPr id="37" name="Text 34"/>
+          <p:cNvSpPr/>
+          <p:nvPr/>
+        </p:nvSpPr>
+        <p:spPr>
+          <a:xfrm>
+            <a:off x="5038344" y="4736592"/>
+            <a:ext cx="1325880" cy="402336"/>
+          </a:xfrm>
+          <a:prstGeom prst="rect">
+            <a:avLst/>
+          </a:prstGeom>
+          <a:noFill/>
+          <a:ln/>
+        </p:spPr>
+        <p:txBody>
+          <a:bodyPr wrap="square" lIns="0" tIns="0" rIns="0" bIns="0" rtlCol="0" anchor="ctr"/>
+          <a:lstStyle/>
+          <a:p>
+            <a:pPr algn="ctr" indent="0" marL="0">
+              <a:buNone/>
+            </a:pPr>
+            <a:r>
+              <a:rPr lang="en-US" sz="640" dirty="0">
+                <a:solidFill>
+                  <a:srgbClr val="1F3D20"/>
+                </a:solidFill>
+                <a:latin typeface="Meiryo UI" pitchFamily="34" charset="0"/>
+                <a:ea typeface="Meiryo UI" pitchFamily="34" charset="-122"/>
+                <a:cs typeface="Meiryo UI" pitchFamily="34" charset="-120"/>
+              </a:rPr>
+              <a:t>STEP②後 </a:t>
+            </a:r>
+            <a:pPr algn="ctr" indent="0" marL="0">
+              <a:buNone/>
+            </a:pPr>
+            <a:r>
+              <a:rPr lang="en-US" sz="1050" b="1" dirty="0">
+                <a:solidFill>
+                  <a:srgbClr val="1F3D20"/>
+                </a:solidFill>
+                <a:latin typeface="Meiryo UI" pitchFamily="34" charset="0"/>
+                <a:ea typeface="Meiryo UI" pitchFamily="34" charset="-122"/>
+                <a:cs typeface="Meiryo UI" pitchFamily="34" charset="-120"/>
+              </a:rPr>
+              <a:t>〜90名</a:t>
+            </a:r>
+            <a:endParaRPr lang="en-US" sz="640" dirty="0"/>
+          </a:p>
+        </p:txBody>
+      </p:sp>
+      <p:sp>
+        <p:nvSpPr>
+          <p:cNvPr id="38" name="Text 35"/>
+          <p:cNvSpPr/>
+          <p:nvPr/>
+        </p:nvSpPr>
+        <p:spPr>
+          <a:xfrm>
+            <a:off x="6446520" y="4736592"/>
+            <a:ext cx="219456" cy="402336"/>
+          </a:xfrm>
+          <a:prstGeom prst="rect">
+            <a:avLst/>
+          </a:prstGeom>
+          <a:noFill/>
+          <a:ln/>
+        </p:spPr>
+        <p:txBody>
+          <a:bodyPr wrap="square" lIns="0" tIns="0" rIns="0" bIns="0" rtlCol="0" anchor="ctr"/>
+          <a:lstStyle/>
+          <a:p>
+            <a:pPr algn="ctr" indent="0" marL="0">
+              <a:buNone/>
+            </a:pPr>
+            <a:r>
+              <a:rPr lang="en-US" sz="1000" b="1" dirty="0">
+                <a:solidFill>
+                  <a:srgbClr val="2C5F2D"/>
+                </a:solidFill>
+                <a:latin typeface="Meiryo UI" pitchFamily="34" charset="0"/>
+                <a:ea typeface="Meiryo UI" pitchFamily="34" charset="-122"/>
+                <a:cs typeface="Meiryo UI" pitchFamily="34" charset="-120"/>
+              </a:rPr>
+              <a:t>▶</a:t>
+            </a:r>
+            <a:endParaRPr lang="en-US" sz="1000" dirty="0"/>
+          </a:p>
+        </p:txBody>
+      </p:sp>
+      <p:sp>
+        <p:nvSpPr>
+          <p:cNvPr id="39" name="Shape 36"/>
+          <p:cNvSpPr/>
+          <p:nvPr/>
+        </p:nvSpPr>
+        <p:spPr>
+          <a:xfrm>
+            <a:off x="6665976" y="4736592"/>
+            <a:ext cx="2057400" cy="402336"/>
+          </a:xfrm>
+          <a:prstGeom prst="roundRect">
+            <a:avLst>
+              <a:gd name="adj" fmla="val 9091"/>
+            </a:avLst>
+          </a:prstGeom>
+          <a:solidFill>
+            <a:srgbClr val="2C5F2D"/>
+          </a:solidFill>
+          <a:ln w="9525">
+            <a:solidFill>
+              <a:srgbClr val="2C5F2D"/>
+            </a:solidFill>
+            <a:prstDash val="solid"/>
+          </a:ln>
+        </p:spPr>
+      </p:sp>
+      <p:sp>
+        <p:nvSpPr>
+          <p:cNvPr id="40" name="Text 37"/>
+          <p:cNvSpPr/>
+          <p:nvPr/>
+        </p:nvSpPr>
+        <p:spPr>
+          <a:xfrm>
+            <a:off x="6711696" y="4736592"/>
+            <a:ext cx="1965960" cy="402336"/>
+          </a:xfrm>
+          <a:prstGeom prst="rect">
+            <a:avLst/>
+          </a:prstGeom>
+          <a:noFill/>
+          <a:ln/>
+        </p:spPr>
+        <p:txBody>
+          <a:bodyPr wrap="square" lIns="0" tIns="0" rIns="0" bIns="0" rtlCol="0" anchor="ctr"/>
+          <a:lstStyle/>
+          <a:p>
+            <a:pPr algn="ctr" indent="0" marL="0">
+              <a:buNone/>
+            </a:pPr>
+            <a:r>
+              <a:rPr lang="en-US" sz="640" dirty="0">
+                <a:solidFill>
+                  <a:srgbClr val="FFFFFF"/>
+                </a:solidFill>
+                <a:latin typeface="Meiryo UI" pitchFamily="34" charset="0"/>
+                <a:ea typeface="Meiryo UI" pitchFamily="34" charset="-122"/>
+                <a:cs typeface="Meiryo UI" pitchFamily="34" charset="-120"/>
+              </a:rPr>
+              <a:t>STEP③後 </a:t>
+            </a:r>
+            <a:pPr algn="ctr" indent="0" marL="0">
+              <a:buNone/>
+            </a:pPr>
+            <a:r>
+              <a:rPr lang="en-US" sz="1050" b="1" dirty="0">
+                <a:solidFill>
+                  <a:srgbClr val="FFFFFF"/>
+                </a:solidFill>
+                <a:latin typeface="Meiryo UI" pitchFamily="34" charset="0"/>
+                <a:ea typeface="Meiryo UI" pitchFamily="34" charset="-122"/>
+                <a:cs typeface="Meiryo UI" pitchFamily="34" charset="-120"/>
+              </a:rPr>
+              <a:t>57〜65名(半減)</a:t>
+            </a:r>
+            <a:endParaRPr lang="en-US" sz="640" dirty="0"/>
+          </a:p>
+        </p:txBody>
+      </p:sp>
+      <p:sp>
+        <p:nvSpPr>
+          <p:cNvPr id="41" name="Text 38"/>
+          <p:cNvSpPr/>
+          <p:nvPr/>
+        </p:nvSpPr>
+        <p:spPr>
+          <a:xfrm>
+            <a:off x="228600" y="5212080"/>
+            <a:ext cx="8503920" cy="201168"/>
+          </a:xfrm>
+          <a:prstGeom prst="rect">
+            <a:avLst/>
+          </a:prstGeom>
+          <a:noFill/>
+          <a:ln/>
+        </p:spPr>
+        <p:txBody>
+          <a:bodyPr wrap="square" lIns="0" tIns="0" rIns="0" bIns="0" rtlCol="0" anchor="ctr"/>
+          <a:lstStyle/>
+          <a:p>
+            <a:pPr indent="0" marL="0">
+              <a:buNone/>
+            </a:pPr>
+            <a:r>
+              <a:rPr lang="en-US" sz="730" b="1" dirty="0">
+                <a:solidFill>
+                  <a:srgbClr val="B85042"/>
+                </a:solidFill>
+                <a:latin typeface="Meiryo UI" pitchFamily="34" charset="0"/>
+                <a:ea typeface="Meiryo UI" pitchFamily="34" charset="-122"/>
+                <a:cs typeface="Meiryo UI" pitchFamily="34" charset="-120"/>
+              </a:rPr>
+              <a:t>順序の経済価値: STEP①②の先行で③の対象作業が2〜3割減 → 植毛向けフィジカルAI 9〜15機→7〜10機に圧縮 ＝ 投資▲1〜2億円</a:t>
+            </a:r>
+            <a:endParaRPr lang="en-US" sz="730" dirty="0"/>
+          </a:p>
+        </p:txBody>
+      </p:sp>
+      <p:sp>
+        <p:nvSpPr>
+          <p:cNvPr id="42" name="Shape 39"/>
+          <p:cNvSpPr/>
+          <p:nvPr/>
+        </p:nvSpPr>
+        <p:spPr>
+          <a:xfrm>
+            <a:off x="8887968" y="2761488"/>
+            <a:ext cx="3072384" cy="969264"/>
+          </a:xfrm>
+          <a:prstGeom prst="roundRect">
+            <a:avLst>
+              <a:gd name="adj" fmla="val 4717"/>
             </a:avLst>
           </a:prstGeom>
           <a:solidFill>
@@ -5301,14 +4175,14 @@
       </p:sp>
       <p:sp>
         <p:nvSpPr>
-          <p:cNvPr id="25" name="Text 22"/>
-          <p:cNvSpPr/>
-          <p:nvPr/>
-        </p:nvSpPr>
-        <p:spPr>
-          <a:xfrm>
-            <a:off x="8979408" y="4142232"/>
-            <a:ext cx="2889504" cy="219456"/>
+          <p:cNvPr id="43" name="Text 40"/>
+          <p:cNvSpPr/>
+          <p:nvPr/>
+        </p:nvSpPr>
+        <p:spPr>
+          <a:xfrm>
+            <a:off x="8979408" y="2798064"/>
+            <a:ext cx="2889504" cy="201168"/>
           </a:xfrm>
           <a:prstGeom prst="rect">
             <a:avLst/>
@@ -5320,11 +4194,11 @@
           <a:bodyPr wrap="square" lIns="0" tIns="0" rIns="0" bIns="0" rtlCol="0" anchor="ctr"/>
           <a:lstStyle/>
           <a:p>
-            <a:pPr algn="l" indent="0" marL="0">
-              <a:buNone/>
-            </a:pPr>
-            <a:r>
-              <a:rPr lang="en-US" sz="1050" b="1" dirty="0">
+            <a:pPr indent="0" marL="0">
+              <a:buNone/>
+            </a:pPr>
+            <a:r>
+              <a:rPr lang="en-US" sz="1000" b="1" dirty="0">
                 <a:solidFill>
                   <a:srgbClr val="B85042"/>
                 </a:solidFill>
@@ -5332,22 +4206,22 @@
                 <a:ea typeface="Meiryo UI" pitchFamily="34" charset="-122"/>
                 <a:cs typeface="Meiryo UI" pitchFamily="34" charset="-120"/>
               </a:rPr>
-              <a:t>投資対効果(いくら)</a:t>
-            </a:r>
-            <a:endParaRPr lang="en-US" sz="1050" dirty="0"/>
+              <a:t>経営論点: 基準への踏み込み度</a:t>
+            </a:r>
+            <a:endParaRPr lang="en-US" sz="1000" dirty="0"/>
           </a:p>
         </p:txBody>
       </p:sp>
       <p:sp>
         <p:nvSpPr>
-          <p:cNvPr id="26" name="Text 23"/>
-          <p:cNvSpPr/>
-          <p:nvPr/>
-        </p:nvSpPr>
-        <p:spPr>
-          <a:xfrm>
-            <a:off x="8979408" y="4352544"/>
-            <a:ext cx="2889504" cy="694944"/>
+          <p:cNvPr id="44" name="Text 41"/>
+          <p:cNvSpPr/>
+          <p:nvPr/>
+        </p:nvSpPr>
+        <p:spPr>
+          <a:xfrm>
+            <a:off x="8979408" y="2999232"/>
+            <a:ext cx="2889504" cy="676656"/>
           </a:xfrm>
           <a:prstGeom prst="rect">
             <a:avLst/>
@@ -5361,30 +4235,30 @@
           <a:p>
             <a:pPr indent="0" marL="0">
               <a:lnSpc>
-                <a:spcPct val="105000"/>
+                <a:spcPct val="100000"/>
               </a:lnSpc>
               <a:buNone/>
             </a:pPr>
             <a:r>
-              <a:rPr lang="en-US" sz="1200" b="1" dirty="0">
-                <a:solidFill>
-                  <a:srgbClr val="B85042"/>
-                </a:solidFill>
-                <a:latin typeface="Meiryo UI" pitchFamily="34" charset="0"/>
-                <a:ea typeface="Meiryo UI" pitchFamily="34" charset="-122"/>
-                <a:cs typeface="Meiryo UI" pitchFamily="34" charset="-120"/>
-              </a:rPr>
-              <a:t>リターン 年3.0〜3.5億円
+              <a:rPr lang="en-US" sz="680" dirty="0">
+                <a:solidFill>
+                  <a:srgbClr val="2B2B2B"/>
+                </a:solidFill>
+                <a:latin typeface="Meiryo UI" pitchFamily="34" charset="0"/>
+                <a:ea typeface="Meiryo UI" pitchFamily="34" charset="-122"/>
+                <a:cs typeface="Meiryo UI" pitchFamily="34" charset="-120"/>
+              </a:rPr>
+              <a:t>配慮スコープ(工程内基準のみ): 植毛70名台止まり=半減未達
 </a:t>
             </a:r>
             <a:pPr indent="0" marL="0">
               <a:lnSpc>
-                <a:spcPct val="105000"/>
+                <a:spcPct val="100000"/>
               </a:lnSpc>
               <a:buNone/>
             </a:pPr>
             <a:r>
-              <a:rPr lang="en-US" sz="700" dirty="0">
+              <a:rPr lang="en-US" sz="680" b="1" dirty="0">
                 <a:solidFill>
                   <a:srgbClr val="2B2B2B"/>
                 </a:solidFill>
@@ -5392,17 +4266,17 @@
                 <a:ea typeface="Meiryo UI" pitchFamily="34" charset="-122"/>
                 <a:cs typeface="Meiryo UI" pitchFamily="34" charset="-120"/>
               </a:rPr>
-              <a:t>(省人化53名=2.7億+規定見直し0.3〜0.6億)
+              <a:t>踏み込みスコープ(検査方式・規格公差=市場品質関与): 半減の必要条件
 </a:t>
             </a:r>
             <a:pPr indent="0" marL="0">
               <a:lnSpc>
-                <a:spcPct val="105000"/>
+                <a:spcPct val="100000"/>
               </a:lnSpc>
               <a:buNone/>
             </a:pPr>
             <a:r>
-              <a:rPr lang="en-US" sz="720" dirty="0">
+              <a:rPr lang="en-US" sz="680" dirty="0">
                 <a:solidFill>
                   <a:srgbClr val="2B2B2B"/>
                 </a:solidFill>
@@ -5410,65 +4284,26 @@
                 <a:ea typeface="Meiryo UI" pitchFamily="34" charset="-122"/>
                 <a:cs typeface="Meiryo UI" pitchFamily="34" charset="-120"/>
               </a:rPr>
-              <a:t>投資 約2.5〜3億円 → 実装後1年強で回収・KGI+20%に直結</a:t>
-            </a:r>
-            <a:endParaRPr lang="en-US" sz="1200" dirty="0"/>
+              <a:t>⇒ 26/10役員協議へ上程(品質ポリシー)。「品質を下げる」でなく「保証方法の現代化」として設計</a:t>
+            </a:r>
+            <a:endParaRPr lang="en-US" sz="680" dirty="0"/>
           </a:p>
         </p:txBody>
       </p:sp>
       <p:sp>
         <p:nvSpPr>
-          <p:cNvPr id="27" name="Text 24"/>
-          <p:cNvSpPr/>
-          <p:nvPr/>
-        </p:nvSpPr>
-        <p:spPr>
-          <a:xfrm>
-            <a:off x="228600" y="5010912"/>
-            <a:ext cx="4572000" cy="201168"/>
-          </a:xfrm>
-          <a:prstGeom prst="rect">
-            <a:avLst/>
-          </a:prstGeom>
-          <a:noFill/>
-          <a:ln/>
-        </p:spPr>
-        <p:txBody>
-          <a:bodyPr wrap="square" lIns="0" tIns="0" rIns="0" bIns="0" rtlCol="0" anchor="ctr"/>
-          <a:lstStyle/>
-          <a:p>
-            <a:pPr indent="0" marL="0">
-              <a:buNone/>
-            </a:pPr>
-            <a:r>
-              <a:rPr lang="en-US" sz="950" b="1" dirty="0">
-                <a:solidFill>
-                  <a:srgbClr val="1F3D20"/>
-                </a:solidFill>
-                <a:latin typeface="Meiryo UI" pitchFamily="34" charset="0"/>
-                <a:ea typeface="Meiryo UI" pitchFamily="34" charset="-122"/>
-                <a:cs typeface="Meiryo UI" pitchFamily="34" charset="-120"/>
-              </a:rPr>
-              <a:t>推進スケジュール</a:t>
-            </a:r>
-            <a:endParaRPr lang="en-US" sz="950" dirty="0"/>
-          </a:p>
-        </p:txBody>
-      </p:sp>
-      <p:sp>
-        <p:nvSpPr>
-          <p:cNvPr id="28" name="Shape 25"/>
-          <p:cNvSpPr/>
-          <p:nvPr/>
-        </p:nvSpPr>
-        <p:spPr>
-          <a:xfrm>
-            <a:off x="228600" y="5230368"/>
-            <a:ext cx="1879092" cy="969264"/>
+          <p:cNvPr id="45" name="Shape 42"/>
+          <p:cNvSpPr/>
+          <p:nvPr/>
+        </p:nvSpPr>
+        <p:spPr>
+          <a:xfrm>
+            <a:off x="8887968" y="3803904"/>
+            <a:ext cx="3072384" cy="877824"/>
           </a:xfrm>
           <a:prstGeom prst="roundRect">
             <a:avLst>
-              <a:gd name="adj" fmla="val 3774"/>
+              <a:gd name="adj" fmla="val 5208"/>
             </a:avLst>
           </a:prstGeom>
           <a:solidFill>
@@ -5484,14 +4319,14 @@
       </p:sp>
       <p:sp>
         <p:nvSpPr>
-          <p:cNvPr id="29" name="Text 26"/>
-          <p:cNvSpPr/>
-          <p:nvPr/>
-        </p:nvSpPr>
-        <p:spPr>
-          <a:xfrm>
-            <a:off x="301752" y="5266944"/>
-            <a:ext cx="1732788" cy="182880"/>
+          <p:cNvPr id="46" name="Text 43"/>
+          <p:cNvSpPr/>
+          <p:nvPr/>
+        </p:nvSpPr>
+        <p:spPr>
+          <a:xfrm>
+            <a:off x="8979408" y="3840480"/>
+            <a:ext cx="2889504" cy="201168"/>
           </a:xfrm>
           <a:prstGeom prst="rect">
             <a:avLst/>
@@ -5507,7 +4342,7 @@
               <a:buNone/>
             </a:pPr>
             <a:r>
-              <a:rPr lang="en-US" sz="900" b="1" dirty="0">
+              <a:rPr lang="en-US" sz="1000" b="1" dirty="0">
                 <a:solidFill>
                   <a:srgbClr val="1F3D20"/>
                 </a:solidFill>
@@ -5515,22 +4350,22 @@
                 <a:ea typeface="Meiryo UI" pitchFamily="34" charset="-122"/>
                 <a:cs typeface="Meiryo UI" pitchFamily="34" charset="-120"/>
               </a:rPr>
-              <a:t>8月</a:t>
-            </a:r>
-            <a:endParaRPr lang="en-US" sz="900" dirty="0"/>
+              <a:t>調査の中核成果物</a:t>
+            </a:r>
+            <a:endParaRPr lang="en-US" sz="1000" dirty="0"/>
           </a:p>
         </p:txBody>
       </p:sp>
       <p:sp>
         <p:nvSpPr>
-          <p:cNvPr id="30" name="Text 27"/>
-          <p:cNvSpPr/>
-          <p:nvPr/>
-        </p:nvSpPr>
-        <p:spPr>
-          <a:xfrm>
-            <a:off x="301752" y="5468112"/>
-            <a:ext cx="1732788" cy="676656"/>
+          <p:cNvPr id="47" name="Text 44"/>
+          <p:cNvSpPr/>
+          <p:nvPr/>
+        </p:nvSpPr>
+        <p:spPr>
+          <a:xfrm>
+            <a:off x="8979408" y="4041648"/>
+            <a:ext cx="2889504" cy="585216"/>
           </a:xfrm>
           <a:prstGeom prst="rect">
             <a:avLst/>
@@ -5544,11 +4379,29 @@
           <a:p>
             <a:pPr indent="0" marL="0">
               <a:lnSpc>
-                <a:spcPct val="102000"/>
+                <a:spcPct val="100000"/>
               </a:lnSpc>
               <a:buNone/>
             </a:pPr>
             <a:r>
+              <a:rPr lang="en-US" sz="800" b="1" dirty="0">
+                <a:solidFill>
+                  <a:srgbClr val="2B2B2B"/>
+                </a:solidFill>
+                <a:latin typeface="Meiryo UI" pitchFamily="34" charset="0"/>
+                <a:ea typeface="Meiryo UI" pitchFamily="34" charset="-122"/>
+                <a:cs typeface="Meiryo UI" pitchFamily="34" charset="-120"/>
+              </a:rPr>
+              <a:t>作業-規定トレーサビリティ台帳
+</a:t>
+            </a:r>
+            <a:pPr indent="0" marL="0">
+              <a:lnSpc>
+                <a:spcPct val="100000"/>
+              </a:lnSpc>
+              <a:buNone/>
+            </a:pPr>
+            <a:r>
               <a:rPr lang="en-US" sz="680" dirty="0">
                 <a:solidFill>
                   <a:srgbClr val="2B2B2B"/>
@@ -5557,7 +4410,7 @@
                 <a:ea typeface="Meiryo UI" pitchFamily="34" charset="-122"/>
                 <a:cs typeface="Meiryo UI" pitchFamily="34" charset="-120"/>
               </a:rPr>
-              <a:t>WG組成(中林氏・菊池氏)/デジ戦定例で合意・データ棚卸し着手</a:t>
+              <a:t>全作業(ワークサンプリング+簡易カメラ)×要求元規定×A〜E分類×品質実績整合×改定方針×改定後の実行手段。人事PJT「課題18件一覧」の生産版。調査=この台帳を完成させる活動</a:t>
             </a:r>
             <a:endParaRPr lang="en-US" sz="680" dirty="0"/>
           </a:p>
@@ -5565,18 +4418,144 @@
       </p:sp>
       <p:sp>
         <p:nvSpPr>
-          <p:cNvPr id="31" name="Shape 28"/>
-          <p:cNvSpPr/>
-          <p:nvPr/>
-        </p:nvSpPr>
-        <p:spPr>
-          <a:xfrm>
-            <a:off x="2180844" y="5230368"/>
-            <a:ext cx="1879092" cy="969264"/>
+          <p:cNvPr id="48" name="Shape 45"/>
+          <p:cNvSpPr/>
+          <p:nvPr/>
+        </p:nvSpPr>
+        <p:spPr>
+          <a:xfrm>
+            <a:off x="8887968" y="4754880"/>
+            <a:ext cx="3072384" cy="841248"/>
           </a:xfrm>
           <a:prstGeom prst="roundRect">
             <a:avLst>
-              <a:gd name="adj" fmla="val 3774"/>
+              <a:gd name="adj" fmla="val 5435"/>
+            </a:avLst>
+          </a:prstGeom>
+          <a:solidFill>
+            <a:srgbClr val="FBEDEA"/>
+          </a:solidFill>
+          <a:ln w="9525">
+            <a:solidFill>
+              <a:srgbClr val="B85042"/>
+            </a:solidFill>
+            <a:prstDash val="solid"/>
+          </a:ln>
+        </p:spPr>
+      </p:sp>
+      <p:sp>
+        <p:nvSpPr>
+          <p:cNvPr id="49" name="Text 46"/>
+          <p:cNvSpPr/>
+          <p:nvPr/>
+        </p:nvSpPr>
+        <p:spPr>
+          <a:xfrm>
+            <a:off x="8979408" y="4791456"/>
+            <a:ext cx="2889504" cy="201168"/>
+          </a:xfrm>
+          <a:prstGeom prst="rect">
+            <a:avLst/>
+          </a:prstGeom>
+          <a:noFill/>
+          <a:ln/>
+        </p:spPr>
+        <p:txBody>
+          <a:bodyPr wrap="square" lIns="0" tIns="0" rIns="0" bIns="0" rtlCol="0" anchor="ctr"/>
+          <a:lstStyle/>
+          <a:p>
+            <a:pPr indent="0" marL="0">
+              <a:buNone/>
+            </a:pPr>
+            <a:r>
+              <a:rPr lang="en-US" sz="1000" b="1" dirty="0">
+                <a:solidFill>
+                  <a:srgbClr val="B85042"/>
+                </a:solidFill>
+                <a:latin typeface="Meiryo UI" pitchFamily="34" charset="0"/>
+                <a:ea typeface="Meiryo UI" pitchFamily="34" charset="-122"/>
+                <a:cs typeface="Meiryo UI" pitchFamily="34" charset="-120"/>
+              </a:rPr>
+              <a:t>投資対効果(いくら)</a:t>
+            </a:r>
+            <a:endParaRPr lang="en-US" sz="1000" dirty="0"/>
+          </a:p>
+        </p:txBody>
+      </p:sp>
+      <p:sp>
+        <p:nvSpPr>
+          <p:cNvPr id="50" name="Text 47"/>
+          <p:cNvSpPr/>
+          <p:nvPr/>
+        </p:nvSpPr>
+        <p:spPr>
+          <a:xfrm>
+            <a:off x="8979408" y="4992624"/>
+            <a:ext cx="2889504" cy="548640"/>
+          </a:xfrm>
+          <a:prstGeom prst="rect">
+            <a:avLst/>
+          </a:prstGeom>
+          <a:noFill/>
+          <a:ln/>
+        </p:spPr>
+        <p:txBody>
+          <a:bodyPr wrap="square" lIns="0" tIns="0" rIns="0" bIns="0" rtlCol="0" anchor="t"/>
+          <a:lstStyle/>
+          <a:p>
+            <a:pPr indent="0" marL="0">
+              <a:lnSpc>
+                <a:spcPct val="100000"/>
+              </a:lnSpc>
+              <a:buNone/>
+            </a:pPr>
+            <a:r>
+              <a:rPr lang="en-US" sz="1050" b="1" dirty="0">
+                <a:solidFill>
+                  <a:srgbClr val="B85042"/>
+                </a:solidFill>
+                <a:latin typeface="Meiryo UI" pitchFamily="34" charset="0"/>
+                <a:ea typeface="Meiryo UI" pitchFamily="34" charset="-122"/>
+                <a:cs typeface="Meiryo UI" pitchFamily="34" charset="-120"/>
+              </a:rPr>
+              <a:t>年3.0〜3.5億円 + 投資圧縮1〜2億円
+</a:t>
+            </a:r>
+            <a:pPr indent="0" marL="0">
+              <a:lnSpc>
+                <a:spcPct val="100000"/>
+              </a:lnSpc>
+              <a:buNone/>
+            </a:pPr>
+            <a:r>
+              <a:rPr lang="en-US" sz="680" dirty="0">
+                <a:solidFill>
+                  <a:srgbClr val="2B2B2B"/>
+                </a:solidFill>
+                <a:latin typeface="Meiryo UI" pitchFamily="34" charset="0"/>
+                <a:ea typeface="Meiryo UI" pitchFamily="34" charset="-122"/>
+                <a:cs typeface="Meiryo UI" pitchFamily="34" charset="-120"/>
+              </a:rPr>
+              <a:t>基準・プロセス 年1.0〜1.5億(投資ほぼゼロ・27年〜)+自動化 年1.7〜2.2億(投資2.5〜3億)。踏み込み見送り時は効果6割前後に減衰</a:t>
+            </a:r>
+            <a:endParaRPr lang="en-US" sz="1050" dirty="0"/>
+          </a:p>
+        </p:txBody>
+      </p:sp>
+      <p:sp>
+        <p:nvSpPr>
+          <p:cNvPr id="51" name="Shape 48"/>
+          <p:cNvSpPr/>
+          <p:nvPr/>
+        </p:nvSpPr>
+        <p:spPr>
+          <a:xfrm>
+            <a:off x="228600" y="5687568"/>
+            <a:ext cx="1879092" cy="786384"/>
+          </a:xfrm>
+          <a:prstGeom prst="roundRect">
+            <a:avLst>
+              <a:gd name="adj" fmla="val 4651"/>
             </a:avLst>
           </a:prstGeom>
           <a:solidFill>
@@ -5592,14 +4571,14 @@
       </p:sp>
       <p:sp>
         <p:nvSpPr>
-          <p:cNvPr id="32" name="Text 29"/>
-          <p:cNvSpPr/>
-          <p:nvPr/>
-        </p:nvSpPr>
-        <p:spPr>
-          <a:xfrm>
-            <a:off x="2253996" y="5266944"/>
-            <a:ext cx="1732788" cy="182880"/>
+          <p:cNvPr id="52" name="Text 49"/>
+          <p:cNvSpPr/>
+          <p:nvPr/>
+        </p:nvSpPr>
+        <p:spPr>
+          <a:xfrm>
+            <a:off x="301752" y="5715000"/>
+            <a:ext cx="1732788" cy="164592"/>
           </a:xfrm>
           <a:prstGeom prst="rect">
             <a:avLst/>
@@ -5615,7 +4594,7 @@
               <a:buNone/>
             </a:pPr>
             <a:r>
-              <a:rPr lang="en-US" sz="900" b="1" dirty="0">
+              <a:rPr lang="en-US" sz="850" b="1" dirty="0">
                 <a:solidFill>
                   <a:srgbClr val="1F3D20"/>
                 </a:solidFill>
@@ -5623,22 +4602,22 @@
                 <a:ea typeface="Meiryo UI" pitchFamily="34" charset="-122"/>
                 <a:cs typeface="Meiryo UI" pitchFamily="34" charset="-120"/>
               </a:rPr>
-              <a:t>9月</a:t>
-            </a:r>
-            <a:endParaRPr lang="en-US" sz="900" dirty="0"/>
+              <a:t>26/8</a:t>
+            </a:r>
+            <a:endParaRPr lang="en-US" sz="850" dirty="0"/>
           </a:p>
         </p:txBody>
       </p:sp>
       <p:sp>
         <p:nvSpPr>
-          <p:cNvPr id="33" name="Text 30"/>
-          <p:cNvSpPr/>
-          <p:nvPr/>
-        </p:nvSpPr>
-        <p:spPr>
-          <a:xfrm>
-            <a:off x="2253996" y="5468112"/>
-            <a:ext cx="1732788" cy="676656"/>
+          <p:cNvPr id="53" name="Text 50"/>
+          <p:cNvSpPr/>
+          <p:nvPr/>
+        </p:nvSpPr>
+        <p:spPr>
+          <a:xfrm>
+            <a:off x="301752" y="5888736"/>
+            <a:ext cx="1732788" cy="539496"/>
           </a:xfrm>
           <a:prstGeom prst="rect">
             <a:avLst/>
@@ -5652,12 +4631,12 @@
           <a:p>
             <a:pPr indent="0" marL="0">
               <a:lnSpc>
-                <a:spcPct val="102000"/>
+                <a:spcPct val="100000"/>
               </a:lnSpc>
               <a:buNone/>
             </a:pPr>
             <a:r>
-              <a:rPr lang="en-US" sz="680" dirty="0">
+              <a:rPr lang="en-US" sz="650" dirty="0">
                 <a:solidFill>
                   <a:srgbClr val="2B2B2B"/>
                 </a:solidFill>
@@ -5665,26 +4644,26 @@
                 <a:ea typeface="Meiryo UI" pitchFamily="34" charset="-122"/>
                 <a:cs typeface="Meiryo UI" pitchFamily="34" charset="-120"/>
               </a:rPr>
-              <a:t>稼働・B停止ベースライン確定/ワークサンプリング開始</a:t>
-            </a:r>
-            <a:endParaRPr lang="en-US" sz="680" dirty="0"/>
+              <a:t>3チーム組成(オーナー: 内藤本部長/PMO: 生技セ戦略統括T)・調査設計</a:t>
+            </a:r>
+            <a:endParaRPr lang="en-US" sz="650" dirty="0"/>
           </a:p>
         </p:txBody>
       </p:sp>
       <p:sp>
         <p:nvSpPr>
-          <p:cNvPr id="34" name="Shape 31"/>
-          <p:cNvSpPr/>
-          <p:nvPr/>
-        </p:nvSpPr>
-        <p:spPr>
-          <a:xfrm>
-            <a:off x="4133088" y="5230368"/>
-            <a:ext cx="1879092" cy="969264"/>
+          <p:cNvPr id="54" name="Shape 51"/>
+          <p:cNvSpPr/>
+          <p:nvPr/>
+        </p:nvSpPr>
+        <p:spPr>
+          <a:xfrm>
+            <a:off x="2180844" y="5687568"/>
+            <a:ext cx="1879092" cy="786384"/>
           </a:xfrm>
           <a:prstGeom prst="roundRect">
             <a:avLst>
-              <a:gd name="adj" fmla="val 3774"/>
+              <a:gd name="adj" fmla="val 4651"/>
             </a:avLst>
           </a:prstGeom>
           <a:solidFill>
@@ -5700,14 +4679,14 @@
       </p:sp>
       <p:sp>
         <p:nvSpPr>
-          <p:cNvPr id="35" name="Text 32"/>
-          <p:cNvSpPr/>
-          <p:nvPr/>
-        </p:nvSpPr>
-        <p:spPr>
-          <a:xfrm>
-            <a:off x="4206240" y="5266944"/>
-            <a:ext cx="1732788" cy="182880"/>
+          <p:cNvPr id="55" name="Text 52"/>
+          <p:cNvSpPr/>
+          <p:nvPr/>
+        </p:nvSpPr>
+        <p:spPr>
+          <a:xfrm>
+            <a:off x="2253996" y="5715000"/>
+            <a:ext cx="1732788" cy="164592"/>
           </a:xfrm>
           <a:prstGeom prst="rect">
             <a:avLst/>
@@ -5723,7 +4702,7 @@
               <a:buNone/>
             </a:pPr>
             <a:r>
-              <a:rPr lang="en-US" sz="900" b="1" dirty="0">
+              <a:rPr lang="en-US" sz="850" b="1" dirty="0">
                 <a:solidFill>
                   <a:srgbClr val="1F3D20"/>
                 </a:solidFill>
@@ -5731,22 +4710,22 @@
                 <a:ea typeface="Meiryo UI" pitchFamily="34" charset="-122"/>
                 <a:cs typeface="Meiryo UI" pitchFamily="34" charset="-120"/>
               </a:rPr>
-              <a:t>10月</a:t>
-            </a:r>
-            <a:endParaRPr lang="en-US" sz="900" dirty="0"/>
+              <a:t>26/10</a:t>
+            </a:r>
+            <a:endParaRPr lang="en-US" sz="850" dirty="0"/>
           </a:p>
         </p:txBody>
       </p:sp>
       <p:sp>
         <p:nvSpPr>
-          <p:cNvPr id="36" name="Text 33"/>
-          <p:cNvSpPr/>
-          <p:nvPr/>
-        </p:nvSpPr>
-        <p:spPr>
-          <a:xfrm>
-            <a:off x="4206240" y="5468112"/>
-            <a:ext cx="1732788" cy="676656"/>
+          <p:cNvPr id="56" name="Text 53"/>
+          <p:cNvSpPr/>
+          <p:nvPr/>
+        </p:nvSpPr>
+        <p:spPr>
+          <a:xfrm>
+            <a:off x="2253996" y="5888736"/>
+            <a:ext cx="1732788" cy="539496"/>
           </a:xfrm>
           <a:prstGeom prst="rect">
             <a:avLst/>
@@ -5760,12 +4739,12 @@
           <a:p>
             <a:pPr indent="0" marL="0">
               <a:lnSpc>
-                <a:spcPct val="102000"/>
+                <a:spcPct val="100000"/>
               </a:lnSpc>
               <a:buNone/>
             </a:pPr>
             <a:r>
-              <a:rPr lang="en-US" sz="680" dirty="0">
+              <a:rPr lang="en-US" sz="650" dirty="0">
                 <a:solidFill>
                   <a:srgbClr val="2B2B2B"/>
                 </a:solidFill>
@@ -5773,26 +4752,26 @@
                 <a:ea typeface="Meiryo UI" pitchFamily="34" charset="-122"/>
                 <a:cs typeface="Meiryo UI" pitchFamily="34" charset="-120"/>
               </a:rPr>
-              <a:t>植毛100名の業務分解完了/役員中間報告(ボトルネック仮説)</a:t>
-            </a:r>
-            <a:endParaRPr lang="en-US" sz="680" dirty="0"/>
+              <a:t>台帳第1版(植毛115名分)+役員中間報告: 踏み込みスコープ論点を正式上程</a:t>
+            </a:r>
+            <a:endParaRPr lang="en-US" sz="650" dirty="0"/>
           </a:p>
         </p:txBody>
       </p:sp>
       <p:sp>
         <p:nvSpPr>
-          <p:cNvPr id="37" name="Shape 34"/>
-          <p:cNvSpPr/>
-          <p:nvPr/>
-        </p:nvSpPr>
-        <p:spPr>
-          <a:xfrm>
-            <a:off x="6085332" y="5230368"/>
-            <a:ext cx="1879092" cy="969264"/>
+          <p:cNvPr id="57" name="Shape 54"/>
+          <p:cNvSpPr/>
+          <p:nvPr/>
+        </p:nvSpPr>
+        <p:spPr>
+          <a:xfrm>
+            <a:off x="4133088" y="5687568"/>
+            <a:ext cx="1879092" cy="786384"/>
           </a:xfrm>
           <a:prstGeom prst="roundRect">
             <a:avLst>
-              <a:gd name="adj" fmla="val 3774"/>
+              <a:gd name="adj" fmla="val 4651"/>
             </a:avLst>
           </a:prstGeom>
           <a:solidFill>
@@ -5808,14 +4787,14 @@
       </p:sp>
       <p:sp>
         <p:nvSpPr>
-          <p:cNvPr id="38" name="Text 35"/>
-          <p:cNvSpPr/>
-          <p:nvPr/>
-        </p:nvSpPr>
-        <p:spPr>
-          <a:xfrm>
-            <a:off x="6158484" y="5266944"/>
-            <a:ext cx="1732788" cy="182880"/>
+          <p:cNvPr id="58" name="Text 55"/>
+          <p:cNvSpPr/>
+          <p:nvPr/>
+        </p:nvSpPr>
+        <p:spPr>
+          <a:xfrm>
+            <a:off x="4206240" y="5715000"/>
+            <a:ext cx="1732788" cy="164592"/>
           </a:xfrm>
           <a:prstGeom prst="rect">
             <a:avLst/>
@@ -5831,7 +4810,7 @@
               <a:buNone/>
             </a:pPr>
             <a:r>
-              <a:rPr lang="en-US" sz="900" b="1" dirty="0">
+              <a:rPr lang="en-US" sz="850" b="1" dirty="0">
                 <a:solidFill>
                   <a:srgbClr val="1F3D20"/>
                 </a:solidFill>
@@ -5839,22 +4818,22 @@
                 <a:ea typeface="Meiryo UI" pitchFamily="34" charset="-122"/>
                 <a:cs typeface="Meiryo UI" pitchFamily="34" charset="-120"/>
               </a:rPr>
-              <a:t>11月</a:t>
-            </a:r>
-            <a:endParaRPr lang="en-US" sz="900" dirty="0"/>
+              <a:t>26/12</a:t>
+            </a:r>
+            <a:endParaRPr lang="en-US" sz="850" dirty="0"/>
           </a:p>
         </p:txBody>
       </p:sp>
       <p:sp>
         <p:nvSpPr>
-          <p:cNvPr id="39" name="Text 36"/>
-          <p:cNvSpPr/>
-          <p:nvPr/>
-        </p:nvSpPr>
-        <p:spPr>
-          <a:xfrm>
-            <a:off x="6158484" y="5468112"/>
-            <a:ext cx="1732788" cy="676656"/>
+          <p:cNvPr id="59" name="Text 56"/>
+          <p:cNvSpPr/>
+          <p:nvPr/>
+        </p:nvSpPr>
+        <p:spPr>
+          <a:xfrm>
+            <a:off x="4206240" y="5888736"/>
+            <a:ext cx="1732788" cy="539496"/>
           </a:xfrm>
           <a:prstGeom prst="rect">
             <a:avLst/>
@@ -5868,12 +4847,12 @@
           <a:p>
             <a:pPr indent="0" marL="0">
               <a:lnSpc>
-                <a:spcPct val="102000"/>
+                <a:spcPct val="100000"/>
               </a:lnSpc>
               <a:buNone/>
             </a:pPr>
             <a:r>
-              <a:rPr lang="en-US" sz="680" dirty="0">
+              <a:rPr lang="en-US" sz="650" dirty="0">
                 <a:solidFill>
                   <a:srgbClr val="2B2B2B"/>
                 </a:solidFill>
@@ -5881,26 +4860,26 @@
                 <a:ea typeface="Meiryo UI" pitchFamily="34" charset="-122"/>
                 <a:cs typeface="Meiryo UI" pitchFamily="34" charset="-120"/>
               </a:rPr>
-              <a:t>効果試算(OEE正味影響)/規定改定案ドラフト</a:t>
-            </a:r>
-            <a:endParaRPr lang="en-US" sz="680" dirty="0"/>
+              <a:t>改定方針合意・ボトルネック特定完了。AI要件定義を「改定後基準前提」で開始(ゲート)</a:t>
+            </a:r>
+            <a:endParaRPr lang="en-US" sz="650" dirty="0"/>
           </a:p>
         </p:txBody>
       </p:sp>
       <p:sp>
         <p:nvSpPr>
-          <p:cNvPr id="40" name="Shape 37"/>
-          <p:cNvSpPr/>
-          <p:nvPr/>
-        </p:nvSpPr>
-        <p:spPr>
-          <a:xfrm>
-            <a:off x="8037576" y="5230368"/>
-            <a:ext cx="1879092" cy="969264"/>
+          <p:cNvPr id="60" name="Shape 57"/>
+          <p:cNvSpPr/>
+          <p:nvPr/>
+        </p:nvSpPr>
+        <p:spPr>
+          <a:xfrm>
+            <a:off x="6085332" y="5687568"/>
+            <a:ext cx="1879092" cy="786384"/>
           </a:xfrm>
           <a:prstGeom prst="roundRect">
             <a:avLst>
-              <a:gd name="adj" fmla="val 3774"/>
+              <a:gd name="adj" fmla="val 4651"/>
             </a:avLst>
           </a:prstGeom>
           <a:solidFill>
@@ -5916,14 +4895,14 @@
       </p:sp>
       <p:sp>
         <p:nvSpPr>
-          <p:cNvPr id="41" name="Text 38"/>
-          <p:cNvSpPr/>
-          <p:nvPr/>
-        </p:nvSpPr>
-        <p:spPr>
-          <a:xfrm>
-            <a:off x="8110728" y="5266944"/>
-            <a:ext cx="1732788" cy="182880"/>
+          <p:cNvPr id="61" name="Text 58"/>
+          <p:cNvSpPr/>
+          <p:nvPr/>
+        </p:nvSpPr>
+        <p:spPr>
+          <a:xfrm>
+            <a:off x="6158484" y="5715000"/>
+            <a:ext cx="1732788" cy="164592"/>
           </a:xfrm>
           <a:prstGeom prst="rect">
             <a:avLst/>
@@ -5939,7 +4918,7 @@
               <a:buNone/>
             </a:pPr>
             <a:r>
-              <a:rPr lang="en-US" sz="900" b="1" dirty="0">
+              <a:rPr lang="en-US" sz="850" b="1" dirty="0">
                 <a:solidFill>
                   <a:srgbClr val="1F3D20"/>
                 </a:solidFill>
@@ -5947,22 +4926,22 @@
                 <a:ea typeface="Meiryo UI" pitchFamily="34" charset="-122"/>
                 <a:cs typeface="Meiryo UI" pitchFamily="34" charset="-120"/>
               </a:rPr>
-              <a:t>12月</a:t>
-            </a:r>
-            <a:endParaRPr lang="en-US" sz="900" dirty="0"/>
+              <a:t>27/6</a:t>
+            </a:r>
+            <a:endParaRPr lang="en-US" sz="850" dirty="0"/>
           </a:p>
         </p:txBody>
       </p:sp>
       <p:sp>
         <p:nvSpPr>
-          <p:cNvPr id="42" name="Text 39"/>
-          <p:cNvSpPr/>
-          <p:nvPr/>
-        </p:nvSpPr>
-        <p:spPr>
-          <a:xfrm>
-            <a:off x="8110728" y="5468112"/>
-            <a:ext cx="1732788" cy="676656"/>
+          <p:cNvPr id="62" name="Text 59"/>
+          <p:cNvSpPr/>
+          <p:nvPr/>
+        </p:nvSpPr>
+        <p:spPr>
+          <a:xfrm>
+            <a:off x="6158484" y="5888736"/>
+            <a:ext cx="1732788" cy="539496"/>
           </a:xfrm>
           <a:prstGeom prst="rect">
             <a:avLst/>
@@ -5976,12 +4955,12 @@
           <a:p>
             <a:pPr indent="0" marL="0">
               <a:lnSpc>
-                <a:spcPct val="102000"/>
+                <a:spcPct val="100000"/>
               </a:lnSpc>
               <a:buNone/>
             </a:pPr>
             <a:r>
-              <a:rPr lang="en-US" sz="680" dirty="0">
+              <a:rPr lang="en-US" sz="650" dirty="0">
                 <a:solidFill>
                   <a:srgbClr val="2B2B2B"/>
                 </a:solidFill>
@@ -5989,26 +4968,134 @@
                 <a:ea typeface="Meiryo UI" pitchFamily="34" charset="-122"/>
                 <a:cs typeface="Meiryo UI" pitchFamily="34" charset="-120"/>
               </a:rPr>
-              <a:t>ボトルネック特定・優先順位確定→自動化・自律化テーマへ合流</a:t>
-            </a:r>
-            <a:endParaRPr lang="en-US" sz="680" dirty="0"/>
+              <a:t>規定改定第1弾施行+プロセス改善 → ▲10名規模を投資ゼロで先行実現</a:t>
+            </a:r>
+            <a:endParaRPr lang="en-US" sz="650" dirty="0"/>
           </a:p>
         </p:txBody>
       </p:sp>
       <p:sp>
         <p:nvSpPr>
-          <p:cNvPr id="43" name="Shape 40"/>
-          <p:cNvSpPr/>
-          <p:nvPr/>
-        </p:nvSpPr>
-        <p:spPr>
-          <a:xfrm>
-            <a:off x="9989820" y="5230368"/>
-            <a:ext cx="1879092" cy="969264"/>
+          <p:cNvPr id="63" name="Shape 60"/>
+          <p:cNvSpPr/>
+          <p:nvPr/>
+        </p:nvSpPr>
+        <p:spPr>
+          <a:xfrm>
+            <a:off x="8037576" y="5687568"/>
+            <a:ext cx="1879092" cy="786384"/>
           </a:xfrm>
           <a:prstGeom prst="roundRect">
             <a:avLst>
-              <a:gd name="adj" fmla="val 3774"/>
+              <a:gd name="adj" fmla="val 4651"/>
+            </a:avLst>
+          </a:prstGeom>
+          <a:solidFill>
+            <a:srgbClr val="F3F8F1"/>
+          </a:solidFill>
+          <a:ln w="9525">
+            <a:solidFill>
+              <a:srgbClr val="C9DCC4"/>
+            </a:solidFill>
+            <a:prstDash val="solid"/>
+          </a:ln>
+        </p:spPr>
+      </p:sp>
+      <p:sp>
+        <p:nvSpPr>
+          <p:cNvPr id="64" name="Text 61"/>
+          <p:cNvSpPr/>
+          <p:nvPr/>
+        </p:nvSpPr>
+        <p:spPr>
+          <a:xfrm>
+            <a:off x="8110728" y="5715000"/>
+            <a:ext cx="1732788" cy="164592"/>
+          </a:xfrm>
+          <a:prstGeom prst="rect">
+            <a:avLst/>
+          </a:prstGeom>
+          <a:noFill/>
+          <a:ln/>
+        </p:spPr>
+        <p:txBody>
+          <a:bodyPr wrap="square" lIns="0" tIns="0" rIns="0" bIns="0" rtlCol="0" anchor="ctr"/>
+          <a:lstStyle/>
+          <a:p>
+            <a:pPr indent="0" marL="0">
+              <a:buNone/>
+            </a:pPr>
+            <a:r>
+              <a:rPr lang="en-US" sz="850" b="1" dirty="0">
+                <a:solidFill>
+                  <a:srgbClr val="1F3D20"/>
+                </a:solidFill>
+                <a:latin typeface="Meiryo UI" pitchFamily="34" charset="0"/>
+                <a:ea typeface="Meiryo UI" pitchFamily="34" charset="-122"/>
+                <a:cs typeface="Meiryo UI" pitchFamily="34" charset="-120"/>
+              </a:rPr>
+              <a:t>27〜29</a:t>
+            </a:r>
+            <a:endParaRPr lang="en-US" sz="850" dirty="0"/>
+          </a:p>
+        </p:txBody>
+      </p:sp>
+      <p:sp>
+        <p:nvSpPr>
+          <p:cNvPr id="65" name="Text 62"/>
+          <p:cNvSpPr/>
+          <p:nvPr/>
+        </p:nvSpPr>
+        <p:spPr>
+          <a:xfrm>
+            <a:off x="8110728" y="5888736"/>
+            <a:ext cx="1732788" cy="539496"/>
+          </a:xfrm>
+          <a:prstGeom prst="rect">
+            <a:avLst/>
+          </a:prstGeom>
+          <a:noFill/>
+          <a:ln/>
+        </p:spPr>
+        <p:txBody>
+          <a:bodyPr wrap="square" lIns="0" tIns="0" rIns="0" bIns="0" rtlCol="0" anchor="t"/>
+          <a:lstStyle/>
+          <a:p>
+            <a:pPr indent="0" marL="0">
+              <a:lnSpc>
+                <a:spcPct val="100000"/>
+              </a:lnSpc>
+              <a:buNone/>
+            </a:pPr>
+            <a:r>
+              <a:rPr lang="en-US" sz="650" dirty="0">
+                <a:solidFill>
+                  <a:srgbClr val="2B2B2B"/>
+                </a:solidFill>
+                <a:latin typeface="Meiryo UI" pitchFamily="34" charset="0"/>
+                <a:ea typeface="Meiryo UI" pitchFamily="34" charset="-122"/>
+                <a:cs typeface="Meiryo UI" pitchFamily="34" charset="-120"/>
+              </a:rPr>
+              <a:t>フィジカルAI・自動検査PoC→実装。踏み込み改定第2弾施行</a:t>
+            </a:r>
+            <a:endParaRPr lang="en-US" sz="650" dirty="0"/>
+          </a:p>
+        </p:txBody>
+      </p:sp>
+      <p:sp>
+        <p:nvSpPr>
+          <p:cNvPr id="66" name="Shape 63"/>
+          <p:cNvSpPr/>
+          <p:nvPr/>
+        </p:nvSpPr>
+        <p:spPr>
+          <a:xfrm>
+            <a:off x="9989820" y="5687568"/>
+            <a:ext cx="1879092" cy="786384"/>
+          </a:xfrm>
+          <a:prstGeom prst="roundRect">
+            <a:avLst>
+              <a:gd name="adj" fmla="val 4651"/>
             </a:avLst>
           </a:prstGeom>
           <a:solidFill>
@@ -6024,14 +5111,14 @@
       </p:sp>
       <p:sp>
         <p:nvSpPr>
-          <p:cNvPr id="44" name="Text 41"/>
-          <p:cNvSpPr/>
-          <p:nvPr/>
-        </p:nvSpPr>
-        <p:spPr>
-          <a:xfrm>
-            <a:off x="10062972" y="5266944"/>
-            <a:ext cx="1732788" cy="182880"/>
+          <p:cNvPr id="67" name="Text 64"/>
+          <p:cNvSpPr/>
+          <p:nvPr/>
+        </p:nvSpPr>
+        <p:spPr>
+          <a:xfrm>
+            <a:off x="10062972" y="5715000"/>
+            <a:ext cx="1732788" cy="164592"/>
           </a:xfrm>
           <a:prstGeom prst="rect">
             <a:avLst/>
@@ -6047,7 +5134,7 @@
               <a:buNone/>
             </a:pPr>
             <a:r>
-              <a:rPr lang="en-US" sz="900" b="1" dirty="0">
+              <a:rPr lang="en-US" sz="850" b="1" dirty="0">
                 <a:solidFill>
                   <a:srgbClr val="FFFFFF"/>
                 </a:solidFill>
@@ -6055,22 +5142,22 @@
                 <a:ea typeface="Meiryo UI" pitchFamily="34" charset="-122"/>
                 <a:cs typeface="Meiryo UI" pitchFamily="34" charset="-120"/>
               </a:rPr>
-              <a:t>27年〜</a:t>
-            </a:r>
-            <a:endParaRPr lang="en-US" sz="900" dirty="0"/>
+              <a:t>30年</a:t>
+            </a:r>
+            <a:endParaRPr lang="en-US" sz="850" dirty="0"/>
           </a:p>
         </p:txBody>
       </p:sp>
       <p:sp>
         <p:nvSpPr>
-          <p:cNvPr id="45" name="Text 42"/>
-          <p:cNvSpPr/>
-          <p:nvPr/>
-        </p:nvSpPr>
-        <p:spPr>
-          <a:xfrm>
-            <a:off x="10062972" y="5468112"/>
-            <a:ext cx="1732788" cy="676656"/>
+          <p:cNvPr id="68" name="Text 65"/>
+          <p:cNvSpPr/>
+          <p:nvPr/>
+        </p:nvSpPr>
+        <p:spPr>
+          <a:xfrm>
+            <a:off x="10062972" y="5888736"/>
+            <a:ext cx="1732788" cy="539496"/>
           </a:xfrm>
           <a:prstGeom prst="rect">
             <a:avLst/>
@@ -6084,12 +5171,12 @@
           <a:p>
             <a:pPr indent="0" marL="0">
               <a:lnSpc>
-                <a:spcPct val="102000"/>
+                <a:spcPct val="100000"/>
               </a:lnSpc>
               <a:buNone/>
             </a:pPr>
             <a:r>
-              <a:rPr lang="en-US" sz="680" dirty="0">
+              <a:rPr lang="en-US" sz="650" dirty="0">
                 <a:solidFill>
                   <a:srgbClr val="FFFFFF"/>
                 </a:solidFill>
@@ -6097,22 +5184,22 @@
                 <a:ea typeface="Meiryo UI" pitchFamily="34" charset="-122"/>
                 <a:cs typeface="Meiryo UI" pitchFamily="34" charset="-120"/>
               </a:rPr>
-              <a:t>PoC実行(フィジカルAI・自動検査)/規定改定第1弾(27/3)→30年KGI+20%</a:t>
-            </a:r>
-            <a:endParaRPr lang="en-US" sz="680" dirty="0"/>
+              <a:t>植毛57名・工場264名・KGI一人当たり生産金額+20%達成</a:t>
+            </a:r>
+            <a:endParaRPr lang="en-US" sz="650" dirty="0"/>
           </a:p>
         </p:txBody>
       </p:sp>
       <p:sp>
         <p:nvSpPr>
-          <p:cNvPr id="46" name="Text 43"/>
-          <p:cNvSpPr/>
-          <p:nvPr/>
-        </p:nvSpPr>
-        <p:spPr>
-          <a:xfrm>
-            <a:off x="228600" y="6327648"/>
-            <a:ext cx="11731752" cy="365760"/>
+          <p:cNvPr id="69" name="Text 66"/>
+          <p:cNvSpPr/>
+          <p:nvPr/>
+        </p:nvSpPr>
+        <p:spPr>
+          <a:xfrm>
+            <a:off x="228600" y="6528816"/>
+            <a:ext cx="11731752" cy="274320"/>
           </a:xfrm>
           <a:prstGeom prst="rect">
             <a:avLst/>
@@ -6128,7 +5215,7 @@
               <a:buNone/>
             </a:pPr>
             <a:r>
-              <a:rPr lang="en-US" sz="650" dirty="0">
+              <a:rPr lang="en-US" sz="630" dirty="0">
                 <a:solidFill>
                   <a:srgbClr val="595959"/>
                 </a:solidFill>
@@ -6136,9 +5223,9 @@
                 <a:ea typeface="Meiryo UI" pitchFamily="34" charset="-122"/>
                 <a:cs typeface="Meiryo UI" pitchFamily="34" charset="-120"/>
               </a:rPr>
-              <a:t>※ 効果人数・金額は仮説値(人件費5百万円/人・年で換算、フィジカルAIロードマップの▲1〜2名=5〜10百万円/年より逆算)。Phase 1調査で検証・確定。 出典: 社内資料(生産技術戦略会議骨子案・フィジカルAI効果見積もり・7/23役員打合せメモ・6/10デジ戦打合せ)+公開情報(Vision2030 2nd STAGE)</a:t>
-            </a:r>
-            <a:endParaRPr lang="en-US" sz="650" dirty="0"/>
+              <a:t>※ 効果人数・金額は仮説値(人件費5百万円/人・年で換算)。台帳完成(26/10)後に検証・確定。 出典: 社内資料(人事業務 経営リスク低減・業務効率化 役員会議資料 2025/5・生産技術戦略会議骨子案・フィジカルAI効果見積もり・7/23役員打合せメモ・6/10デジ戦打合せ)+公開情報(Vision2030 2nd STAGE)</a:t>
+            </a:r>
+            <a:endParaRPr lang="en-US" sz="630" dirty="0"/>
           </a:p>
         </p:txBody>
       </p:sp>

--- a/docs/bottleneck-survey-onepager.pptx
+++ b/docs/bottleneck-survey-onepager.pptx
@@ -1420,7 +1420,7 @@
                 <a:ea typeface="Meiryo UI" pitchFamily="34" charset="-122"/>
                 <a:cs typeface="Meiryo UI" pitchFamily="34" charset="-120"/>
               </a:rPr>
-              <a:t>工場の要員数＝基準・規定が要求する作業の総和。Howから入れば「存在すべきでない作業の自動化」＝人事PJTの「スリム化前のアウトソーシングで工数増大」と同じ失敗 ⇒ フィジカルAIの要件凍結は台帳完成後(26/12)まで待つゲート制</a:t>
+              <a:t>工場の要員数＝基準・規定が要求する作業の総和 —「デジタル以前に業務量自体を見直す」。Howから入れば人事PJT「スリム化前のアウトソーシングで工数増大」と同じ失敗 ⇒ フィジカルAI要件凍結は台帳完成後(26/12)のゲート制</a:t>
             </a:r>
             <a:endParaRPr lang="en-US" sz="730" dirty="0"/>
           </a:p>
@@ -3032,7 +3032,7 @@
                           <a:ea typeface="Meiryo UI" pitchFamily="34" charset="-122"/>
                           <a:cs typeface="Meiryo UI" pitchFamily="34" charset="-120"/>
                         </a:rPr>
-                        <a:t>改定後基準を前提にECRSで工程再設計。B停止の原因潰し込みで半減・復旧標準化・段替えSMED・A停止(前準備/後片付け)再設計で効果の食い潰し防止</a:t>
+                        <a:t>改定後基準を前提にECRSで再設計。B停止の原因潰し込み・復旧標準化・SMED・A停止再設計で効果の食い潰し防止。重複削除(二重検査/重複記録)・セルフ化(源流管理/自主保全)・集約化(監視/供給/QA共通化)・権限委譲(復旧承認の現場化)を網羅適用</a:t>
                       </a:r>
                       <a:endParaRPr lang="en-US" sz="690" dirty="0">
                         <a:latin typeface="Meiryo UI" charset="0"/>
@@ -3383,7 +3383,7 @@
                           <a:ea typeface="Meiryo UI" pitchFamily="34" charset="-122"/>
                           <a:cs typeface="Meiryo UI" pitchFamily="34" charset="-120"/>
                         </a:rPr>
-                        <a:t>残存作業のみに人/フィジカルAI(供給・箱詰)/自動検査装置/AMRを最適割当て。要件は「改定後の基準・プロセス」を前提に凍結(Fit to Standard・カスタム開発最小化)</a:t>
+                        <a:t>残存作業のみに人/フィジカルAI(供給・箱詰)/自動検査装置/AMRを最適割当て。要件は「改定後の基準・プロセス」を前提に凍結(Fit to Standard)。非コア業務の外部化はスリム化後に判断</a:t>
                       </a:r>
                       <a:endParaRPr lang="en-US" sz="690" dirty="0">
                         <a:latin typeface="Meiryo UI" charset="0"/>
@@ -4410,7 +4410,7 @@
                 <a:ea typeface="Meiryo UI" pitchFamily="34" charset="-122"/>
                 <a:cs typeface="Meiryo UI" pitchFamily="34" charset="-120"/>
               </a:rPr>
-              <a:t>全作業(ワークサンプリング+簡易カメラ)×要求元規定×A〜E分類×品質実績整合×改定方針×改定後の実行手段。人事PJT「課題18件一覧」の生産版。調査=この台帳を完成させる活動</a:t>
+              <a:t>全作業×要求元規定×A〜E分類×品質実績整合×改定方針×実行手段(人事PJT「課題18件一覧」の生産版)。各作業に時間創出8レバー(廃止/簡素化/重複削除/自動化/セルフ化/集約化/権限委譲/外部化)を照合し、効果の高い順に施策を一覧化=現実解の整理</a:t>
             </a:r>
             <a:endParaRPr lang="en-US" sz="680" dirty="0"/>
           </a:p>
@@ -4644,7 +4644,7 @@
                 <a:ea typeface="Meiryo UI" pitchFamily="34" charset="-122"/>
                 <a:cs typeface="Meiryo UI" pitchFamily="34" charset="-120"/>
               </a:rPr>
-              <a:t>3チーム組成(オーナー: 内藤本部長/PMO: 生技セ戦略統括T)・調査設計</a:t>
+              <a:t>3チーム組成(オーナー:内藤本部長/PMO:生技セ)・現状施策の棚卸し(二重投資排除)・調査設計</a:t>
             </a:r>
             <a:endParaRPr lang="en-US" sz="650" dirty="0"/>
           </a:p>
